--- a/自身の研究/大学院での研究/修士論文進捗発表.pptx
+++ b/自身の研究/大学院での研究/修士論文進捗発表.pptx
@@ -5,10 +5,10 @@
     <p:sldMasterId id="2147483684" r:id="rId1"/>
   </p:sldMasterIdLst>
   <p:notesMasterIdLst>
-    <p:notesMasterId r:id="rId13"/>
+    <p:notesMasterId r:id="rId10"/>
   </p:notesMasterIdLst>
   <p:handoutMasterIdLst>
-    <p:handoutMasterId r:id="rId14"/>
+    <p:handoutMasterId r:id="rId11"/>
   </p:handoutMasterIdLst>
   <p:sldIdLst>
     <p:sldId id="272" r:id="rId2"/>
@@ -17,11 +17,8 @@
     <p:sldId id="280" r:id="rId5"/>
     <p:sldId id="281" r:id="rId6"/>
     <p:sldId id="282" r:id="rId7"/>
-    <p:sldId id="275" r:id="rId8"/>
-    <p:sldId id="276" r:id="rId9"/>
-    <p:sldId id="277" r:id="rId10"/>
-    <p:sldId id="278" r:id="rId11"/>
-    <p:sldId id="279" r:id="rId12"/>
+    <p:sldId id="283" r:id="rId8"/>
+    <p:sldId id="284" r:id="rId9"/>
   </p:sldIdLst>
   <p:sldSz cx="12192000" cy="6858000"/>
   <p:notesSz cx="6858000" cy="9144000"/>
@@ -219,7 +216,7 @@
                 <a:latin typeface="Meiryo UI" panose="020B0604030504040204" pitchFamily="50" charset="-128"/>
                 <a:ea typeface="Meiryo UI" panose="020B0604030504040204" pitchFamily="50" charset="-128"/>
               </a:rPr>
-              <a:t>2026年6月16日</a:t>
+              <a:t>2026年6月17日</a:t>
             </a:fld>
             <a:endParaRPr kumimoji="1" lang="ja-JP" altLang="en-US" dirty="0">
               <a:latin typeface="Meiryo UI" panose="020B0604030504040204" pitchFamily="50" charset="-128"/>
@@ -403,7 +400,7 @@
             <a:fld id="{EECA54F6-A409-4052-BA8C-D33E3AF8AD29}" type="datetime4">
               <a:rPr lang="ja-JP" altLang="en-US" smtClean="0"/>
               <a:pPr/>
-              <a:t>2026年6月16日</a:t>
+              <a:t>2026年6月17日</a:t>
             </a:fld>
             <a:endParaRPr lang="ja-JP" altLang="en-US" dirty="0"/>
           </a:p>
@@ -805,194 +802,6 @@
 </p:notes>
 </file>
 
-<file path=ppt/notesSlides/notesSlide10.xml><?xml version="1.0" encoding="utf-8"?>
-<p:notes xmlns:a="http://schemas.openxmlformats.org/drawingml/2006/main" xmlns:r="http://schemas.openxmlformats.org/officeDocument/2006/relationships" xmlns:p="http://schemas.openxmlformats.org/presentationml/2006/main">
-  <p:cSld>
-    <p:spTree>
-      <p:nvGrpSpPr>
-        <p:cNvPr id="1" name=""/>
-        <p:cNvGrpSpPr/>
-        <p:nvPr/>
-      </p:nvGrpSpPr>
-      <p:grpSpPr>
-        <a:xfrm>
-          <a:off x="0" y="0"/>
-          <a:ext cx="0" cy="0"/>
-          <a:chOff x="0" y="0"/>
-          <a:chExt cx="0" cy="0"/>
-        </a:xfrm>
-      </p:grpSpPr>
-      <p:sp>
-        <p:nvSpPr>
-          <p:cNvPr id="2" name="スライド イメージ プレースホルダー 1"/>
-          <p:cNvSpPr>
-            <a:spLocks noGrp="1" noRot="1" noChangeAspect="1"/>
-          </p:cNvSpPr>
-          <p:nvPr>
-            <p:ph type="sldImg"/>
-          </p:nvPr>
-        </p:nvSpPr>
-        <p:spPr/>
-      </p:sp>
-      <p:sp>
-        <p:nvSpPr>
-          <p:cNvPr id="3" name="ノート プレースホルダー 2"/>
-          <p:cNvSpPr>
-            <a:spLocks noGrp="1"/>
-          </p:cNvSpPr>
-          <p:nvPr>
-            <p:ph type="body" idx="1"/>
-          </p:nvPr>
-        </p:nvSpPr>
-        <p:spPr/>
-        <p:txBody>
-          <a:bodyPr/>
-          <a:lstStyle/>
-          <a:p>
-            <a:endParaRPr kumimoji="1" lang="ja-JP" altLang="en-US" dirty="0">
-              <a:latin typeface="Meiryo UI" panose="020B0604030504040204" pitchFamily="50" charset="-128"/>
-              <a:ea typeface="Meiryo UI" panose="020B0604030504040204" pitchFamily="50" charset="-128"/>
-            </a:endParaRPr>
-          </a:p>
-        </p:txBody>
-      </p:sp>
-      <p:sp>
-        <p:nvSpPr>
-          <p:cNvPr id="4" name="スライド番号プレースホルダー 3"/>
-          <p:cNvSpPr>
-            <a:spLocks noGrp="1"/>
-          </p:cNvSpPr>
-          <p:nvPr>
-            <p:ph type="sldNum" sz="quarter" idx="10"/>
-          </p:nvPr>
-        </p:nvSpPr>
-        <p:spPr/>
-        <p:txBody>
-          <a:bodyPr/>
-          <a:lstStyle/>
-          <a:p>
-            <a:pPr rtl="0"/>
-            <a:fld id="{893B0CF2-7F87-4E02-A248-870047730F99}" type="slidenum">
-              <a:rPr lang="en-US" altLang="ja-JP" smtClean="0">
-                <a:latin typeface="Meiryo UI" panose="020B0604030504040204" pitchFamily="50" charset="-128"/>
-                <a:ea typeface="Meiryo UI" panose="020B0604030504040204" pitchFamily="50" charset="-128"/>
-              </a:rPr>
-              <a:t>10</a:t>
-            </a:fld>
-            <a:endParaRPr lang="ja-JP" altLang="en-US" dirty="0">
-              <a:latin typeface="Meiryo UI" panose="020B0604030504040204" pitchFamily="50" charset="-128"/>
-              <a:ea typeface="Meiryo UI" panose="020B0604030504040204" pitchFamily="50" charset="-128"/>
-            </a:endParaRPr>
-          </a:p>
-        </p:txBody>
-      </p:sp>
-    </p:spTree>
-    <p:extLst>
-      <p:ext uri="{BB962C8B-B14F-4D97-AF65-F5344CB8AC3E}">
-        <p14:creationId xmlns:p14="http://schemas.microsoft.com/office/powerpoint/2010/main" val="56100311"/>
-      </p:ext>
-    </p:extLst>
-  </p:cSld>
-  <p:clrMapOvr>
-    <a:masterClrMapping/>
-  </p:clrMapOvr>
-</p:notes>
-</file>
-
-<file path=ppt/notesSlides/notesSlide11.xml><?xml version="1.0" encoding="utf-8"?>
-<p:notes xmlns:a="http://schemas.openxmlformats.org/drawingml/2006/main" xmlns:r="http://schemas.openxmlformats.org/officeDocument/2006/relationships" xmlns:p="http://schemas.openxmlformats.org/presentationml/2006/main">
-  <p:cSld>
-    <p:spTree>
-      <p:nvGrpSpPr>
-        <p:cNvPr id="1" name=""/>
-        <p:cNvGrpSpPr/>
-        <p:nvPr/>
-      </p:nvGrpSpPr>
-      <p:grpSpPr>
-        <a:xfrm>
-          <a:off x="0" y="0"/>
-          <a:ext cx="0" cy="0"/>
-          <a:chOff x="0" y="0"/>
-          <a:chExt cx="0" cy="0"/>
-        </a:xfrm>
-      </p:grpSpPr>
-      <p:sp>
-        <p:nvSpPr>
-          <p:cNvPr id="2" name="スライド イメージ プレースホルダー 1"/>
-          <p:cNvSpPr>
-            <a:spLocks noGrp="1" noRot="1" noChangeAspect="1"/>
-          </p:cNvSpPr>
-          <p:nvPr>
-            <p:ph type="sldImg"/>
-          </p:nvPr>
-        </p:nvSpPr>
-        <p:spPr/>
-      </p:sp>
-      <p:sp>
-        <p:nvSpPr>
-          <p:cNvPr id="3" name="ノート プレースホルダー 2"/>
-          <p:cNvSpPr>
-            <a:spLocks noGrp="1"/>
-          </p:cNvSpPr>
-          <p:nvPr>
-            <p:ph type="body" idx="1"/>
-          </p:nvPr>
-        </p:nvSpPr>
-        <p:spPr/>
-        <p:txBody>
-          <a:bodyPr/>
-          <a:lstStyle/>
-          <a:p>
-            <a:endParaRPr kumimoji="1" lang="ja-JP" altLang="en-US" dirty="0">
-              <a:latin typeface="Meiryo UI" panose="020B0604030504040204" pitchFamily="50" charset="-128"/>
-              <a:ea typeface="Meiryo UI" panose="020B0604030504040204" pitchFamily="50" charset="-128"/>
-            </a:endParaRPr>
-          </a:p>
-        </p:txBody>
-      </p:sp>
-      <p:sp>
-        <p:nvSpPr>
-          <p:cNvPr id="4" name="スライド番号プレースホルダー 3"/>
-          <p:cNvSpPr>
-            <a:spLocks noGrp="1"/>
-          </p:cNvSpPr>
-          <p:nvPr>
-            <p:ph type="sldNum" sz="quarter" idx="10"/>
-          </p:nvPr>
-        </p:nvSpPr>
-        <p:spPr/>
-        <p:txBody>
-          <a:bodyPr/>
-          <a:lstStyle/>
-          <a:p>
-            <a:pPr rtl="0"/>
-            <a:fld id="{893B0CF2-7F87-4E02-A248-870047730F99}" type="slidenum">
-              <a:rPr lang="en-US" altLang="ja-JP" smtClean="0">
-                <a:latin typeface="Meiryo UI" panose="020B0604030504040204" pitchFamily="50" charset="-128"/>
-                <a:ea typeface="Meiryo UI" panose="020B0604030504040204" pitchFamily="50" charset="-128"/>
-              </a:rPr>
-              <a:t>11</a:t>
-            </a:fld>
-            <a:endParaRPr lang="ja-JP" altLang="en-US" dirty="0">
-              <a:latin typeface="Meiryo UI" panose="020B0604030504040204" pitchFamily="50" charset="-128"/>
-              <a:ea typeface="Meiryo UI" panose="020B0604030504040204" pitchFamily="50" charset="-128"/>
-            </a:endParaRPr>
-          </a:p>
-        </p:txBody>
-      </p:sp>
-    </p:spTree>
-    <p:extLst>
-      <p:ext uri="{BB962C8B-B14F-4D97-AF65-F5344CB8AC3E}">
-        <p14:creationId xmlns:p14="http://schemas.microsoft.com/office/powerpoint/2010/main" val="3144907201"/>
-      </p:ext>
-    </p:extLst>
-  </p:cSld>
-  <p:clrMapOvr>
-    <a:masterClrMapping/>
-  </p:clrMapOvr>
-</p:notes>
-</file>
-
 <file path=ppt/notesSlides/notesSlide2.xml><?xml version="1.0" encoding="utf-8"?>
 <p:notes xmlns:a="http://schemas.openxmlformats.org/drawingml/2006/main" xmlns:r="http://schemas.openxmlformats.org/officeDocument/2006/relationships" xmlns:p="http://schemas.openxmlformats.org/presentationml/2006/main">
   <p:cSld>
@@ -2355,7 +2164,13 @@
   <p:cSld>
     <p:spTree>
       <p:nvGrpSpPr>
-        <p:cNvPr id="1" name=""/>
+        <p:cNvPr id="1" name="">
+          <a:extLst>
+            <a:ext uri="{FF2B5EF4-FFF2-40B4-BE49-F238E27FC236}">
+              <a16:creationId xmlns:a16="http://schemas.microsoft.com/office/drawing/2014/main" id="{4EC2EC3C-04C1-BE69-5F71-9E86886A6650}"/>
+            </a:ext>
+          </a:extLst>
+        </p:cNvPr>
         <p:cNvGrpSpPr/>
         <p:nvPr/>
       </p:nvGrpSpPr>
@@ -2369,7 +2184,13 @@
       </p:grpSpPr>
       <p:sp>
         <p:nvSpPr>
-          <p:cNvPr id="2" name="スライド イメージ プレースホルダー 1"/>
+          <p:cNvPr id="2" name="スライド イメージ プレースホルダー 1">
+            <a:extLst>
+              <a:ext uri="{FF2B5EF4-FFF2-40B4-BE49-F238E27FC236}">
+                <a16:creationId xmlns:a16="http://schemas.microsoft.com/office/drawing/2014/main" id="{781F0AAD-D5A9-3E5C-0AB2-30E9335D8CB0}"/>
+              </a:ext>
+            </a:extLst>
+          </p:cNvPr>
           <p:cNvSpPr>
             <a:spLocks noGrp="1" noRot="1" noChangeAspect="1"/>
           </p:cNvSpPr>
@@ -2381,7 +2202,13 @@
       </p:sp>
       <p:sp>
         <p:nvSpPr>
-          <p:cNvPr id="3" name="ノート プレースホルダー 2"/>
+          <p:cNvPr id="3" name="ノート プレースホルダー 2">
+            <a:extLst>
+              <a:ext uri="{FF2B5EF4-FFF2-40B4-BE49-F238E27FC236}">
+                <a16:creationId xmlns:a16="http://schemas.microsoft.com/office/drawing/2014/main" id="{276735A3-2247-28BB-308C-E56CF74C33F1}"/>
+              </a:ext>
+            </a:extLst>
+          </p:cNvPr>
           <p:cNvSpPr>
             <a:spLocks noGrp="1"/>
           </p:cNvSpPr>
@@ -2394,16 +2221,46 @@
           <a:bodyPr/>
           <a:lstStyle/>
           <a:p>
-            <a:endParaRPr kumimoji="1" lang="ja-JP" altLang="en-US" dirty="0">
-              <a:latin typeface="Meiryo UI" panose="020B0604030504040204" pitchFamily="50" charset="-128"/>
-              <a:ea typeface="Meiryo UI" panose="020B0604030504040204" pitchFamily="50" charset="-128"/>
-            </a:endParaRPr>
-          </a:p>
-        </p:txBody>
-      </p:sp>
-      <p:sp>
-        <p:nvSpPr>
-          <p:cNvPr id="4" name="スライド番号プレースホルダー 3"/>
+            <a:pPr fontAlgn="t"/>
+            <a:r>
+              <a:rPr lang="ja-JP" altLang="ja-JP" sz="1200" b="0" i="0" kern="1200" dirty="0">
+                <a:solidFill>
+                  <a:schemeClr val="tx1"/>
+                </a:solidFill>
+                <a:effectLst/>
+                <a:latin typeface="Meiryo UI" panose="020B0604030504040204" pitchFamily="50" charset="-128"/>
+                <a:ea typeface="Meiryo UI" panose="020B0604030504040204" pitchFamily="50" charset="-128"/>
+                <a:cs typeface="+mn-cs"/>
+              </a:rPr>
+              <a:t>そこで本研究では，児童がダークパターンに関する知識を，実際の意思決定場面で活用できるか，つまり内面化されているかを，現実に近いシミュレーション環境上での行動として評価できる「実践的評価環境」の構築を目的とします。既存研究では，シナリオ評価において講義前後の同一シナリオに対する選択結果，例えば押すか押さないかといった結果を指標として評価しています。また，アプリ評価においては，観察やインタビューを中心とした評価が行われています。そのため，知識が実際の行動として活用されているか，つまり回避行動として使えているかまでは判断できていません。</a:t>
+            </a:r>
+          </a:p>
+          <a:p>
+            <a:pPr fontAlgn="t"/>
+            <a:r>
+              <a:rPr lang="ja-JP" altLang="ja-JP" sz="1200" b="0" i="0" kern="1200" dirty="0">
+                <a:solidFill>
+                  <a:schemeClr val="tx1"/>
+                </a:solidFill>
+                <a:effectLst/>
+                <a:latin typeface="Meiryo UI" panose="020B0604030504040204" pitchFamily="50" charset="-128"/>
+                <a:ea typeface="Meiryo UI" panose="020B0604030504040204" pitchFamily="50" charset="-128"/>
+                <a:cs typeface="+mn-cs"/>
+              </a:rPr>
+              <a:t>そこで本研究では，その知識が実際に行動として活用されるかどうかに着目します。</a:t>
+            </a:r>
+          </a:p>
+        </p:txBody>
+      </p:sp>
+      <p:sp>
+        <p:nvSpPr>
+          <p:cNvPr id="4" name="スライド番号プレースホルダー 3">
+            <a:extLst>
+              <a:ext uri="{FF2B5EF4-FFF2-40B4-BE49-F238E27FC236}">
+                <a16:creationId xmlns:a16="http://schemas.microsoft.com/office/drawing/2014/main" id="{C33650C4-887F-5751-A30F-0E965FD655BF}"/>
+              </a:ext>
+            </a:extLst>
+          </p:cNvPr>
           <p:cNvSpPr>
             <a:spLocks noGrp="1"/>
           </p:cNvSpPr>
@@ -2434,7 +2291,7 @@
     </p:spTree>
     <p:extLst>
       <p:ext uri="{BB962C8B-B14F-4D97-AF65-F5344CB8AC3E}">
-        <p14:creationId xmlns:p14="http://schemas.microsoft.com/office/powerpoint/2010/main" val="1963582322"/>
+        <p14:creationId xmlns:p14="http://schemas.microsoft.com/office/powerpoint/2010/main" val="1680722013"/>
       </p:ext>
     </p:extLst>
   </p:cSld>
@@ -2449,7 +2306,13 @@
   <p:cSld>
     <p:spTree>
       <p:nvGrpSpPr>
-        <p:cNvPr id="1" name=""/>
+        <p:cNvPr id="1" name="">
+          <a:extLst>
+            <a:ext uri="{FF2B5EF4-FFF2-40B4-BE49-F238E27FC236}">
+              <a16:creationId xmlns:a16="http://schemas.microsoft.com/office/drawing/2014/main" id="{A36F1AAE-0FA9-A810-BE94-3AFF925601C5}"/>
+            </a:ext>
+          </a:extLst>
+        </p:cNvPr>
         <p:cNvGrpSpPr/>
         <p:nvPr/>
       </p:nvGrpSpPr>
@@ -2463,7 +2326,13 @@
       </p:grpSpPr>
       <p:sp>
         <p:nvSpPr>
-          <p:cNvPr id="2" name="スライド イメージ プレースホルダー 1"/>
+          <p:cNvPr id="2" name="スライド イメージ プレースホルダー 1">
+            <a:extLst>
+              <a:ext uri="{FF2B5EF4-FFF2-40B4-BE49-F238E27FC236}">
+                <a16:creationId xmlns:a16="http://schemas.microsoft.com/office/drawing/2014/main" id="{A6AD93E1-99A8-2213-03FC-D2987394578D}"/>
+              </a:ext>
+            </a:extLst>
+          </p:cNvPr>
           <p:cNvSpPr>
             <a:spLocks noGrp="1" noRot="1" noChangeAspect="1"/>
           </p:cNvSpPr>
@@ -2475,7 +2344,13 @@
       </p:sp>
       <p:sp>
         <p:nvSpPr>
-          <p:cNvPr id="3" name="ノート プレースホルダー 2"/>
+          <p:cNvPr id="3" name="ノート プレースホルダー 2">
+            <a:extLst>
+              <a:ext uri="{FF2B5EF4-FFF2-40B4-BE49-F238E27FC236}">
+                <a16:creationId xmlns:a16="http://schemas.microsoft.com/office/drawing/2014/main" id="{23998DA8-FA2A-BE34-FA07-5B68ED58041F}"/>
+              </a:ext>
+            </a:extLst>
+          </p:cNvPr>
           <p:cNvSpPr>
             <a:spLocks noGrp="1"/>
           </p:cNvSpPr>
@@ -2488,16 +2363,76 @@
           <a:bodyPr/>
           <a:lstStyle/>
           <a:p>
-            <a:endParaRPr kumimoji="1" lang="ja-JP" altLang="en-US" dirty="0">
+            <a:pPr fontAlgn="t"/>
+            <a:r>
+              <a:rPr lang="ja-JP" altLang="en-US" sz="1200" b="0" i="0" kern="1200" dirty="0">
+                <a:solidFill>
+                  <a:schemeClr val="tx1"/>
+                </a:solidFill>
+                <a:effectLst/>
+                <a:latin typeface="Meiryo UI" panose="020B0604030504040204" pitchFamily="50" charset="-128"/>
+                <a:ea typeface="Meiryo UI" panose="020B0604030504040204" pitchFamily="50" charset="-128"/>
+                <a:cs typeface="+mn-cs"/>
+              </a:rPr>
+              <a:t>研究手法として、</a:t>
+            </a:r>
+            <a:r>
+              <a:rPr lang="ja-JP" altLang="ja-JP" dirty="0"/>
+              <a:t>ダークパターン教育」と「実践的行動評価」をフェーズ分けし、児童の警戒意識と油断状態の双方からダークパターンへの反応を測定</a:t>
+            </a:r>
+            <a:r>
+              <a:rPr lang="ja-JP" altLang="en-US" dirty="0"/>
+              <a:t>します。手順としましてはまず</a:t>
+            </a:r>
+            <a:r>
+              <a:rPr lang="ja-JP" altLang="ja-JP" dirty="0"/>
+              <a:t>模擬のWeb環境のなかで、</a:t>
+            </a:r>
+            <a:r>
+              <a:rPr lang="ja-JP" altLang="en-US" dirty="0"/>
+              <a:t>説明後</a:t>
+            </a:r>
+            <a:r>
+              <a:rPr lang="ja-JP" altLang="ja-JP" dirty="0"/>
+              <a:t>児童が能動的にダークパターンを探索・識別</a:t>
+            </a:r>
+            <a:r>
+              <a:rPr lang="ja-JP" altLang="en-US" dirty="0"/>
+              <a:t>させます。探索終了後、その</a:t>
+            </a:r>
+            <a:r>
+              <a:rPr lang="en-US" altLang="ja-JP" dirty="0"/>
+              <a:t>UI</a:t>
+            </a:r>
+            <a:r>
+              <a:rPr lang="ja-JP" altLang="en-US" dirty="0"/>
+              <a:t>がユーザをどのように意図決定へ誘導するかその仕組みを解説し、知識を補強します。ここまでは既存研究と同じですが、この報酬獲得タスクにて、</a:t>
+            </a:r>
+            <a:r>
+              <a:rPr lang="ja-JP" altLang="ja-JP" dirty="0"/>
+              <a:t>教育の終了を伝えた直後に『学習報酬を受け取る・選ぶ』という、次の自然なステップへ画面を遷移させます。これにより、ユーザが『テストされている』という警戒心を解き、かつ報酬獲得という欲望が喚起された状態を作ります。この油断が生じている意思決定の瞬間に、あえて報酬画面の中にダークパターンを仕掛けます。 評価においては、単に騙されたか回避できたかという結果の正誤ではなく、罠に直面した際のボタンを押すまでの反応時間や、確認、離脱といった操作のプロセス（行動ログ）を測定します。 </a:t>
+            </a:r>
+            <a:endParaRPr lang="ja-JP" altLang="ja-JP" sz="1200" b="0" i="0" kern="1200" dirty="0">
+              <a:solidFill>
+                <a:schemeClr val="tx1"/>
+              </a:solidFill>
+              <a:effectLst/>
               <a:latin typeface="Meiryo UI" panose="020B0604030504040204" pitchFamily="50" charset="-128"/>
               <a:ea typeface="Meiryo UI" panose="020B0604030504040204" pitchFamily="50" charset="-128"/>
+              <a:cs typeface="+mn-cs"/>
             </a:endParaRPr>
           </a:p>
         </p:txBody>
       </p:sp>
       <p:sp>
         <p:nvSpPr>
-          <p:cNvPr id="4" name="スライド番号プレースホルダー 3"/>
+          <p:cNvPr id="4" name="スライド番号プレースホルダー 3">
+            <a:extLst>
+              <a:ext uri="{FF2B5EF4-FFF2-40B4-BE49-F238E27FC236}">
+                <a16:creationId xmlns:a16="http://schemas.microsoft.com/office/drawing/2014/main" id="{A43D381A-07A3-6153-DCE1-90CC06C8FCB6}"/>
+              </a:ext>
+            </a:extLst>
+          </p:cNvPr>
           <p:cNvSpPr>
             <a:spLocks noGrp="1"/>
           </p:cNvSpPr>
@@ -2528,101 +2463,7 @@
     </p:spTree>
     <p:extLst>
       <p:ext uri="{BB962C8B-B14F-4D97-AF65-F5344CB8AC3E}">
-        <p14:creationId xmlns:p14="http://schemas.microsoft.com/office/powerpoint/2010/main" val="2028453351"/>
-      </p:ext>
-    </p:extLst>
-  </p:cSld>
-  <p:clrMapOvr>
-    <a:masterClrMapping/>
-  </p:clrMapOvr>
-</p:notes>
-</file>
-
-<file path=ppt/notesSlides/notesSlide9.xml><?xml version="1.0" encoding="utf-8"?>
-<p:notes xmlns:a="http://schemas.openxmlformats.org/drawingml/2006/main" xmlns:r="http://schemas.openxmlformats.org/officeDocument/2006/relationships" xmlns:p="http://schemas.openxmlformats.org/presentationml/2006/main">
-  <p:cSld>
-    <p:spTree>
-      <p:nvGrpSpPr>
-        <p:cNvPr id="1" name=""/>
-        <p:cNvGrpSpPr/>
-        <p:nvPr/>
-      </p:nvGrpSpPr>
-      <p:grpSpPr>
-        <a:xfrm>
-          <a:off x="0" y="0"/>
-          <a:ext cx="0" cy="0"/>
-          <a:chOff x="0" y="0"/>
-          <a:chExt cx="0" cy="0"/>
-        </a:xfrm>
-      </p:grpSpPr>
-      <p:sp>
-        <p:nvSpPr>
-          <p:cNvPr id="2" name="スライド イメージ プレースホルダー 1"/>
-          <p:cNvSpPr>
-            <a:spLocks noGrp="1" noRot="1" noChangeAspect="1"/>
-          </p:cNvSpPr>
-          <p:nvPr>
-            <p:ph type="sldImg"/>
-          </p:nvPr>
-        </p:nvSpPr>
-        <p:spPr/>
-      </p:sp>
-      <p:sp>
-        <p:nvSpPr>
-          <p:cNvPr id="3" name="ノート プレースホルダー 2"/>
-          <p:cNvSpPr>
-            <a:spLocks noGrp="1"/>
-          </p:cNvSpPr>
-          <p:nvPr>
-            <p:ph type="body" idx="1"/>
-          </p:nvPr>
-        </p:nvSpPr>
-        <p:spPr/>
-        <p:txBody>
-          <a:bodyPr/>
-          <a:lstStyle/>
-          <a:p>
-            <a:endParaRPr kumimoji="1" lang="ja-JP" altLang="en-US" dirty="0">
-              <a:latin typeface="Meiryo UI" panose="020B0604030504040204" pitchFamily="50" charset="-128"/>
-              <a:ea typeface="Meiryo UI" panose="020B0604030504040204" pitchFamily="50" charset="-128"/>
-            </a:endParaRPr>
-          </a:p>
-        </p:txBody>
-      </p:sp>
-      <p:sp>
-        <p:nvSpPr>
-          <p:cNvPr id="4" name="スライド番号プレースホルダー 3"/>
-          <p:cNvSpPr>
-            <a:spLocks noGrp="1"/>
-          </p:cNvSpPr>
-          <p:nvPr>
-            <p:ph type="sldNum" sz="quarter" idx="10"/>
-          </p:nvPr>
-        </p:nvSpPr>
-        <p:spPr/>
-        <p:txBody>
-          <a:bodyPr/>
-          <a:lstStyle/>
-          <a:p>
-            <a:pPr rtl="0"/>
-            <a:fld id="{893B0CF2-7F87-4E02-A248-870047730F99}" type="slidenum">
-              <a:rPr lang="en-US" altLang="ja-JP" smtClean="0">
-                <a:latin typeface="Meiryo UI" panose="020B0604030504040204" pitchFamily="50" charset="-128"/>
-                <a:ea typeface="Meiryo UI" panose="020B0604030504040204" pitchFamily="50" charset="-128"/>
-              </a:rPr>
-              <a:t>9</a:t>
-            </a:fld>
-            <a:endParaRPr lang="ja-JP" altLang="en-US" dirty="0">
-              <a:latin typeface="Meiryo UI" panose="020B0604030504040204" pitchFamily="50" charset="-128"/>
-              <a:ea typeface="Meiryo UI" panose="020B0604030504040204" pitchFamily="50" charset="-128"/>
-            </a:endParaRPr>
-          </a:p>
-        </p:txBody>
-      </p:sp>
-    </p:spTree>
-    <p:extLst>
-      <p:ext uri="{BB962C8B-B14F-4D97-AF65-F5344CB8AC3E}">
-        <p14:creationId xmlns:p14="http://schemas.microsoft.com/office/powerpoint/2010/main" val="1026760638"/>
+        <p14:creationId xmlns:p14="http://schemas.microsoft.com/office/powerpoint/2010/main" val="4151790957"/>
       </p:ext>
     </p:extLst>
   </p:cSld>
@@ -2950,7 +2791,7 @@
             <a:pPr rtl="0"/>
             <a:fld id="{E7D9F5B4-D2B9-4671-9B63-0110E6386A4E}" type="datetime4">
               <a:rPr lang="ja-JP" altLang="en-US" smtClean="0"/>
-              <a:t>2026年6月16日</a:t>
+              <a:t>2026年6月17日</a:t>
             </a:fld>
             <a:endParaRPr lang="en-US" dirty="0"/>
           </a:p>
@@ -3170,7 +3011,7 @@
             <a:pPr rtl="0"/>
             <a:fld id="{0189D195-22A8-4E03-A4C1-FF558F7B427F}" type="datetime4">
               <a:rPr lang="ja-JP" altLang="en-US" smtClean="0"/>
-              <a:t>2026年6月16日</a:t>
+              <a:t>2026年6月17日</a:t>
             </a:fld>
             <a:endParaRPr lang="en-US" dirty="0"/>
           </a:p>
@@ -3400,7 +3241,7 @@
             <a:pPr rtl="0"/>
             <a:fld id="{A59B777F-2BA6-42C0-83EF-2CC97DD0D6E7}" type="datetime4">
               <a:rPr lang="ja-JP" altLang="en-US" smtClean="0"/>
-              <a:t>2026年6月16日</a:t>
+              <a:t>2026年6月17日</a:t>
             </a:fld>
             <a:endParaRPr lang="en-US" dirty="0"/>
           </a:p>
@@ -3621,7 +3462,7 @@
             <a:pPr rtl="0"/>
             <a:fld id="{030C11D6-D226-45B1-8AA5-91C501F3B0E7}" type="datetime4">
               <a:rPr lang="ja-JP" altLang="en-US" smtClean="0"/>
-              <a:t>2026年6月16日</a:t>
+              <a:t>2026年6月17日</a:t>
             </a:fld>
             <a:endParaRPr lang="en-US" dirty="0"/>
           </a:p>
@@ -3873,7 +3714,7 @@
             <a:pPr rtl="0"/>
             <a:fld id="{E5400AA1-06A4-444F-94EA-80BA16484187}" type="datetime4">
               <a:rPr lang="ja-JP" altLang="en-US" smtClean="0"/>
-              <a:t>2026年6月16日</a:t>
+              <a:t>2026年6月17日</a:t>
             </a:fld>
             <a:endParaRPr lang="en-US" dirty="0"/>
           </a:p>
@@ -4225,7 +4066,7 @@
             <a:pPr rtl="0"/>
             <a:fld id="{7538B790-6ACD-441F-B06D-4917F8B429D2}" type="datetime4">
               <a:rPr lang="ja-JP" altLang="en-US" smtClean="0"/>
-              <a:t>2026年6月16日</a:t>
+              <a:t>2026年6月17日</a:t>
             </a:fld>
             <a:endParaRPr lang="en-US" dirty="0"/>
           </a:p>
@@ -4691,7 +4532,7 @@
             <a:pPr rtl="0"/>
             <a:fld id="{BA296CEC-F0EC-4499-B406-555829E93D38}" type="datetime4">
               <a:rPr lang="ja-JP" altLang="en-US" smtClean="0"/>
-              <a:t>2026年6月16日</a:t>
+              <a:t>2026年6月17日</a:t>
             </a:fld>
             <a:endParaRPr lang="en-US" dirty="0"/>
           </a:p>
@@ -4866,7 +4707,7 @@
             <a:pPr rtl="0"/>
             <a:fld id="{7BC8EE4A-0564-4F19-AF56-1B86A81857A1}" type="datetime4">
               <a:rPr lang="ja-JP" altLang="en-US" smtClean="0"/>
-              <a:t>2026年6月16日</a:t>
+              <a:t>2026年6月17日</a:t>
             </a:fld>
             <a:endParaRPr lang="en-US"/>
           </a:p>
@@ -4979,7 +4820,7 @@
             <a:pPr rtl="0"/>
             <a:fld id="{AAD0A0B1-5389-4168-8C71-456999E01C6A}" type="datetime4">
               <a:rPr lang="ja-JP" altLang="en-US" smtClean="0"/>
-              <a:t>2026年6月16日</a:t>
+              <a:t>2026年6月17日</a:t>
             </a:fld>
             <a:endParaRPr lang="en-US" dirty="0"/>
           </a:p>
@@ -5296,7 +5137,7 @@
             <a:pPr rtl="0"/>
             <a:fld id="{3DFAF4E1-8E5B-454D-966C-37225B9702A6}" type="datetime4">
               <a:rPr lang="ja-JP" altLang="en-US" smtClean="0"/>
-              <a:t>2026年6月16日</a:t>
+              <a:t>2026年6月17日</a:t>
             </a:fld>
             <a:endParaRPr lang="en-US" dirty="0"/>
           </a:p>
@@ -5655,7 +5496,7 @@
             <a:pPr rtl="0"/>
             <a:fld id="{3BA228A8-1DDA-4C9E-B7BB-B3D4A4576159}" type="datetime4">
               <a:rPr lang="ja-JP" altLang="en-US" smtClean="0"/>
-              <a:t>2026年6月16日</a:t>
+              <a:t>2026年6月17日</a:t>
             </a:fld>
             <a:endParaRPr lang="en-US"/>
           </a:p>
@@ -6726,7 +6567,7 @@
           <a:p>
             <a:fld id="{196E8732-2B4B-4F0A-8362-53F7A7DF2931}" type="datetime4">
               <a:rPr lang="ja-JP" altLang="en-US" smtClean="0"/>
-              <a:t>2026年6月16日</a:t>
+              <a:t>2026年6月17日</a:t>
             </a:fld>
             <a:endParaRPr lang="en-US" dirty="0"/>
           </a:p>
@@ -7235,282 +7076,12 @@
   <p:clrMapOvr>
     <a:masterClrMapping/>
   </p:clrMapOvr>
-  <mc:AlternateContent xmlns:mc="http://schemas.openxmlformats.org/markup-compatibility/2006" xmlns:p14="http://schemas.microsoft.com/office/powerpoint/2010/main">
-    <mc:Choice Requires="p14">
-      <p:transition spd="med" p14:dur="700">
-        <p:fade/>
-      </p:transition>
+  <mc:AlternateContent xmlns:mc="http://schemas.openxmlformats.org/markup-compatibility/2006">
+    <mc:Choice xmlns:p14="http://schemas.microsoft.com/office/powerpoint/2010/main" Requires="p14">
+      <p:transition p14:dur="0"/>
     </mc:Choice>
-    <mc:Fallback xmlns="">
-      <p:transition spd="med">
-        <p:fade/>
-      </p:transition>
-    </mc:Fallback>
-  </mc:AlternateContent>
-</p:sld>
-</file>
-
-<file path=ppt/slides/slide10.xml><?xml version="1.0" encoding="utf-8"?>
-<p:sld xmlns:a="http://schemas.openxmlformats.org/drawingml/2006/main" xmlns:r="http://schemas.openxmlformats.org/officeDocument/2006/relationships" xmlns:p="http://schemas.openxmlformats.org/presentationml/2006/main">
-  <p:cSld>
-    <p:spTree>
-      <p:nvGrpSpPr>
-        <p:cNvPr id="1" name=""/>
-        <p:cNvGrpSpPr/>
-        <p:nvPr/>
-      </p:nvGrpSpPr>
-      <p:grpSpPr>
-        <a:xfrm>
-          <a:off x="0" y="0"/>
-          <a:ext cx="0" cy="0"/>
-          <a:chOff x="0" y="0"/>
-          <a:chExt cx="0" cy="0"/>
-        </a:xfrm>
-      </p:grpSpPr>
-      <p:sp>
-        <p:nvSpPr>
-          <p:cNvPr id="3" name="タイトル 2"/>
-          <p:cNvSpPr>
-            <a:spLocks noGrp="1"/>
-          </p:cNvSpPr>
-          <p:nvPr>
-            <p:ph type="title"/>
-          </p:nvPr>
-        </p:nvSpPr>
-        <p:spPr/>
-        <p:txBody>
-          <a:bodyPr rtlCol="0"/>
-          <a:lstStyle/>
-          <a:p>
-            <a:pPr rtl="0"/>
-            <a:r>
-              <a:rPr lang="ja" dirty="0">
-                <a:latin typeface="Meiryo UI" panose="020B0604030504040204" pitchFamily="50" charset="-128"/>
-                <a:ea typeface="Meiryo UI" panose="020B0604030504040204" pitchFamily="50" charset="-128"/>
-              </a:rPr>
-              <a:t>まとめ</a:t>
-            </a:r>
-          </a:p>
-        </p:txBody>
-      </p:sp>
-      <p:sp>
-        <p:nvSpPr>
-          <p:cNvPr id="2" name="コンテンツ プレースホルダー 1"/>
-          <p:cNvSpPr>
-            <a:spLocks noGrp="1"/>
-          </p:cNvSpPr>
-          <p:nvPr>
-            <p:ph idx="1"/>
-          </p:nvPr>
-        </p:nvSpPr>
-        <p:spPr/>
-        <p:txBody>
-          <a:bodyPr rtlCol="0"/>
-          <a:lstStyle/>
-          <a:p>
-            <a:pPr rtl="0"/>
-            <a:r>
-              <a:rPr lang="ja" dirty="0">
-                <a:latin typeface="ＭＳ 明朝" panose="02020609040205080304" pitchFamily="17" charset="-128"/>
-                <a:ea typeface="ＭＳ 明朝" panose="02020609040205080304" pitchFamily="17" charset="-128"/>
-              </a:rPr>
-              <a:t>アイデアを確認します。</a:t>
-            </a:r>
-          </a:p>
-          <a:p>
-            <a:pPr rtl="0"/>
-            <a:r>
-              <a:rPr lang="ja" dirty="0">
-                <a:latin typeface="ＭＳ 明朝" panose="02020609040205080304" pitchFamily="17" charset="-128"/>
-                <a:ea typeface="ＭＳ 明朝" panose="02020609040205080304" pitchFamily="17" charset="-128"/>
-              </a:rPr>
-              <a:t>上位の候補に投票して集約します。</a:t>
-            </a:r>
-          </a:p>
-          <a:p>
-            <a:pPr rtl="0"/>
-            <a:r>
-              <a:rPr lang="ja" dirty="0">
-                <a:latin typeface="ＭＳ 明朝" panose="02020609040205080304" pitchFamily="17" charset="-128"/>
-                <a:ea typeface="ＭＳ 明朝" panose="02020609040205080304" pitchFamily="17" charset="-128"/>
-              </a:rPr>
-              <a:t>要件と制限を確認します。</a:t>
-            </a:r>
-          </a:p>
-          <a:p>
-            <a:pPr rtl="0"/>
-            <a:r>
-              <a:rPr lang="ja" dirty="0">
-                <a:latin typeface="ＭＳ 明朝" panose="02020609040205080304" pitchFamily="17" charset="-128"/>
-                <a:ea typeface="ＭＳ 明朝" panose="02020609040205080304" pitchFamily="17" charset="-128"/>
-              </a:rPr>
-              <a:t>上位 5 から 10 のアイデアにリストの内容を調整します。</a:t>
-            </a:r>
-            <a:endParaRPr lang="en-US" dirty="0">
-              <a:latin typeface="ＭＳ 明朝" panose="02020609040205080304" pitchFamily="17" charset="-128"/>
-              <a:ea typeface="ＭＳ 明朝" panose="02020609040205080304" pitchFamily="17" charset="-128"/>
-            </a:endParaRPr>
-          </a:p>
-        </p:txBody>
-      </p:sp>
-    </p:spTree>
-    <p:extLst>
-      <p:ext uri="{BB962C8B-B14F-4D97-AF65-F5344CB8AC3E}">
-        <p14:creationId xmlns:p14="http://schemas.microsoft.com/office/powerpoint/2010/main" val="2054880847"/>
-      </p:ext>
-    </p:extLst>
-  </p:cSld>
-  <p:clrMapOvr>
-    <a:masterClrMapping/>
-  </p:clrMapOvr>
-  <mc:AlternateContent xmlns:mc="http://schemas.openxmlformats.org/markup-compatibility/2006" xmlns:p14="http://schemas.microsoft.com/office/powerpoint/2010/main">
-    <mc:Choice Requires="p14">
-      <p:transition spd="med" p14:dur="700">
-        <p:fade/>
-      </p:transition>
-    </mc:Choice>
-    <mc:Fallback xmlns="">
-      <p:transition spd="med">
-        <p:fade/>
-      </p:transition>
-    </mc:Fallback>
-  </mc:AlternateContent>
-</p:sld>
-</file>
-
-<file path=ppt/slides/slide11.xml><?xml version="1.0" encoding="utf-8"?>
-<p:sld xmlns:a="http://schemas.openxmlformats.org/drawingml/2006/main" xmlns:r="http://schemas.openxmlformats.org/officeDocument/2006/relationships" xmlns:p="http://schemas.openxmlformats.org/presentationml/2006/main">
-  <p:cSld>
-    <p:spTree>
-      <p:nvGrpSpPr>
-        <p:cNvPr id="1" name=""/>
-        <p:cNvGrpSpPr/>
-        <p:nvPr/>
-      </p:nvGrpSpPr>
-      <p:grpSpPr>
-        <a:xfrm>
-          <a:off x="0" y="0"/>
-          <a:ext cx="0" cy="0"/>
-          <a:chOff x="0" y="0"/>
-          <a:chExt cx="0" cy="0"/>
-        </a:xfrm>
-      </p:grpSpPr>
-      <p:sp>
-        <p:nvSpPr>
-          <p:cNvPr id="3" name="タイトル 2"/>
-          <p:cNvSpPr>
-            <a:spLocks noGrp="1"/>
-          </p:cNvSpPr>
-          <p:nvPr>
-            <p:ph type="title"/>
-          </p:nvPr>
-        </p:nvSpPr>
-        <p:spPr/>
-        <p:txBody>
-          <a:bodyPr rtlCol="0"/>
-          <a:lstStyle/>
-          <a:p>
-            <a:pPr rtl="0"/>
-            <a:r>
-              <a:rPr lang="ja" dirty="0">
-                <a:latin typeface="Meiryo UI" panose="020B0604030504040204" pitchFamily="50" charset="-128"/>
-                <a:ea typeface="Meiryo UI" panose="020B0604030504040204" pitchFamily="50" charset="-128"/>
-              </a:rPr>
-              <a:t>次のステップ</a:t>
-            </a:r>
-          </a:p>
-        </p:txBody>
-      </p:sp>
-      <p:sp>
-        <p:nvSpPr>
-          <p:cNvPr id="2" name="コンテンツ プレースホルダー 1"/>
-          <p:cNvSpPr>
-            <a:spLocks noGrp="1"/>
-          </p:cNvSpPr>
-          <p:nvPr>
-            <p:ph idx="1"/>
-          </p:nvPr>
-        </p:nvSpPr>
-        <p:spPr/>
-        <p:txBody>
-          <a:bodyPr rtlCol="0"/>
-          <a:lstStyle/>
-          <a:p>
-            <a:pPr rtl="0"/>
-            <a:r>
-              <a:rPr lang="ja" dirty="0">
-                <a:latin typeface="ＭＳ 明朝" panose="02020609040205080304" pitchFamily="17" charset="-128"/>
-                <a:ea typeface="ＭＳ 明朝" panose="02020609040205080304" pitchFamily="17" charset="-128"/>
-              </a:rPr>
-              <a:t>次に何をするか説明します。</a:t>
-            </a:r>
-          </a:p>
-          <a:p>
-            <a:pPr lvl="1" rtl="0"/>
-            <a:r>
-              <a:rPr lang="ja" dirty="0">
-                <a:latin typeface="ＭＳ 明朝" panose="02020609040205080304" pitchFamily="17" charset="-128"/>
-                <a:ea typeface="ＭＳ 明朝" panose="02020609040205080304" pitchFamily="17" charset="-128"/>
-              </a:rPr>
-              <a:t>出てきたアイデアを調査する?</a:t>
-            </a:r>
-          </a:p>
-          <a:p>
-            <a:pPr lvl="1" rtl="0"/>
-            <a:r>
-              <a:rPr lang="ja" dirty="0">
-                <a:latin typeface="ＭＳ 明朝" panose="02020609040205080304" pitchFamily="17" charset="-128"/>
-                <a:ea typeface="ＭＳ 明朝" panose="02020609040205080304" pitchFamily="17" charset="-128"/>
-              </a:rPr>
-              <a:t>より大きなグループでフォロー アップする?</a:t>
-            </a:r>
-          </a:p>
-          <a:p>
-            <a:pPr rtl="0"/>
-            <a:r>
-              <a:rPr lang="ja" dirty="0">
-                <a:latin typeface="ＭＳ 明朝" panose="02020609040205080304" pitchFamily="17" charset="-128"/>
-                <a:ea typeface="ＭＳ 明朝" panose="02020609040205080304" pitchFamily="17" charset="-128"/>
-              </a:rPr>
-              <a:t>フォロー アップのためのアクション アイテムを生成します。</a:t>
-            </a:r>
-          </a:p>
-          <a:p>
-            <a:pPr lvl="1" rtl="0"/>
-            <a:r>
-              <a:rPr lang="ja" dirty="0">
-                <a:latin typeface="ＭＳ 明朝" panose="02020609040205080304" pitchFamily="17" charset="-128"/>
-                <a:ea typeface="ＭＳ 明朝" panose="02020609040205080304" pitchFamily="17" charset="-128"/>
-              </a:rPr>
-              <a:t>アイデアの実現を開始します。</a:t>
-            </a:r>
-            <a:endParaRPr lang="en-US" dirty="0">
-              <a:latin typeface="ＭＳ 明朝" panose="02020609040205080304" pitchFamily="17" charset="-128"/>
-              <a:ea typeface="ＭＳ 明朝" panose="02020609040205080304" pitchFamily="17" charset="-128"/>
-            </a:endParaRPr>
-          </a:p>
-        </p:txBody>
-      </p:sp>
-    </p:spTree>
-    <p:extLst>
-      <p:ext uri="{BB962C8B-B14F-4D97-AF65-F5344CB8AC3E}">
-        <p14:creationId xmlns:p14="http://schemas.microsoft.com/office/powerpoint/2010/main" val="112606551"/>
-      </p:ext>
-    </p:extLst>
-  </p:cSld>
-  <p:clrMapOvr>
-    <a:masterClrMapping/>
-  </p:clrMapOvr>
-  <mc:AlternateContent xmlns:mc="http://schemas.openxmlformats.org/markup-compatibility/2006" xmlns:p14="http://schemas.microsoft.com/office/powerpoint/2010/main">
-    <mc:Choice Requires="p14">
-      <p:transition spd="med" p14:dur="700">
-        <p:fade/>
-      </p:transition>
-    </mc:Choice>
-    <mc:Fallback xmlns="">
-      <p:transition spd="med">
-        <p:fade/>
-      </p:transition>
+    <mc:Fallback>
+      <p:transition/>
     </mc:Fallback>
   </mc:AlternateContent>
 </p:sld>
@@ -7650,16 +7221,12 @@
   <p:clrMapOvr>
     <a:masterClrMapping/>
   </p:clrMapOvr>
-  <mc:AlternateContent xmlns:mc="http://schemas.openxmlformats.org/markup-compatibility/2006" xmlns:p14="http://schemas.microsoft.com/office/powerpoint/2010/main">
-    <mc:Choice Requires="p14">
-      <p:transition spd="med" p14:dur="700">
-        <p:fade/>
-      </p:transition>
+  <mc:AlternateContent xmlns:mc="http://schemas.openxmlformats.org/markup-compatibility/2006">
+    <mc:Choice xmlns:p14="http://schemas.microsoft.com/office/powerpoint/2010/main" Requires="p14">
+      <p:transition p14:dur="0"/>
     </mc:Choice>
-    <mc:Fallback xmlns="">
-      <p:transition spd="med">
-        <p:fade/>
-      </p:transition>
+    <mc:Fallback>
+      <p:transition/>
     </mc:Fallback>
   </mc:AlternateContent>
 </p:sld>
@@ -7795,16 +7362,12 @@
   <p:clrMapOvr>
     <a:masterClrMapping/>
   </p:clrMapOvr>
-  <mc:AlternateContent xmlns:mc="http://schemas.openxmlformats.org/markup-compatibility/2006" xmlns:p14="http://schemas.microsoft.com/office/powerpoint/2010/main">
-    <mc:Choice Requires="p14">
-      <p:transition spd="med" p14:dur="700">
-        <p:fade/>
-      </p:transition>
+  <mc:AlternateContent xmlns:mc="http://schemas.openxmlformats.org/markup-compatibility/2006">
+    <mc:Choice xmlns:p14="http://schemas.microsoft.com/office/powerpoint/2010/main" Requires="p14">
+      <p:transition p14:dur="0"/>
     </mc:Choice>
-    <mc:Fallback xmlns="">
-      <p:transition spd="med">
-        <p:fade/>
-      </p:transition>
+    <mc:Fallback>
+      <p:transition/>
     </mc:Fallback>
   </mc:AlternateContent>
 </p:sld>
@@ -8032,14 +7595,7 @@
           <a:p>
             <a:r>
               <a:rPr lang="ja-JP" altLang="ja-JP" sz="3200" dirty="0"/>
-              <a:t>利用者自身がダークパターンを認識・回避</a:t>
-            </a:r>
-            <a:br>
-              <a:rPr lang="en-US" altLang="ja-JP" sz="3200" dirty="0"/>
-            </a:br>
-            <a:r>
-              <a:rPr lang="ja-JP" altLang="ja-JP" sz="3200" dirty="0"/>
-              <a:t>する能力</a:t>
+              <a:t>利用者自身がダークパターンを認識・回避する能力</a:t>
             </a:r>
             <a:r>
               <a:rPr lang="ja-JP" altLang="en-US" sz="3200" dirty="0"/>
@@ -8065,16 +7621,12 @@
   <p:clrMapOvr>
     <a:masterClrMapping/>
   </p:clrMapOvr>
-  <mc:AlternateContent xmlns:mc="http://schemas.openxmlformats.org/markup-compatibility/2006" xmlns:p14="http://schemas.microsoft.com/office/powerpoint/2010/main">
-    <mc:Choice Requires="p14">
-      <p:transition spd="med" p14:dur="700">
-        <p:fade/>
-      </p:transition>
+  <mc:AlternateContent xmlns:mc="http://schemas.openxmlformats.org/markup-compatibility/2006">
+    <mc:Choice xmlns:p14="http://schemas.microsoft.com/office/powerpoint/2010/main" Requires="p14">
+      <p:transition p14:dur="0"/>
     </mc:Choice>
-    <mc:Fallback xmlns="">
-      <p:transition spd="med">
-        <p:fade/>
-      </p:transition>
+    <mc:Fallback>
+      <p:transition/>
     </mc:Fallback>
   </mc:AlternateContent>
 </p:sld>
@@ -8288,6 +7840,17 @@
               </a:rPr>
               <a:t>結果として利用者全体の対処能力の向上につながる</a:t>
             </a:r>
+            <a:r>
+              <a:rPr lang="ja-JP" altLang="en-US" sz="4000" dirty="0">
+                <a:latin typeface="Meiryo UI" panose="020B0604030504040204" pitchFamily="50" charset="-128"/>
+                <a:ea typeface="Meiryo UI" panose="020B0604030504040204" pitchFamily="50" charset="-128"/>
+              </a:rPr>
+              <a:t>。</a:t>
+            </a:r>
+            <a:endParaRPr lang="ja-JP" altLang="ja-JP" sz="4000" dirty="0">
+              <a:latin typeface="Meiryo UI" panose="020B0604030504040204" pitchFamily="50" charset="-128"/>
+              <a:ea typeface="Meiryo UI" panose="020B0604030504040204" pitchFamily="50" charset="-128"/>
+            </a:endParaRPr>
           </a:p>
         </p:txBody>
       </p:sp>
@@ -8348,16 +7911,12 @@
   <p:clrMapOvr>
     <a:masterClrMapping/>
   </p:clrMapOvr>
-  <mc:AlternateContent xmlns:mc="http://schemas.openxmlformats.org/markup-compatibility/2006" xmlns:p14="http://schemas.microsoft.com/office/powerpoint/2010/main">
-    <mc:Choice Requires="p14">
-      <p:transition spd="med" p14:dur="700">
-        <p:fade/>
-      </p:transition>
+  <mc:AlternateContent xmlns:mc="http://schemas.openxmlformats.org/markup-compatibility/2006">
+    <mc:Choice xmlns:p14="http://schemas.microsoft.com/office/powerpoint/2010/main" Requires="p14">
+      <p:transition p14:dur="0"/>
     </mc:Choice>
-    <mc:Fallback xmlns="">
-      <p:transition spd="med">
-        <p:fade/>
-      </p:transition>
+    <mc:Fallback>
+      <p:transition/>
     </mc:Fallback>
   </mc:AlternateContent>
 </p:sld>
@@ -8404,7 +7963,7 @@
         </p:nvSpPr>
         <p:spPr>
           <a:xfrm>
-            <a:off x="609600" y="704088"/>
+            <a:off x="609600" y="526288"/>
             <a:ext cx="11054080" cy="606552"/>
           </a:xfrm>
         </p:spPr>
@@ -8443,7 +8002,7 @@
         </p:nvSpPr>
         <p:spPr>
           <a:xfrm>
-            <a:off x="609599" y="1564640"/>
+            <a:off x="609600" y="1132840"/>
             <a:ext cx="11417301" cy="4791190"/>
           </a:xfrm>
         </p:spPr>
@@ -8467,10 +8026,10 @@
           <a:p>
             <a:pPr fontAlgn="t"/>
             <a:r>
-              <a:rPr lang="ja-JP" altLang="en-US" sz="2400" dirty="0"/>
+              <a:rPr lang="ja-JP" altLang="en-US" sz="2400" b="1" dirty="0"/>
               <a:t>手法</a:t>
             </a:r>
-            <a:endParaRPr lang="en-US" altLang="ja-JP" sz="2400" dirty="0"/>
+            <a:endParaRPr lang="en-US" altLang="ja-JP" sz="2400" b="1" dirty="0"/>
           </a:p>
           <a:p>
             <a:pPr marL="0" indent="0" fontAlgn="t">
@@ -8494,57 +8053,113 @@
             </a:r>
             <a:r>
               <a:rPr lang="ja-JP" altLang="ja-JP" sz="2200" dirty="0"/>
-              <a:t>対してシナリオ提示と講義を行い， 講義前後で同一シナリオに対する行動変化を評価</a:t>
-            </a:r>
-            <a:r>
-              <a:rPr lang="ja-JP" altLang="en-US" sz="2200" dirty="0"/>
-              <a:t>した。その結果を踏まえ</a:t>
-            </a:r>
-            <a:r>
-              <a:rPr lang="ja-JP" altLang="ja-JP" sz="2200" dirty="0"/>
-              <a:t>Webアプリ「Mind the</a:t>
-            </a:r>
-            <a:r>
-              <a:rPr lang="ja-JP" altLang="en-US" sz="2200" dirty="0"/>
-              <a:t> </a:t>
-            </a:r>
-            <a:r>
-              <a:rPr lang="ja-JP" altLang="ja-JP" sz="2200" dirty="0"/>
-              <a:t>Dark」を開発し</a:t>
-            </a:r>
-            <a:r>
-              <a:rPr lang="ja-JP" altLang="en-US" sz="2200" dirty="0"/>
-              <a:t>、</a:t>
-            </a:r>
-            <a:r>
-              <a:rPr lang="ja-JP" altLang="ja-JP" sz="2200" dirty="0"/>
-              <a:t>36名の児童を対象に評価を実施し</a:t>
-            </a:r>
-            <a:r>
-              <a:rPr lang="ja-JP" altLang="en-US" sz="2200" dirty="0"/>
-              <a:t>た</a:t>
-            </a:r>
-            <a:endParaRPr lang="en-US" altLang="ja-JP" dirty="0"/>
-          </a:p>
-          <a:p>
-            <a:pPr fontAlgn="t"/>
-            <a:r>
-              <a:rPr lang="ja-JP" altLang="en-US" sz="2400" dirty="0"/>
-              <a:t>結果・課題</a:t>
-            </a:r>
-            <a:endParaRPr lang="en-US" altLang="ja-JP" sz="2400" dirty="0"/>
+              <a:t>対してシナリオ提示と講義を行い， 講義前後で同一シナリオに対する</a:t>
+            </a:r>
+            <a:endParaRPr lang="en-US" altLang="ja-JP" sz="2200" dirty="0"/>
           </a:p>
           <a:p>
             <a:pPr marL="0" indent="0" fontAlgn="t">
               <a:buNone/>
             </a:pPr>
             <a:r>
+              <a:rPr lang="ja-JP" altLang="en-US" sz="2200" dirty="0"/>
+              <a:t>　</a:t>
+            </a:r>
+            <a:r>
+              <a:rPr lang="ja-JP" altLang="ja-JP" sz="2200" dirty="0"/>
+              <a:t>行動変化を評価</a:t>
+            </a:r>
+            <a:r>
+              <a:rPr lang="ja-JP" altLang="en-US" sz="2200" dirty="0"/>
+              <a:t>した。その結果を踏まえ</a:t>
+            </a:r>
+            <a:r>
+              <a:rPr lang="ja-JP" altLang="ja-JP" sz="2200" dirty="0"/>
+              <a:t>Webアプリ「Mind the</a:t>
+            </a:r>
+            <a:r>
+              <a:rPr lang="ja-JP" altLang="en-US" sz="2200" dirty="0"/>
+              <a:t> </a:t>
+            </a:r>
+            <a:r>
+              <a:rPr lang="ja-JP" altLang="ja-JP" sz="2200" dirty="0"/>
+              <a:t>Dark」を開発し</a:t>
+            </a:r>
+            <a:r>
+              <a:rPr lang="ja-JP" altLang="en-US" sz="2200" dirty="0"/>
+              <a:t>、</a:t>
+            </a:r>
+            <a:r>
+              <a:rPr lang="ja-JP" altLang="ja-JP" sz="2200" dirty="0"/>
+              <a:t>36名の</a:t>
+            </a:r>
+            <a:endParaRPr lang="en-US" altLang="ja-JP" sz="2200" dirty="0"/>
+          </a:p>
+          <a:p>
+            <a:pPr marL="0" indent="0" fontAlgn="t">
+              <a:buNone/>
+            </a:pPr>
+            <a:r>
+              <a:rPr lang="ja-JP" altLang="en-US" sz="2200" dirty="0"/>
+              <a:t>　</a:t>
+            </a:r>
+            <a:r>
+              <a:rPr lang="ja-JP" altLang="ja-JP" sz="2200" dirty="0"/>
+              <a:t>児童を対象に評価を実施し</a:t>
+            </a:r>
+            <a:r>
+              <a:rPr lang="ja-JP" altLang="en-US" sz="2200" dirty="0"/>
+              <a:t>た</a:t>
+            </a:r>
+            <a:endParaRPr lang="en-US" altLang="ja-JP" dirty="0"/>
+          </a:p>
+          <a:p>
+            <a:pPr fontAlgn="t"/>
+            <a:r>
+              <a:rPr lang="ja-JP" altLang="en-US" sz="2400" b="1" dirty="0"/>
+              <a:t>結果・課題</a:t>
+            </a:r>
+            <a:endParaRPr lang="en-US" altLang="ja-JP" sz="2400" b="1" dirty="0"/>
+          </a:p>
+          <a:p>
+            <a:pPr marL="0" indent="0" fontAlgn="t">
+              <a:buNone/>
+            </a:pPr>
+            <a:r>
               <a:rPr lang="ja-JP" altLang="en-US" dirty="0"/>
               <a:t>　</a:t>
             </a:r>
             <a:r>
               <a:rPr lang="ja-JP" altLang="ja-JP" sz="2200" dirty="0"/>
-              <a:t>講義後，同一シナリオにおいて課金行動が減少し， 回避行動が増加するなど，児童の理解向上が確認された。開発したWebアプリでは， 理解促進・興味・参加意欲の向上が観察およびインタビューにより確認された。</a:t>
+              <a:t>講義後，同一シナリオにおいて課金行動が減少し， 回避行動が増加するなど，児童の</a:t>
+            </a:r>
+            <a:endParaRPr lang="en-US" altLang="ja-JP" sz="2200" dirty="0"/>
+          </a:p>
+          <a:p>
+            <a:pPr marL="0" indent="0" fontAlgn="t">
+              <a:buNone/>
+            </a:pPr>
+            <a:r>
+              <a:rPr lang="ja-JP" altLang="en-US" sz="2200" dirty="0"/>
+              <a:t>　</a:t>
+            </a:r>
+            <a:r>
+              <a:rPr lang="ja-JP" altLang="ja-JP" sz="2200" dirty="0"/>
+              <a:t>理解向上が確認された。開発したWebアプリでは， 理解促進・興味・参加意欲の向上が</a:t>
+            </a:r>
+            <a:endParaRPr lang="en-US" altLang="ja-JP" sz="2200" dirty="0"/>
+          </a:p>
+          <a:p>
+            <a:pPr marL="0" indent="0" fontAlgn="t">
+              <a:buNone/>
+            </a:pPr>
+            <a:r>
+              <a:rPr lang="ja-JP" altLang="en-US" sz="2200" dirty="0"/>
+              <a:t>　</a:t>
+            </a:r>
+            <a:r>
+              <a:rPr lang="ja-JP" altLang="ja-JP" sz="2200" dirty="0"/>
+              <a:t>観察およびインタビューにより確認された。</a:t>
             </a:r>
           </a:p>
           <a:p>
@@ -8575,7 +8190,7 @@
         </p:nvSpPr>
         <p:spPr>
           <a:xfrm>
-            <a:off x="1780539" y="5655719"/>
+            <a:off x="1544319" y="5370032"/>
             <a:ext cx="9547861" cy="1107996"/>
           </a:xfrm>
           <a:prstGeom prst="rect">
@@ -8666,16 +8281,12 @@
   <p:clrMapOvr>
     <a:masterClrMapping/>
   </p:clrMapOvr>
-  <mc:AlternateContent xmlns:mc="http://schemas.openxmlformats.org/markup-compatibility/2006" xmlns:p14="http://schemas.microsoft.com/office/powerpoint/2010/main">
-    <mc:Choice Requires="p14">
-      <p:transition spd="med" p14:dur="700">
-        <p:fade/>
-      </p:transition>
+  <mc:AlternateContent xmlns:mc="http://schemas.openxmlformats.org/markup-compatibility/2006">
+    <mc:Choice xmlns:p14="http://schemas.microsoft.com/office/powerpoint/2010/main" Requires="p14">
+      <p:transition p14:dur="0"/>
     </mc:Choice>
-    <mc:Fallback xmlns="">
-      <p:transition spd="med">
-        <p:fade/>
-      </p:transition>
+    <mc:Fallback>
+      <p:transition/>
     </mc:Fallback>
   </mc:AlternateContent>
 </p:sld>
@@ -8686,7 +8297,13 @@
   <p:cSld>
     <p:spTree>
       <p:nvGrpSpPr>
-        <p:cNvPr id="1" name=""/>
+        <p:cNvPr id="1" name="">
+          <a:extLst>
+            <a:ext uri="{FF2B5EF4-FFF2-40B4-BE49-F238E27FC236}">
+              <a16:creationId xmlns:a16="http://schemas.microsoft.com/office/drawing/2014/main" id="{C7C41353-EAC3-F81F-2D2D-32441E3DC39B}"/>
+            </a:ext>
+          </a:extLst>
+        </p:cNvPr>
         <p:cNvGrpSpPr/>
         <p:nvPr/>
       </p:nvGrpSpPr>
@@ -8700,7 +8317,13 @@
       </p:grpSpPr>
       <p:sp>
         <p:nvSpPr>
-          <p:cNvPr id="3" name="タイトル 2"/>
+          <p:cNvPr id="3" name="タイトル 2">
+            <a:extLst>
+              <a:ext uri="{FF2B5EF4-FFF2-40B4-BE49-F238E27FC236}">
+                <a16:creationId xmlns:a16="http://schemas.microsoft.com/office/drawing/2014/main" id="{8FA60CB6-00E7-E311-67DD-3AD7D6CF2E13}"/>
+              </a:ext>
+            </a:extLst>
+          </p:cNvPr>
           <p:cNvSpPr>
             <a:spLocks noGrp="1"/>
           </p:cNvSpPr>
@@ -8708,25 +8331,39 @@
             <p:ph type="title"/>
           </p:nvPr>
         </p:nvSpPr>
-        <p:spPr/>
-        <p:txBody>
-          <a:bodyPr rtlCol="0"/>
+        <p:spPr>
+          <a:xfrm>
+            <a:off x="609600" y="704088"/>
+            <a:ext cx="11054080" cy="606552"/>
+          </a:xfrm>
+        </p:spPr>
+        <p:txBody>
+          <a:bodyPr rtlCol="0">
+            <a:normAutofit fontScale="90000"/>
+          </a:bodyPr>
           <a:lstStyle/>
           <a:p>
             <a:pPr rtl="0"/>
             <a:r>
-              <a:rPr lang="ja-JP" altLang="en-US" dirty="0">
-                <a:latin typeface="Meiryo UI" panose="020B0604030504040204" pitchFamily="50" charset="-128"/>
-                <a:ea typeface="Meiryo UI" panose="020B0604030504040204" pitchFamily="50" charset="-128"/>
-              </a:rPr>
-              <a:t>ブレーンストーミングの目標</a:t>
-            </a:r>
-          </a:p>
-        </p:txBody>
-      </p:sp>
-      <p:sp>
-        <p:nvSpPr>
-          <p:cNvPr id="2" name="コンテンツ プレースホルダー 1"/>
+              <a:rPr lang="ja-JP" altLang="en-US" dirty="0"/>
+              <a:t>研究目的</a:t>
+            </a:r>
+            <a:endParaRPr lang="ja-JP" altLang="en-US" dirty="0">
+              <a:latin typeface="Meiryo UI" panose="020B0604030504040204" pitchFamily="50" charset="-128"/>
+              <a:ea typeface="Meiryo UI" panose="020B0604030504040204" pitchFamily="50" charset="-128"/>
+            </a:endParaRPr>
+          </a:p>
+        </p:txBody>
+      </p:sp>
+      <p:sp>
+        <p:nvSpPr>
+          <p:cNvPr id="2" name="コンテンツ プレースホルダー 1">
+            <a:extLst>
+              <a:ext uri="{FF2B5EF4-FFF2-40B4-BE49-F238E27FC236}">
+                <a16:creationId xmlns:a16="http://schemas.microsoft.com/office/drawing/2014/main" id="{32D4271E-2B94-8AE4-A59B-A4B629DF2C4C}"/>
+              </a:ext>
+            </a:extLst>
+          </p:cNvPr>
           <p:cNvSpPr>
             <a:spLocks noGrp="1"/>
           </p:cNvSpPr>
@@ -8734,151 +8371,113 @@
             <p:ph idx="1"/>
           </p:nvPr>
         </p:nvSpPr>
-        <p:spPr/>
-        <p:txBody>
-          <a:bodyPr rtlCol="0"/>
+        <p:spPr>
+          <a:xfrm>
+            <a:off x="609599" y="1564640"/>
+            <a:ext cx="11417301" cy="4791190"/>
+          </a:xfrm>
+        </p:spPr>
+        <p:txBody>
+          <a:bodyPr rtlCol="0">
+            <a:normAutofit lnSpcReduction="10000"/>
+          </a:bodyPr>
           <a:lstStyle/>
           <a:p>
-            <a:pPr rtl="0"/>
-            <a:r>
-              <a:rPr lang="ja-JP" altLang="en-US" dirty="0">
-                <a:latin typeface="ＭＳ 明朝" panose="02020609040205080304" pitchFamily="17" charset="-128"/>
-                <a:ea typeface="ＭＳ 明朝" panose="02020609040205080304" pitchFamily="17" charset="-128"/>
-              </a:rPr>
-              <a:t>エクササイズの目標について説明します。</a:t>
-            </a:r>
-          </a:p>
-          <a:p>
-            <a:pPr lvl="1" rtl="0"/>
-            <a:r>
-              <a:rPr lang="ja-JP" altLang="en-US" dirty="0">
-                <a:latin typeface="ＭＳ 明朝" panose="02020609040205080304" pitchFamily="17" charset="-128"/>
-                <a:ea typeface="ＭＳ 明朝" panose="02020609040205080304" pitchFamily="17" charset="-128"/>
-              </a:rPr>
-              <a:t>新製品またはサービスのアイデア</a:t>
-            </a:r>
-            <a:r>
-              <a:rPr lang="en-US" altLang="ja-JP" dirty="0">
-                <a:latin typeface="ＭＳ 明朝" panose="02020609040205080304" pitchFamily="17" charset="-128"/>
-                <a:ea typeface="ＭＳ 明朝" panose="02020609040205080304" pitchFamily="17" charset="-128"/>
-              </a:rPr>
-              <a:t>?</a:t>
-            </a:r>
-          </a:p>
-          <a:p>
-            <a:pPr lvl="1" rtl="0"/>
-            <a:r>
-              <a:rPr lang="ja-JP" altLang="en-US" dirty="0">
-                <a:latin typeface="ＭＳ 明朝" panose="02020609040205080304" pitchFamily="17" charset="-128"/>
-                <a:ea typeface="ＭＳ 明朝" panose="02020609040205080304" pitchFamily="17" charset="-128"/>
-              </a:rPr>
-              <a:t>新機能のアイデア</a:t>
-            </a:r>
-            <a:r>
-              <a:rPr lang="en-US" altLang="ja-JP" dirty="0">
-                <a:latin typeface="ＭＳ 明朝" panose="02020609040205080304" pitchFamily="17" charset="-128"/>
-                <a:ea typeface="ＭＳ 明朝" panose="02020609040205080304" pitchFamily="17" charset="-128"/>
-              </a:rPr>
-              <a:t>?</a:t>
-            </a:r>
-          </a:p>
-          <a:p>
-            <a:pPr lvl="1" rtl="0"/>
-            <a:r>
-              <a:rPr lang="ja-JP" altLang="en-US" dirty="0">
-                <a:latin typeface="ＭＳ 明朝" panose="02020609040205080304" pitchFamily="17" charset="-128"/>
-                <a:ea typeface="ＭＳ 明朝" panose="02020609040205080304" pitchFamily="17" charset="-128"/>
-              </a:rPr>
-              <a:t>機能</a:t>
-            </a:r>
-            <a:r>
-              <a:rPr lang="en-US" altLang="ja-JP" dirty="0">
-                <a:latin typeface="ＭＳ 明朝" panose="02020609040205080304" pitchFamily="17" charset="-128"/>
-                <a:ea typeface="ＭＳ 明朝" panose="02020609040205080304" pitchFamily="17" charset="-128"/>
-              </a:rPr>
-              <a:t>/</a:t>
-            </a:r>
-            <a:r>
-              <a:rPr lang="ja-JP" altLang="en-US" dirty="0">
-                <a:latin typeface="ＭＳ 明朝" panose="02020609040205080304" pitchFamily="17" charset="-128"/>
-                <a:ea typeface="ＭＳ 明朝" panose="02020609040205080304" pitchFamily="17" charset="-128"/>
-              </a:rPr>
-              <a:t>製品名</a:t>
-            </a:r>
-            <a:r>
-              <a:rPr lang="en-US" altLang="ja-JP" dirty="0">
-                <a:latin typeface="ＭＳ 明朝" panose="02020609040205080304" pitchFamily="17" charset="-128"/>
-                <a:ea typeface="ＭＳ 明朝" panose="02020609040205080304" pitchFamily="17" charset="-128"/>
-              </a:rPr>
-              <a:t>?</a:t>
-            </a:r>
-          </a:p>
-          <a:p>
-            <a:pPr lvl="1" rtl="0"/>
-            <a:r>
-              <a:rPr lang="ja-JP" altLang="en-US" dirty="0">
-                <a:latin typeface="ＭＳ 明朝" panose="02020609040205080304" pitchFamily="17" charset="-128"/>
-                <a:ea typeface="ＭＳ 明朝" panose="02020609040205080304" pitchFamily="17" charset="-128"/>
-              </a:rPr>
-              <a:t>販売促進のアイデア</a:t>
-            </a:r>
-            <a:r>
-              <a:rPr lang="en-US" altLang="ja-JP" dirty="0">
-                <a:latin typeface="ＭＳ 明朝" panose="02020609040205080304" pitchFamily="17" charset="-128"/>
-                <a:ea typeface="ＭＳ 明朝" panose="02020609040205080304" pitchFamily="17" charset="-128"/>
-              </a:rPr>
-              <a:t>?</a:t>
-            </a:r>
-          </a:p>
-          <a:p>
-            <a:pPr lvl="1" rtl="0"/>
-            <a:r>
-              <a:rPr lang="ja-JP" altLang="en-US" dirty="0">
-                <a:latin typeface="ＭＳ 明朝" panose="02020609040205080304" pitchFamily="17" charset="-128"/>
-                <a:ea typeface="ＭＳ 明朝" panose="02020609040205080304" pitchFamily="17" charset="-128"/>
-              </a:rPr>
-              <a:t>何かを行うための新しいプロセス</a:t>
-            </a:r>
-            <a:r>
-              <a:rPr lang="en-US" altLang="ja-JP" dirty="0">
-                <a:latin typeface="ＭＳ 明朝" panose="02020609040205080304" pitchFamily="17" charset="-128"/>
-                <a:ea typeface="ＭＳ 明朝" panose="02020609040205080304" pitchFamily="17" charset="-128"/>
-              </a:rPr>
-              <a:t>?</a:t>
-            </a:r>
-          </a:p>
-          <a:p>
-            <a:pPr rtl="0"/>
-            <a:r>
-              <a:rPr lang="ja-JP" altLang="en-US" dirty="0">
-                <a:latin typeface="ＭＳ 明朝" panose="02020609040205080304" pitchFamily="17" charset="-128"/>
-                <a:ea typeface="ＭＳ 明朝" panose="02020609040205080304" pitchFamily="17" charset="-128"/>
-              </a:rPr>
-              <a:t>重要な要件や制限を定義します。</a:t>
-            </a:r>
+            <a:pPr fontAlgn="t"/>
+            <a:r>
+              <a:rPr lang="ja-JP" altLang="ja-JP" dirty="0"/>
+              <a:t>児童がダークパターンに関する知識を実際の意思決定場面で活用できるか（内面化）を，現実に近いシミュレーション環境上の行動として評価可能な「実践的評価環境」を構築する</a:t>
+            </a:r>
+            <a:endParaRPr lang="en-US" altLang="ja-JP" dirty="0"/>
+          </a:p>
+          <a:p>
+            <a:pPr marL="0" indent="0" fontAlgn="t">
+              <a:buNone/>
+            </a:pPr>
+            <a:endParaRPr lang="en-US" altLang="ja-JP" dirty="0"/>
+          </a:p>
+          <a:p>
+            <a:pPr fontAlgn="t"/>
+            <a:r>
+              <a:rPr lang="ja-JP" altLang="en-US" b="1" dirty="0"/>
+              <a:t>既存研究</a:t>
+            </a:r>
+            <a:endParaRPr lang="en-US" altLang="ja-JP" b="1" dirty="0"/>
+          </a:p>
+          <a:p>
+            <a:pPr lvl="1" fontAlgn="t"/>
+            <a:r>
+              <a:rPr lang="ja-JP" altLang="en-US" dirty="0"/>
+              <a:t>シナリオ評</a:t>
+            </a:r>
+            <a:r>
+              <a:rPr lang="ja-JP" altLang="ja-JP" dirty="0"/>
+              <a:t>・シナリオ評価では「押す／押さない」などの選択結果で評価 </a:t>
+            </a:r>
+            <a:endParaRPr lang="en-US" altLang="ja-JP" dirty="0"/>
+          </a:p>
+          <a:p>
+            <a:pPr lvl="1" fontAlgn="t"/>
+            <a:r>
+              <a:rPr lang="ja-JP" altLang="ja-JP" dirty="0"/>
+              <a:t>アプリ評価は観察・インタビューが中心</a:t>
+            </a:r>
+            <a:endParaRPr lang="en-US" altLang="ja-JP" dirty="0"/>
+          </a:p>
+          <a:p>
+            <a:pPr marL="393192" lvl="1" indent="0" fontAlgn="t">
+              <a:buNone/>
+            </a:pPr>
+            <a:r>
+              <a:rPr lang="ja-JP" altLang="en-US" dirty="0"/>
+              <a:t>　　→　</a:t>
+            </a:r>
+            <a:r>
+              <a:rPr lang="ja-JP" altLang="ja-JP" dirty="0"/>
+              <a:t>知識が実際の行動として使えるかは分からない</a:t>
+            </a:r>
+          </a:p>
+          <a:p>
+            <a:pPr fontAlgn="t"/>
+            <a:r>
+              <a:rPr lang="ja-JP" altLang="en-US" b="1" dirty="0"/>
+              <a:t>本研究</a:t>
+            </a:r>
+            <a:endParaRPr lang="en-US" altLang="ja-JP" b="1" dirty="0"/>
+          </a:p>
+          <a:p>
+            <a:pPr lvl="1" fontAlgn="t"/>
+            <a:r>
+              <a:rPr lang="ja-JP" altLang="ja-JP" dirty="0"/>
+              <a:t>その知識を回避行動として活用できるかが十分に検証されていないという課題に着目する</a:t>
+            </a:r>
+          </a:p>
+          <a:p>
+            <a:pPr lvl="1" fontAlgn="t"/>
+            <a:endParaRPr lang="en-US" altLang="ja-JP" dirty="0"/>
+          </a:p>
+          <a:p>
+            <a:pPr lvl="1" fontAlgn="t"/>
+            <a:endParaRPr lang="en-US" altLang="ja-JP" dirty="0"/>
           </a:p>
         </p:txBody>
       </p:sp>
     </p:spTree>
     <p:extLst>
       <p:ext uri="{BB962C8B-B14F-4D97-AF65-F5344CB8AC3E}">
-        <p14:creationId xmlns:p14="http://schemas.microsoft.com/office/powerpoint/2010/main" val="115085417"/>
+        <p14:creationId xmlns:p14="http://schemas.microsoft.com/office/powerpoint/2010/main" val="4288605301"/>
       </p:ext>
     </p:extLst>
   </p:cSld>
   <p:clrMapOvr>
     <a:masterClrMapping/>
   </p:clrMapOvr>
-  <mc:AlternateContent xmlns:mc="http://schemas.openxmlformats.org/markup-compatibility/2006" xmlns:p14="http://schemas.microsoft.com/office/powerpoint/2010/main">
-    <mc:Choice Requires="p14">
-      <p:transition spd="med" p14:dur="700">
-        <p:fade/>
-      </p:transition>
+  <mc:AlternateContent xmlns:mc="http://schemas.openxmlformats.org/markup-compatibility/2006">
+    <mc:Choice xmlns:p14="http://schemas.microsoft.com/office/powerpoint/2010/main" Requires="p14">
+      <p:transition p14:dur="0"/>
     </mc:Choice>
-    <mc:Fallback xmlns="">
-      <p:transition spd="med">
-        <p:fade/>
-      </p:transition>
+    <mc:Fallback>
+      <p:transition/>
     </mc:Fallback>
   </mc:AlternateContent>
 </p:sld>
@@ -8889,7 +8488,13 @@
   <p:cSld>
     <p:spTree>
       <p:nvGrpSpPr>
-        <p:cNvPr id="1" name=""/>
+        <p:cNvPr id="1" name="">
+          <a:extLst>
+            <a:ext uri="{FF2B5EF4-FFF2-40B4-BE49-F238E27FC236}">
+              <a16:creationId xmlns:a16="http://schemas.microsoft.com/office/drawing/2014/main" id="{34AFEE74-0DDA-F366-B8A8-4F2FA43C502D}"/>
+            </a:ext>
+          </a:extLst>
+        </p:cNvPr>
         <p:cNvGrpSpPr/>
         <p:nvPr/>
       </p:nvGrpSpPr>
@@ -8903,7 +8508,13 @@
       </p:grpSpPr>
       <p:sp>
         <p:nvSpPr>
-          <p:cNvPr id="3" name="タイトル 2"/>
+          <p:cNvPr id="3" name="タイトル 2">
+            <a:extLst>
+              <a:ext uri="{FF2B5EF4-FFF2-40B4-BE49-F238E27FC236}">
+                <a16:creationId xmlns:a16="http://schemas.microsoft.com/office/drawing/2014/main" id="{47EF8715-ACBE-78DC-C3B5-929F076A9A1C}"/>
+              </a:ext>
+            </a:extLst>
+          </p:cNvPr>
           <p:cNvSpPr>
             <a:spLocks noGrp="1"/>
           </p:cNvSpPr>
@@ -8911,25 +8522,39 @@
             <p:ph type="title"/>
           </p:nvPr>
         </p:nvSpPr>
-        <p:spPr/>
-        <p:txBody>
-          <a:bodyPr rtlCol="0"/>
+        <p:spPr>
+          <a:xfrm>
+            <a:off x="609600" y="704088"/>
+            <a:ext cx="11054080" cy="606552"/>
+          </a:xfrm>
+        </p:spPr>
+        <p:txBody>
+          <a:bodyPr rtlCol="0">
+            <a:normAutofit fontScale="90000"/>
+          </a:bodyPr>
           <a:lstStyle/>
           <a:p>
             <a:pPr rtl="0"/>
             <a:r>
-              <a:rPr lang="ja-JP" altLang="en-US" dirty="0">
-                <a:latin typeface="Meiryo UI" panose="020B0604030504040204" pitchFamily="50" charset="-128"/>
-                <a:ea typeface="Meiryo UI" panose="020B0604030504040204" pitchFamily="50" charset="-128"/>
-              </a:rPr>
-              <a:t>ルール</a:t>
-            </a:r>
-          </a:p>
-        </p:txBody>
-      </p:sp>
-      <p:sp>
-        <p:nvSpPr>
-          <p:cNvPr id="2" name="コンテンツ プレースホルダー 1"/>
+              <a:rPr lang="ja-JP" altLang="en-US" dirty="0"/>
+              <a:t>研究手法</a:t>
+            </a:r>
+            <a:endParaRPr lang="ja-JP" altLang="en-US" dirty="0">
+              <a:latin typeface="Meiryo UI" panose="020B0604030504040204" pitchFamily="50" charset="-128"/>
+              <a:ea typeface="Meiryo UI" panose="020B0604030504040204" pitchFamily="50" charset="-128"/>
+            </a:endParaRPr>
+          </a:p>
+        </p:txBody>
+      </p:sp>
+      <p:sp>
+        <p:nvSpPr>
+          <p:cNvPr id="2" name="コンテンツ プレースホルダー 1">
+            <a:extLst>
+              <a:ext uri="{FF2B5EF4-FFF2-40B4-BE49-F238E27FC236}">
+                <a16:creationId xmlns:a16="http://schemas.microsoft.com/office/drawing/2014/main" id="{F0035FF7-398C-5D6F-A854-96CA442D8A56}"/>
+              </a:ext>
+            </a:extLst>
+          </p:cNvPr>
           <p:cNvSpPr>
             <a:spLocks noGrp="1"/>
           </p:cNvSpPr>
@@ -8937,224 +8562,140 @@
             <p:ph idx="1"/>
           </p:nvPr>
         </p:nvSpPr>
-        <p:spPr/>
-        <p:txBody>
-          <a:bodyPr rtlCol="0"/>
+        <p:spPr>
+          <a:xfrm>
+            <a:off x="609599" y="1564639"/>
+            <a:ext cx="11292115" cy="5111931"/>
+          </a:xfrm>
+        </p:spPr>
+        <p:txBody>
+          <a:bodyPr rtlCol="0">
+            <a:normAutofit lnSpcReduction="10000"/>
+          </a:bodyPr>
           <a:lstStyle/>
           <a:p>
-            <a:pPr rtl="0"/>
-            <a:r>
-              <a:rPr lang="ja-JP" altLang="en-US" dirty="0">
-                <a:latin typeface="ＭＳ 明朝" panose="02020609040205080304" pitchFamily="17" charset="-128"/>
-                <a:ea typeface="ＭＳ 明朝" panose="02020609040205080304" pitchFamily="17" charset="-128"/>
-              </a:rPr>
-              <a:t>アイデアが出ないのはよくありません。</a:t>
-            </a:r>
-          </a:p>
-          <a:p>
-            <a:pPr rtl="0"/>
-            <a:r>
-              <a:rPr lang="ja-JP" altLang="en-US" dirty="0">
-                <a:latin typeface="ＭＳ 明朝" panose="02020609040205080304" pitchFamily="17" charset="-128"/>
-                <a:ea typeface="ＭＳ 明朝" panose="02020609040205080304" pitchFamily="17" charset="-128"/>
-              </a:rPr>
-              <a:t>クリエイティブに。</a:t>
-            </a:r>
-          </a:p>
-          <a:p>
-            <a:pPr rtl="0"/>
-            <a:r>
-              <a:rPr lang="ja-JP" altLang="en-US" dirty="0">
-                <a:latin typeface="ＭＳ 明朝" panose="02020609040205080304" pitchFamily="17" charset="-128"/>
-                <a:ea typeface="ＭＳ 明朝" panose="02020609040205080304" pitchFamily="17" charset="-128"/>
-              </a:rPr>
-              <a:t>冒険しましょう。</a:t>
-            </a:r>
-          </a:p>
-          <a:p>
-            <a:pPr rtl="0"/>
-            <a:r>
-              <a:rPr lang="ja-JP" altLang="en-US" dirty="0">
-                <a:latin typeface="ＭＳ 明朝" panose="02020609040205080304" pitchFamily="17" charset="-128"/>
-                <a:ea typeface="ＭＳ 明朝" panose="02020609040205080304" pitchFamily="17" charset="-128"/>
-              </a:rPr>
-              <a:t>批判してはいけません</a:t>
+            <a:pPr fontAlgn="t">
+              <a:spcAft>
+                <a:spcPts val="1200"/>
+              </a:spcAft>
+            </a:pPr>
+            <a:r>
+              <a:rPr lang="ja-JP" altLang="ja-JP" dirty="0"/>
+              <a:t>「ダークパターン教育」と「実践的行動評価」をフェーズ分けし、児童の警戒意識と油断状態の双方からダークパターンへの反応を測定する。</a:t>
+            </a:r>
+            <a:endParaRPr lang="en-US" altLang="ja-JP" dirty="0"/>
+          </a:p>
+          <a:p>
+            <a:pPr marL="0" indent="0" fontAlgn="t">
+              <a:buNone/>
+            </a:pPr>
+            <a:r>
+              <a:rPr lang="ja-JP" altLang="en-US" b="1" dirty="0"/>
+              <a:t>手順</a:t>
+            </a:r>
+            <a:endParaRPr lang="en-US" altLang="ja-JP" b="1" dirty="0"/>
+          </a:p>
+          <a:p>
+            <a:pPr fontAlgn="t"/>
+            <a:r>
+              <a:rPr lang="ja-JP" altLang="en-US" b="1" dirty="0"/>
+              <a:t>ダークパターン教育</a:t>
+            </a:r>
+            <a:endParaRPr lang="en-US" altLang="ja-JP" b="1" dirty="0"/>
+          </a:p>
+          <a:p>
+            <a:pPr lvl="1" fontAlgn="t"/>
+            <a:r>
+              <a:rPr lang="ja-JP" altLang="ja-JP" dirty="0"/>
+              <a:t>模擬ECサイト等を用い、</a:t>
+            </a:r>
+            <a:r>
+              <a:rPr lang="ja-JP" altLang="en-US" dirty="0"/>
+              <a:t>説明後</a:t>
+            </a:r>
+            <a:r>
+              <a:rPr lang="ja-JP" altLang="ja-JP" dirty="0"/>
+              <a:t>児童が能動的にダークパターンを探索・識別する。</a:t>
+            </a:r>
+          </a:p>
+          <a:p>
+            <a:pPr lvl="1" fontAlgn="t"/>
+            <a:r>
+              <a:rPr lang="ja-JP" altLang="ja-JP" dirty="0"/>
+              <a:t>探索終了後、</a:t>
+            </a:r>
+            <a:r>
+              <a:rPr lang="ja-JP" altLang="en-US" dirty="0"/>
+              <a:t>その</a:t>
+            </a:r>
+            <a:r>
+              <a:rPr lang="ja-JP" altLang="ja-JP" dirty="0"/>
+              <a:t>UIがユーザをどのように意図しない意思決定へ誘導するか、その仕組みを詳細に解説し知識を補強する。</a:t>
+            </a:r>
+            <a:endParaRPr lang="en-US" altLang="ja-JP" dirty="0"/>
+          </a:p>
+          <a:p>
+            <a:pPr fontAlgn="t"/>
+            <a:r>
+              <a:rPr lang="ja-JP" altLang="ja-JP" b="1" dirty="0"/>
+              <a:t>報酬獲得タスク</a:t>
+            </a:r>
+            <a:endParaRPr lang="en-US" altLang="ja-JP" b="1" dirty="0"/>
+          </a:p>
+          <a:p>
+            <a:pPr lvl="1" fontAlgn="t"/>
+            <a:r>
+              <a:rPr lang="ja-JP" altLang="en-US" dirty="0"/>
+              <a:t>ダークパターンの教育終了を伝え、学習報酬を渡すといい</a:t>
+            </a:r>
+            <a:r>
+              <a:rPr lang="ja-JP" altLang="ja-JP" dirty="0"/>
+              <a:t>心理的警戒</a:t>
+            </a:r>
+            <a:r>
+              <a:rPr lang="ja-JP" altLang="en-US" dirty="0"/>
+              <a:t>を解く。</a:t>
+            </a:r>
+            <a:endParaRPr lang="en-US" altLang="ja-JP" dirty="0"/>
+          </a:p>
+          <a:p>
+            <a:pPr lvl="1" fontAlgn="t"/>
+            <a:r>
+              <a:rPr lang="ja-JP" altLang="ja-JP" dirty="0"/>
+              <a:t>報酬選択の意思決定場面</a:t>
+            </a:r>
+            <a:r>
+              <a:rPr lang="ja-JP" altLang="en-US" dirty="0"/>
+              <a:t>においてダークパターンを仕掛け</a:t>
+            </a:r>
+            <a:r>
+              <a:rPr lang="ja-JP" altLang="ja-JP" dirty="0"/>
+              <a:t>獲得した知識が実際の行動（回避行動）として活用できるかをテストする</a:t>
             </a:r>
             <a:r>
               <a:rPr lang="ja-JP" altLang="en-US" dirty="0"/>
               <a:t>。</a:t>
             </a:r>
+            <a:endParaRPr lang="en-US" altLang="ja-JP" dirty="0"/>
           </a:p>
         </p:txBody>
       </p:sp>
     </p:spTree>
     <p:extLst>
       <p:ext uri="{BB962C8B-B14F-4D97-AF65-F5344CB8AC3E}">
-        <p14:creationId xmlns:p14="http://schemas.microsoft.com/office/powerpoint/2010/main" val="3252008090"/>
+        <p14:creationId xmlns:p14="http://schemas.microsoft.com/office/powerpoint/2010/main" val="3748955085"/>
       </p:ext>
     </p:extLst>
   </p:cSld>
   <p:clrMapOvr>
     <a:masterClrMapping/>
   </p:clrMapOvr>
-  <mc:AlternateContent xmlns:mc="http://schemas.openxmlformats.org/markup-compatibility/2006" xmlns:p14="http://schemas.microsoft.com/office/powerpoint/2010/main">
-    <mc:Choice Requires="p14">
-      <p:transition spd="med" p14:dur="700">
-        <p:fade/>
-      </p:transition>
+  <mc:AlternateContent xmlns:mc="http://schemas.openxmlformats.org/markup-compatibility/2006">
+    <mc:Choice xmlns:p14="http://schemas.microsoft.com/office/powerpoint/2010/main" Requires="p14">
+      <p:transition p14:dur="0"/>
     </mc:Choice>
-    <mc:Fallback xmlns="">
-      <p:transition spd="med">
-        <p:fade/>
-      </p:transition>
-    </mc:Fallback>
-  </mc:AlternateContent>
-</p:sld>
-</file>
-
-<file path=ppt/slides/slide9.xml><?xml version="1.0" encoding="utf-8"?>
-<p:sld xmlns:a="http://schemas.openxmlformats.org/drawingml/2006/main" xmlns:r="http://schemas.openxmlformats.org/officeDocument/2006/relationships" xmlns:p="http://schemas.openxmlformats.org/presentationml/2006/main">
-  <p:cSld>
-    <p:spTree>
-      <p:nvGrpSpPr>
-        <p:cNvPr id="1" name=""/>
-        <p:cNvGrpSpPr/>
-        <p:nvPr/>
-      </p:nvGrpSpPr>
-      <p:grpSpPr>
-        <a:xfrm>
-          <a:off x="0" y="0"/>
-          <a:ext cx="0" cy="0"/>
-          <a:chOff x="0" y="0"/>
-          <a:chExt cx="0" cy="0"/>
-        </a:xfrm>
-      </p:grpSpPr>
-      <p:sp>
-        <p:nvSpPr>
-          <p:cNvPr id="3" name="タイトル 2"/>
-          <p:cNvSpPr>
-            <a:spLocks noGrp="1"/>
-          </p:cNvSpPr>
-          <p:nvPr>
-            <p:ph type="title"/>
-          </p:nvPr>
-        </p:nvSpPr>
-        <p:spPr/>
-        <p:txBody>
-          <a:bodyPr rtlCol="0"/>
-          <a:lstStyle/>
-          <a:p>
-            <a:pPr rtl="0"/>
-            <a:r>
-              <a:rPr lang="ja-JP" altLang="en-US" dirty="0">
-                <a:latin typeface="Meiryo UI" panose="020B0604030504040204" pitchFamily="50" charset="-128"/>
-                <a:ea typeface="Meiryo UI" panose="020B0604030504040204" pitchFamily="50" charset="-128"/>
-              </a:rPr>
-              <a:t>ブレーンストーミングの活動</a:t>
-            </a:r>
-          </a:p>
-        </p:txBody>
-      </p:sp>
-      <p:sp>
-        <p:nvSpPr>
-          <p:cNvPr id="2" name="コンテンツ プレースホルダー 1"/>
-          <p:cNvSpPr>
-            <a:spLocks noGrp="1"/>
-          </p:cNvSpPr>
-          <p:nvPr>
-            <p:ph idx="1"/>
-          </p:nvPr>
-        </p:nvSpPr>
-        <p:spPr/>
-        <p:txBody>
-          <a:bodyPr rtlCol="0"/>
-          <a:lstStyle/>
-          <a:p>
-            <a:pPr rtl="0"/>
-            <a:r>
-              <a:rPr lang="ja-JP" altLang="en-US" dirty="0">
-                <a:latin typeface="ＭＳ 明朝" panose="02020609040205080304" pitchFamily="17" charset="-128"/>
-                <a:ea typeface="ＭＳ 明朝" panose="02020609040205080304" pitchFamily="17" charset="-128"/>
-              </a:rPr>
-              <a:t>アイデアを出します。</a:t>
-            </a:r>
-          </a:p>
-          <a:p>
-            <a:pPr lvl="1" rtl="0"/>
-            <a:r>
-              <a:rPr lang="ja-JP" altLang="en-US" dirty="0">
-                <a:latin typeface="ＭＳ 明朝" panose="02020609040205080304" pitchFamily="17" charset="-128"/>
-                <a:ea typeface="ＭＳ 明朝" panose="02020609040205080304" pitchFamily="17" charset="-128"/>
-              </a:rPr>
-              <a:t>ゲームやエクササイズで、創造的思考の “ウォーミング アップ” をします。</a:t>
-            </a:r>
-          </a:p>
-          <a:p>
-            <a:pPr lvl="1" rtl="0"/>
-            <a:r>
-              <a:rPr lang="ja-JP" altLang="en-US" dirty="0">
-                <a:latin typeface="ＭＳ 明朝" panose="02020609040205080304" pitchFamily="17" charset="-128"/>
-                <a:ea typeface="ＭＳ 明朝" panose="02020609040205080304" pitchFamily="17" charset="-128"/>
-              </a:rPr>
-              <a:t>アイデアがあまり出ない場合は、斬新なアイデアを生み出すために他のエクササイズを試してみます。</a:t>
-            </a:r>
-          </a:p>
-          <a:p>
-            <a:pPr lvl="1" rtl="0"/>
-            <a:r>
-              <a:rPr lang="ja-JP" altLang="en-US" dirty="0">
-                <a:latin typeface="ＭＳ 明朝" panose="02020609040205080304" pitchFamily="17" charset="-128"/>
-                <a:ea typeface="ＭＳ 明朝" panose="02020609040205080304" pitchFamily="17" charset="-128"/>
-              </a:rPr>
-              <a:t>小さいグループに分けると、うまくいくことがあります。</a:t>
-            </a:r>
-          </a:p>
-          <a:p>
-            <a:pPr rtl="0"/>
-            <a:r>
-              <a:rPr lang="ja-JP" altLang="en-US" dirty="0">
-                <a:latin typeface="ＭＳ 明朝" panose="02020609040205080304" pitchFamily="17" charset="-128"/>
-                <a:ea typeface="ＭＳ 明朝" panose="02020609040205080304" pitchFamily="17" charset="-128"/>
-              </a:rPr>
-              <a:t>コンピューターを使って、すべてのコメント</a:t>
-            </a:r>
-            <a:r>
-              <a:rPr lang="en-US" altLang="ja-JP" dirty="0">
-                <a:latin typeface="ＭＳ 明朝" panose="02020609040205080304" pitchFamily="17" charset="-128"/>
-                <a:ea typeface="ＭＳ 明朝" panose="02020609040205080304" pitchFamily="17" charset="-128"/>
-              </a:rPr>
-              <a:t>/</a:t>
-            </a:r>
-            <a:r>
-              <a:rPr lang="ja-JP" altLang="en-US" dirty="0">
-                <a:latin typeface="ＭＳ 明朝" panose="02020609040205080304" pitchFamily="17" charset="-128"/>
-                <a:ea typeface="ＭＳ 明朝" panose="02020609040205080304" pitchFamily="17" charset="-128"/>
-              </a:rPr>
-              <a:t>アイデアをキャプチャします。</a:t>
-            </a:r>
-          </a:p>
-        </p:txBody>
-      </p:sp>
-    </p:spTree>
-    <p:extLst>
-      <p:ext uri="{BB962C8B-B14F-4D97-AF65-F5344CB8AC3E}">
-        <p14:creationId xmlns:p14="http://schemas.microsoft.com/office/powerpoint/2010/main" val="1419453836"/>
-      </p:ext>
-    </p:extLst>
-  </p:cSld>
-  <p:clrMapOvr>
-    <a:masterClrMapping/>
-  </p:clrMapOvr>
-  <mc:AlternateContent xmlns:mc="http://schemas.openxmlformats.org/markup-compatibility/2006" xmlns:p14="http://schemas.microsoft.com/office/powerpoint/2010/main">
-    <mc:Choice Requires="p14">
-      <p:transition spd="med" p14:dur="700">
-        <p:fade/>
-      </p:transition>
-    </mc:Choice>
-    <mc:Fallback xmlns="">
-      <p:transition spd="med">
-        <p:fade/>
-      </p:transition>
+    <mc:Fallback>
+      <p:transition/>
     </mc:Fallback>
   </mc:AlternateContent>
 </p:sld>

--- a/自身の研究/大学院での研究/修士論文進捗発表.pptx
+++ b/自身の研究/大学院での研究/修士論文進捗発表.pptx
@@ -5,10 +5,10 @@
     <p:sldMasterId id="2147483684" r:id="rId1"/>
   </p:sldMasterIdLst>
   <p:notesMasterIdLst>
-    <p:notesMasterId r:id="rId10"/>
+    <p:notesMasterId r:id="rId16"/>
   </p:notesMasterIdLst>
   <p:handoutMasterIdLst>
-    <p:handoutMasterId r:id="rId11"/>
+    <p:handoutMasterId r:id="rId17"/>
   </p:handoutMasterIdLst>
   <p:sldIdLst>
     <p:sldId id="272" r:id="rId2"/>
@@ -19,6 +19,12 @@
     <p:sldId id="282" r:id="rId7"/>
     <p:sldId id="283" r:id="rId8"/>
     <p:sldId id="284" r:id="rId9"/>
+    <p:sldId id="291" r:id="rId10"/>
+    <p:sldId id="285" r:id="rId11"/>
+    <p:sldId id="286" r:id="rId12"/>
+    <p:sldId id="288" r:id="rId13"/>
+    <p:sldId id="289" r:id="rId14"/>
+    <p:sldId id="290" r:id="rId15"/>
   </p:sldIdLst>
   <p:sldSz cx="12192000" cy="6858000"/>
   <p:notesSz cx="6858000" cy="9144000"/>
@@ -752,10 +758,77 @@
           <a:lstStyle/>
           <a:p>
             <a:pPr rtl="0"/>
-            <a:endParaRPr lang="ja-JP" altLang="en-US" dirty="0">
-              <a:latin typeface="Meiryo UI" panose="020B0604030504040204" pitchFamily="50" charset="-128"/>
-              <a:ea typeface="Meiryo UI" panose="020B0604030504040204" pitchFamily="50" charset="-128"/>
-            </a:endParaRPr>
+            <a:r>
+              <a:rPr lang="ja-JP" altLang="ja-JP" sz="1200" b="0" dirty="0"/>
+              <a:t>児童におけるダークパターン知識の行動活用に関する研究</a:t>
+            </a:r>
+            <a:r>
+              <a:rPr lang="ja-JP" altLang="en-US" sz="1200" b="0" dirty="0"/>
+              <a:t>、</a:t>
+            </a:r>
+            <a:r>
+              <a:rPr lang="ja-JP" altLang="ja-JP" sz="1000" b="0" dirty="0"/>
+              <a:t>シミュレーション環境を用いた実践的評価</a:t>
+            </a:r>
+            <a:r>
+              <a:rPr lang="ja-JP" altLang="en-US" sz="1000" b="0" dirty="0"/>
+              <a:t>。</a:t>
+            </a:r>
+            <a:endParaRPr lang="en-US" altLang="ja-JP" sz="1000" b="0" dirty="0"/>
+          </a:p>
+          <a:p>
+            <a:pPr marL="0" marR="0" lvl="0" indent="0" algn="l" defTabSz="914400" rtl="0" eaLnBrk="1" fontAlgn="auto" latinLnBrk="0" hangingPunct="1">
+              <a:lnSpc>
+                <a:spcPct val="100000"/>
+              </a:lnSpc>
+              <a:spcBef>
+                <a:spcPts val="0"/>
+              </a:spcBef>
+              <a:spcAft>
+                <a:spcPts val="0"/>
+              </a:spcAft>
+              <a:buClrTx/>
+              <a:buSzTx/>
+              <a:buFontTx/>
+              <a:buNone/>
+              <a:tabLst/>
+              <a:defRPr/>
+            </a:pPr>
+            <a:r>
+              <a:rPr lang="zh-TW" altLang="en-US" sz="1200" dirty="0"/>
+              <a:t>東京情報大学大学院 総合情報学研究科</a:t>
+            </a:r>
+            <a:r>
+              <a:rPr lang="ja-JP" altLang="en-US" sz="1200" dirty="0">
+                <a:latin typeface="Meiryo UI" panose="020B0604030504040204" pitchFamily="50" charset="-128"/>
+                <a:ea typeface="Meiryo UI" panose="020B0604030504040204" pitchFamily="50" charset="-128"/>
+              </a:rPr>
+              <a:t>　</a:t>
+            </a:r>
+            <a:r>
+              <a:rPr lang="zh-TW" altLang="en-US" sz="1200" dirty="0"/>
+              <a:t>博士前期課程 </a:t>
+            </a:r>
+            <a:r>
+              <a:rPr lang="en-US" altLang="zh-TW" sz="1200" dirty="0"/>
+              <a:t>1</a:t>
+            </a:r>
+            <a:r>
+              <a:rPr lang="zh-TW" altLang="en-US" sz="1200" dirty="0"/>
+              <a:t>年 </a:t>
+            </a:r>
+            <a:r>
+              <a:rPr lang="ja-JP" altLang="en-US" sz="1200" dirty="0"/>
+              <a:t>　西村和真が発表させていただきます。</a:t>
+            </a:r>
+            <a:br>
+              <a:rPr lang="en-US" altLang="ja-JP" sz="1200" dirty="0"/>
+            </a:br>
+            <a:r>
+              <a:rPr lang="ja-JP" altLang="en-US" sz="1200" dirty="0"/>
+              <a:t>よろしくお願いいたします。</a:t>
+            </a:r>
+            <a:endParaRPr lang="en-US" altLang="zh-TW" sz="1200" dirty="0"/>
           </a:p>
         </p:txBody>
       </p:sp>
@@ -793,6 +866,937 @@
     <p:extLst>
       <p:ext uri="{BB962C8B-B14F-4D97-AF65-F5344CB8AC3E}">
         <p14:creationId xmlns:p14="http://schemas.microsoft.com/office/powerpoint/2010/main" val="1495133884"/>
+      </p:ext>
+    </p:extLst>
+  </p:cSld>
+  <p:clrMapOvr>
+    <a:masterClrMapping/>
+  </p:clrMapOvr>
+</p:notes>
+</file>
+
+<file path=ppt/notesSlides/notesSlide10.xml><?xml version="1.0" encoding="utf-8"?>
+<p:notes xmlns:a="http://schemas.openxmlformats.org/drawingml/2006/main" xmlns:r="http://schemas.openxmlformats.org/officeDocument/2006/relationships" xmlns:p="http://schemas.openxmlformats.org/presentationml/2006/main">
+  <p:cSld>
+    <p:spTree>
+      <p:nvGrpSpPr>
+        <p:cNvPr id="1" name="">
+          <a:extLst>
+            <a:ext uri="{FF2B5EF4-FFF2-40B4-BE49-F238E27FC236}">
+              <a16:creationId xmlns:a16="http://schemas.microsoft.com/office/drawing/2014/main" id="{544AA28D-7F1D-9377-DCD4-01C2DC2BB9BE}"/>
+            </a:ext>
+          </a:extLst>
+        </p:cNvPr>
+        <p:cNvGrpSpPr/>
+        <p:nvPr/>
+      </p:nvGrpSpPr>
+      <p:grpSpPr>
+        <a:xfrm>
+          <a:off x="0" y="0"/>
+          <a:ext cx="0" cy="0"/>
+          <a:chOff x="0" y="0"/>
+          <a:chExt cx="0" cy="0"/>
+        </a:xfrm>
+      </p:grpSpPr>
+      <p:sp>
+        <p:nvSpPr>
+          <p:cNvPr id="2" name="スライド イメージ プレースホルダー 1">
+            <a:extLst>
+              <a:ext uri="{FF2B5EF4-FFF2-40B4-BE49-F238E27FC236}">
+                <a16:creationId xmlns:a16="http://schemas.microsoft.com/office/drawing/2014/main" id="{68B38035-E44C-5FF9-7A71-CCCEA9840D1E}"/>
+              </a:ext>
+            </a:extLst>
+          </p:cNvPr>
+          <p:cNvSpPr>
+            <a:spLocks noGrp="1" noRot="1" noChangeAspect="1"/>
+          </p:cNvSpPr>
+          <p:nvPr>
+            <p:ph type="sldImg"/>
+          </p:nvPr>
+        </p:nvSpPr>
+        <p:spPr/>
+      </p:sp>
+      <p:sp>
+        <p:nvSpPr>
+          <p:cNvPr id="3" name="ノート プレースホルダー 2">
+            <a:extLst>
+              <a:ext uri="{FF2B5EF4-FFF2-40B4-BE49-F238E27FC236}">
+                <a16:creationId xmlns:a16="http://schemas.microsoft.com/office/drawing/2014/main" id="{02DE556D-C2DE-2B47-E15A-49E4571B0B9B}"/>
+              </a:ext>
+            </a:extLst>
+          </p:cNvPr>
+          <p:cNvSpPr>
+            <a:spLocks noGrp="1"/>
+          </p:cNvSpPr>
+          <p:nvPr>
+            <p:ph type="body" idx="1"/>
+          </p:nvPr>
+        </p:nvSpPr>
+        <p:spPr/>
+        <p:txBody>
+          <a:bodyPr/>
+          <a:lstStyle/>
+          <a:p>
+            <a:pPr marL="0" marR="0" lvl="0" indent="0" algn="l" defTabSz="914400" rtl="0" eaLnBrk="1" fontAlgn="t" latinLnBrk="0" hangingPunct="1">
+              <a:lnSpc>
+                <a:spcPct val="100000"/>
+              </a:lnSpc>
+              <a:spcBef>
+                <a:spcPts val="0"/>
+              </a:spcBef>
+              <a:spcAft>
+                <a:spcPts val="0"/>
+              </a:spcAft>
+              <a:buClrTx/>
+              <a:buSzTx/>
+              <a:buFontTx/>
+              <a:buNone/>
+              <a:tabLst/>
+              <a:defRPr/>
+            </a:pPr>
+            <a:r>
+              <a:rPr lang="ja-JP" altLang="ja-JP" sz="1200" b="0" i="0" kern="1200" dirty="0">
+                <a:solidFill>
+                  <a:schemeClr val="tx1"/>
+                </a:solidFill>
+                <a:effectLst/>
+                <a:latin typeface="Meiryo UI" panose="020B0604030504040204" pitchFamily="50" charset="-128"/>
+                <a:ea typeface="Meiryo UI" panose="020B0604030504040204" pitchFamily="50" charset="-128"/>
+                <a:cs typeface="+mn-cs"/>
+              </a:rPr>
+              <a:t>評価においては，単に騙されたか回避できたかという結果の正誤ではなく，</a:t>
+            </a:r>
+            <a:r>
+              <a:rPr lang="ja-JP" altLang="ja-JP" dirty="0"/>
+              <a:t>行動ログを用いて，ダークパターンに対する反応を評価</a:t>
+            </a:r>
+            <a:r>
+              <a:rPr lang="ja-JP" altLang="en-US" dirty="0"/>
+              <a:t>します。</a:t>
+            </a:r>
+            <a:br>
+              <a:rPr lang="en-US" altLang="ja-JP" dirty="0"/>
+            </a:br>
+            <a:r>
+              <a:rPr lang="ja-JP" altLang="en-US" dirty="0"/>
+              <a:t>具体的には</a:t>
+            </a:r>
+            <a:r>
+              <a:rPr lang="ja-JP" altLang="ja-JP" sz="1200" b="0" i="0" kern="1200" dirty="0">
+                <a:solidFill>
+                  <a:schemeClr val="tx1"/>
+                </a:solidFill>
+                <a:effectLst/>
+                <a:latin typeface="Meiryo UI" panose="020B0604030504040204" pitchFamily="50" charset="-128"/>
+                <a:ea typeface="Meiryo UI" panose="020B0604030504040204" pitchFamily="50" charset="-128"/>
+                <a:cs typeface="+mn-cs"/>
+              </a:rPr>
+              <a:t>罠に直面した際のボタンを押すまでの反応時間や</a:t>
+            </a:r>
+            <a:r>
+              <a:rPr lang="ja-JP" altLang="en-US" sz="1200" b="0" i="0" kern="1200" dirty="0">
+                <a:solidFill>
+                  <a:schemeClr val="tx1"/>
+                </a:solidFill>
+                <a:effectLst/>
+                <a:latin typeface="Meiryo UI" panose="020B0604030504040204" pitchFamily="50" charset="-128"/>
+                <a:ea typeface="Meiryo UI" panose="020B0604030504040204" pitchFamily="50" charset="-128"/>
+                <a:cs typeface="+mn-cs"/>
+              </a:rPr>
+              <a:t>、マウスの動きである</a:t>
+            </a:r>
+            <a:r>
+              <a:rPr lang="ja-JP" altLang="ja-JP" sz="1200" b="0" i="0" kern="1200" dirty="0">
+                <a:solidFill>
+                  <a:schemeClr val="tx1"/>
+                </a:solidFill>
+                <a:effectLst/>
+                <a:latin typeface="Meiryo UI" panose="020B0604030504040204" pitchFamily="50" charset="-128"/>
+                <a:ea typeface="Meiryo UI" panose="020B0604030504040204" pitchFamily="50" charset="-128"/>
+                <a:cs typeface="+mn-cs"/>
+              </a:rPr>
+              <a:t>確認・離脱といった操作のプロセスを行動ログとして測定します。 これにより，最終的な選択だけでなく， どのような判断過程を経て行動に至ったのかを評価することで， 知識が実際の行動として活用されているかを分析します。</a:t>
+            </a:r>
+          </a:p>
+        </p:txBody>
+      </p:sp>
+      <p:sp>
+        <p:nvSpPr>
+          <p:cNvPr id="4" name="スライド番号プレースホルダー 3">
+            <a:extLst>
+              <a:ext uri="{FF2B5EF4-FFF2-40B4-BE49-F238E27FC236}">
+                <a16:creationId xmlns:a16="http://schemas.microsoft.com/office/drawing/2014/main" id="{ACC984B7-04DD-B2AF-225C-23551AAEBDAF}"/>
+              </a:ext>
+            </a:extLst>
+          </p:cNvPr>
+          <p:cNvSpPr>
+            <a:spLocks noGrp="1"/>
+          </p:cNvSpPr>
+          <p:nvPr>
+            <p:ph type="sldNum" sz="quarter" idx="10"/>
+          </p:nvPr>
+        </p:nvSpPr>
+        <p:spPr/>
+        <p:txBody>
+          <a:bodyPr/>
+          <a:lstStyle/>
+          <a:p>
+            <a:pPr rtl="0"/>
+            <a:fld id="{893B0CF2-7F87-4E02-A248-870047730F99}" type="slidenum">
+              <a:rPr lang="en-US" altLang="ja-JP" smtClean="0">
+                <a:latin typeface="Meiryo UI" panose="020B0604030504040204" pitchFamily="50" charset="-128"/>
+                <a:ea typeface="Meiryo UI" panose="020B0604030504040204" pitchFamily="50" charset="-128"/>
+              </a:rPr>
+              <a:t>10</a:t>
+            </a:fld>
+            <a:endParaRPr lang="ja-JP" altLang="en-US" dirty="0">
+              <a:latin typeface="Meiryo UI" panose="020B0604030504040204" pitchFamily="50" charset="-128"/>
+              <a:ea typeface="Meiryo UI" panose="020B0604030504040204" pitchFamily="50" charset="-128"/>
+            </a:endParaRPr>
+          </a:p>
+        </p:txBody>
+      </p:sp>
+    </p:spTree>
+    <p:extLst>
+      <p:ext uri="{BB962C8B-B14F-4D97-AF65-F5344CB8AC3E}">
+        <p14:creationId xmlns:p14="http://schemas.microsoft.com/office/powerpoint/2010/main" val="2573593110"/>
+      </p:ext>
+    </p:extLst>
+  </p:cSld>
+  <p:clrMapOvr>
+    <a:masterClrMapping/>
+  </p:clrMapOvr>
+</p:notes>
+</file>
+
+<file path=ppt/notesSlides/notesSlide11.xml><?xml version="1.0" encoding="utf-8"?>
+<p:notes xmlns:a="http://schemas.openxmlformats.org/drawingml/2006/main" xmlns:r="http://schemas.openxmlformats.org/officeDocument/2006/relationships" xmlns:p="http://schemas.openxmlformats.org/presentationml/2006/main">
+  <p:cSld>
+    <p:spTree>
+      <p:nvGrpSpPr>
+        <p:cNvPr id="1" name="">
+          <a:extLst>
+            <a:ext uri="{FF2B5EF4-FFF2-40B4-BE49-F238E27FC236}">
+              <a16:creationId xmlns:a16="http://schemas.microsoft.com/office/drawing/2014/main" id="{244D8A93-7D69-3583-3F5B-9C16DB0CFC4E}"/>
+            </a:ext>
+          </a:extLst>
+        </p:cNvPr>
+        <p:cNvGrpSpPr/>
+        <p:nvPr/>
+      </p:nvGrpSpPr>
+      <p:grpSpPr>
+        <a:xfrm>
+          <a:off x="0" y="0"/>
+          <a:ext cx="0" cy="0"/>
+          <a:chOff x="0" y="0"/>
+          <a:chExt cx="0" cy="0"/>
+        </a:xfrm>
+      </p:grpSpPr>
+      <p:sp>
+        <p:nvSpPr>
+          <p:cNvPr id="2" name="スライド イメージ プレースホルダー 1">
+            <a:extLst>
+              <a:ext uri="{FF2B5EF4-FFF2-40B4-BE49-F238E27FC236}">
+                <a16:creationId xmlns:a16="http://schemas.microsoft.com/office/drawing/2014/main" id="{145D0A08-DB0A-FFD0-D4F9-95EEFFA04275}"/>
+              </a:ext>
+            </a:extLst>
+          </p:cNvPr>
+          <p:cNvSpPr>
+            <a:spLocks noGrp="1" noRot="1" noChangeAspect="1"/>
+          </p:cNvSpPr>
+          <p:nvPr>
+            <p:ph type="sldImg"/>
+          </p:nvPr>
+        </p:nvSpPr>
+        <p:spPr/>
+      </p:sp>
+      <p:sp>
+        <p:nvSpPr>
+          <p:cNvPr id="3" name="ノート プレースホルダー 2">
+            <a:extLst>
+              <a:ext uri="{FF2B5EF4-FFF2-40B4-BE49-F238E27FC236}">
+                <a16:creationId xmlns:a16="http://schemas.microsoft.com/office/drawing/2014/main" id="{3A45CD58-F8A6-7325-F975-0EBA0F514DC6}"/>
+              </a:ext>
+            </a:extLst>
+          </p:cNvPr>
+          <p:cNvSpPr>
+            <a:spLocks noGrp="1"/>
+          </p:cNvSpPr>
+          <p:nvPr>
+            <p:ph type="body" idx="1"/>
+          </p:nvPr>
+        </p:nvSpPr>
+        <p:spPr/>
+        <p:txBody>
+          <a:bodyPr/>
+          <a:lstStyle/>
+          <a:p>
+            <a:pPr marL="0" marR="0" lvl="0" indent="0" algn="l" defTabSz="914400" rtl="0" eaLnBrk="1" fontAlgn="auto" latinLnBrk="0" hangingPunct="1">
+              <a:lnSpc>
+                <a:spcPct val="100000"/>
+              </a:lnSpc>
+              <a:spcBef>
+                <a:spcPts val="0"/>
+              </a:spcBef>
+              <a:spcAft>
+                <a:spcPts val="0"/>
+              </a:spcAft>
+              <a:buClrTx/>
+              <a:buSzTx/>
+              <a:buFontTx/>
+              <a:buNone/>
+              <a:tabLst/>
+              <a:defRPr/>
+            </a:pPr>
+            <a:r>
+              <a:rPr lang="ja-JP" altLang="ja-JP" dirty="0"/>
+              <a:t>続いて、本研究の評価を行うための具体的な実験方法について説明します。今回の実験は、10月上旬に開催される『四街道こどもの街』というイベントにおいて、実フィールドでの検証を実施します。会場内には『ネットパトロール屋さん』というブースを出店し、子どもたちに体験型ワークショップに参加してもらいます。 子どもたちの役割は『ネットパトロールの隊員』です。</a:t>
+            </a:r>
+            <a:r>
+              <a:rPr lang="en-US" altLang="ja-JP" dirty="0"/>
+              <a:t>PC</a:t>
+            </a:r>
+            <a:r>
+              <a:rPr lang="ja-JP" altLang="ja-JP" dirty="0"/>
+              <a:t>上の模擬Webサイトを見ながら、ユーザーを騙してお金を使わせようとする、悪意のあるUI（ダークパターン）を見つけ出すミッションに挑んでもらいます。対象年齢は、インターネットの利用が本格化し始める8歳から12歳の児童を想定しています。</a:t>
+            </a:r>
+            <a:br>
+              <a:rPr lang="en-US" altLang="ja-JP" dirty="0"/>
+            </a:br>
+            <a:r>
+              <a:rPr lang="ja-JP" altLang="ja-JP" sz="1200" b="0" i="0" kern="1200" dirty="0">
+                <a:solidFill>
+                  <a:schemeClr val="tx1"/>
+                </a:solidFill>
+                <a:effectLst/>
+                <a:latin typeface="Meiryo UI" panose="020B0604030504040204" pitchFamily="50" charset="-128"/>
+                <a:ea typeface="Meiryo UI" panose="020B0604030504040204" pitchFamily="50" charset="-128"/>
+                <a:cs typeface="+mn-cs"/>
+              </a:rPr>
+              <a:t>8歳ごろは検索などの利用が増え自分でインターネットを使い始める一方で，まだ自己コントロールが十分ではなく，依存などのリスクが高まりやすい時期です。 一方で12歳ごろになると，広告の意図を読み取るといった 批判的な見方が身についてきます。 このように，この年代は能力の発達とリスクが重なる重要な時期であり， 実践的な教育の対象として適していると考えられます。</a:t>
+            </a:r>
+            <a:r>
+              <a:rPr lang="ja-JP" altLang="ja-JP" dirty="0"/>
+              <a:t>この『パトロール屋さん』という遊びの文脈の中で、先ほど説明した『教育フェーズ』と、その後の『油断状態での報酬獲得タスク』を連続して行い、子どもたちが学んだ知識を実際の行動として活用できるかを検証します。」</a:t>
+            </a:r>
+          </a:p>
+          <a:p>
+            <a:pPr marL="0" marR="0" lvl="0" indent="0" algn="l" defTabSz="914400" rtl="0" eaLnBrk="1" fontAlgn="t" latinLnBrk="0" hangingPunct="1">
+              <a:lnSpc>
+                <a:spcPct val="100000"/>
+              </a:lnSpc>
+              <a:spcBef>
+                <a:spcPts val="0"/>
+              </a:spcBef>
+              <a:spcAft>
+                <a:spcPts val="0"/>
+              </a:spcAft>
+              <a:buClrTx/>
+              <a:buSzTx/>
+              <a:buFontTx/>
+              <a:buNone/>
+              <a:tabLst/>
+              <a:defRPr/>
+            </a:pPr>
+            <a:endParaRPr lang="ja-JP" altLang="ja-JP" sz="1200" b="0" i="0" kern="1200" dirty="0">
+              <a:solidFill>
+                <a:schemeClr val="tx1"/>
+              </a:solidFill>
+              <a:effectLst/>
+              <a:latin typeface="Meiryo UI" panose="020B0604030504040204" pitchFamily="50" charset="-128"/>
+              <a:ea typeface="Meiryo UI" panose="020B0604030504040204" pitchFamily="50" charset="-128"/>
+              <a:cs typeface="+mn-cs"/>
+            </a:endParaRPr>
+          </a:p>
+        </p:txBody>
+      </p:sp>
+      <p:sp>
+        <p:nvSpPr>
+          <p:cNvPr id="4" name="スライド番号プレースホルダー 3">
+            <a:extLst>
+              <a:ext uri="{FF2B5EF4-FFF2-40B4-BE49-F238E27FC236}">
+                <a16:creationId xmlns:a16="http://schemas.microsoft.com/office/drawing/2014/main" id="{7221A5F6-568E-3871-A9ED-69A959243D64}"/>
+              </a:ext>
+            </a:extLst>
+          </p:cNvPr>
+          <p:cNvSpPr>
+            <a:spLocks noGrp="1"/>
+          </p:cNvSpPr>
+          <p:nvPr>
+            <p:ph type="sldNum" sz="quarter" idx="10"/>
+          </p:nvPr>
+        </p:nvSpPr>
+        <p:spPr/>
+        <p:txBody>
+          <a:bodyPr/>
+          <a:lstStyle/>
+          <a:p>
+            <a:pPr rtl="0"/>
+            <a:fld id="{893B0CF2-7F87-4E02-A248-870047730F99}" type="slidenum">
+              <a:rPr lang="en-US" altLang="ja-JP" smtClean="0">
+                <a:latin typeface="Meiryo UI" panose="020B0604030504040204" pitchFamily="50" charset="-128"/>
+                <a:ea typeface="Meiryo UI" panose="020B0604030504040204" pitchFamily="50" charset="-128"/>
+              </a:rPr>
+              <a:t>11</a:t>
+            </a:fld>
+            <a:endParaRPr lang="ja-JP" altLang="en-US" dirty="0">
+              <a:latin typeface="Meiryo UI" panose="020B0604030504040204" pitchFamily="50" charset="-128"/>
+              <a:ea typeface="Meiryo UI" panose="020B0604030504040204" pitchFamily="50" charset="-128"/>
+            </a:endParaRPr>
+          </a:p>
+        </p:txBody>
+      </p:sp>
+    </p:spTree>
+    <p:extLst>
+      <p:ext uri="{BB962C8B-B14F-4D97-AF65-F5344CB8AC3E}">
+        <p14:creationId xmlns:p14="http://schemas.microsoft.com/office/powerpoint/2010/main" val="446298250"/>
+      </p:ext>
+    </p:extLst>
+  </p:cSld>
+  <p:clrMapOvr>
+    <a:masterClrMapping/>
+  </p:clrMapOvr>
+</p:notes>
+</file>
+
+<file path=ppt/notesSlides/notesSlide12.xml><?xml version="1.0" encoding="utf-8"?>
+<p:notes xmlns:a="http://schemas.openxmlformats.org/drawingml/2006/main" xmlns:r="http://schemas.openxmlformats.org/officeDocument/2006/relationships" xmlns:p="http://schemas.openxmlformats.org/presentationml/2006/main">
+  <p:cSld>
+    <p:spTree>
+      <p:nvGrpSpPr>
+        <p:cNvPr id="1" name="">
+          <a:extLst>
+            <a:ext uri="{FF2B5EF4-FFF2-40B4-BE49-F238E27FC236}">
+              <a16:creationId xmlns:a16="http://schemas.microsoft.com/office/drawing/2014/main" id="{990451C4-FC0E-101F-6121-F85367F91475}"/>
+            </a:ext>
+          </a:extLst>
+        </p:cNvPr>
+        <p:cNvGrpSpPr/>
+        <p:nvPr/>
+      </p:nvGrpSpPr>
+      <p:grpSpPr>
+        <a:xfrm>
+          <a:off x="0" y="0"/>
+          <a:ext cx="0" cy="0"/>
+          <a:chOff x="0" y="0"/>
+          <a:chExt cx="0" cy="0"/>
+        </a:xfrm>
+      </p:grpSpPr>
+      <p:sp>
+        <p:nvSpPr>
+          <p:cNvPr id="2" name="スライド イメージ プレースホルダー 1">
+            <a:extLst>
+              <a:ext uri="{FF2B5EF4-FFF2-40B4-BE49-F238E27FC236}">
+                <a16:creationId xmlns:a16="http://schemas.microsoft.com/office/drawing/2014/main" id="{7AB4A464-C628-F748-6A72-71035E14F115}"/>
+              </a:ext>
+            </a:extLst>
+          </p:cNvPr>
+          <p:cNvSpPr>
+            <a:spLocks noGrp="1" noRot="1" noChangeAspect="1"/>
+          </p:cNvSpPr>
+          <p:nvPr>
+            <p:ph type="sldImg"/>
+          </p:nvPr>
+        </p:nvSpPr>
+        <p:spPr/>
+      </p:sp>
+      <p:sp>
+        <p:nvSpPr>
+          <p:cNvPr id="3" name="ノート プレースホルダー 2">
+            <a:extLst>
+              <a:ext uri="{FF2B5EF4-FFF2-40B4-BE49-F238E27FC236}">
+                <a16:creationId xmlns:a16="http://schemas.microsoft.com/office/drawing/2014/main" id="{FFD9535D-8D27-7564-CA8A-1DA5B6F6CDD7}"/>
+              </a:ext>
+            </a:extLst>
+          </p:cNvPr>
+          <p:cNvSpPr>
+            <a:spLocks noGrp="1"/>
+          </p:cNvSpPr>
+          <p:nvPr>
+            <p:ph type="body" idx="1"/>
+          </p:nvPr>
+        </p:nvSpPr>
+        <p:spPr/>
+        <p:txBody>
+          <a:bodyPr/>
+          <a:lstStyle/>
+          <a:p>
+            <a:pPr marL="0" marR="0" lvl="0" indent="0" algn="l" defTabSz="914400" rtl="0" eaLnBrk="1" fontAlgn="t" latinLnBrk="0" hangingPunct="1">
+              <a:lnSpc>
+                <a:spcPct val="100000"/>
+              </a:lnSpc>
+              <a:spcBef>
+                <a:spcPts val="0"/>
+              </a:spcBef>
+              <a:spcAft>
+                <a:spcPts val="0"/>
+              </a:spcAft>
+              <a:buClrTx/>
+              <a:buSzTx/>
+              <a:buFontTx/>
+              <a:buNone/>
+              <a:tabLst/>
+              <a:defRPr/>
+            </a:pPr>
+            <a:r>
+              <a:rPr lang="ja-JP" altLang="en-US" sz="1200" b="0" i="0" kern="1200" dirty="0">
+                <a:solidFill>
+                  <a:schemeClr val="tx1"/>
+                </a:solidFill>
+                <a:effectLst/>
+                <a:latin typeface="Meiryo UI" panose="020B0604030504040204" pitchFamily="50" charset="-128"/>
+                <a:ea typeface="Meiryo UI" panose="020B0604030504040204" pitchFamily="50" charset="-128"/>
+                <a:cs typeface="+mn-cs"/>
+              </a:rPr>
+              <a:t>今後の予定です。</a:t>
+            </a:r>
+            <a:r>
+              <a:rPr lang="ja-JP" altLang="ja-JP" sz="1200" b="0" i="0" kern="1200" dirty="0">
+                <a:solidFill>
+                  <a:schemeClr val="tx1"/>
+                </a:solidFill>
+                <a:effectLst/>
+                <a:latin typeface="Meiryo UI" panose="020B0604030504040204" pitchFamily="50" charset="-128"/>
+                <a:ea typeface="Meiryo UI" panose="020B0604030504040204" pitchFamily="50" charset="-128"/>
+                <a:cs typeface="+mn-cs"/>
+              </a:rPr>
+              <a:t>9月末までにシミュレーション環境の実装と， ダークパターンの提示シナリオの設計を行います。</a:t>
+            </a:r>
+          </a:p>
+          <a:p>
+            <a:pPr marL="0" marR="0" lvl="0" indent="0" algn="l" defTabSz="914400" rtl="0" eaLnBrk="1" fontAlgn="t" latinLnBrk="0" hangingPunct="1">
+              <a:lnSpc>
+                <a:spcPct val="100000"/>
+              </a:lnSpc>
+              <a:spcBef>
+                <a:spcPts val="0"/>
+              </a:spcBef>
+              <a:spcAft>
+                <a:spcPts val="0"/>
+              </a:spcAft>
+              <a:buClrTx/>
+              <a:buSzTx/>
+              <a:buFontTx/>
+              <a:buNone/>
+              <a:tabLst/>
+              <a:defRPr/>
+            </a:pPr>
+            <a:r>
+              <a:rPr lang="ja-JP" altLang="ja-JP" sz="1200" b="0" i="0" kern="1200" dirty="0">
+                <a:solidFill>
+                  <a:schemeClr val="tx1"/>
+                </a:solidFill>
+                <a:effectLst/>
+                <a:latin typeface="Meiryo UI" panose="020B0604030504040204" pitchFamily="50" charset="-128"/>
+                <a:ea typeface="Meiryo UI" panose="020B0604030504040204" pitchFamily="50" charset="-128"/>
+                <a:cs typeface="+mn-cs"/>
+              </a:rPr>
+              <a:t>その後10月に</a:t>
+            </a:r>
+            <a:r>
+              <a:rPr lang="ja-JP" altLang="en-US" sz="1200" b="0" i="0" kern="1200" dirty="0">
+                <a:solidFill>
+                  <a:schemeClr val="tx1"/>
+                </a:solidFill>
+                <a:effectLst/>
+                <a:latin typeface="Meiryo UI" panose="020B0604030504040204" pitchFamily="50" charset="-128"/>
+                <a:ea typeface="Meiryo UI" panose="020B0604030504040204" pitchFamily="50" charset="-128"/>
+                <a:cs typeface="+mn-cs"/>
+              </a:rPr>
+              <a:t>四街道こどものまちで実験をおこない、行動ログを基にしたデータ分析を行います。その後間に合えばですが、１１月末に</a:t>
+            </a:r>
+            <a:r>
+              <a:rPr lang="en-US" altLang="ja-JP" sz="1200" b="0" i="0" kern="1200" dirty="0">
+                <a:solidFill>
+                  <a:schemeClr val="tx1"/>
+                </a:solidFill>
+                <a:effectLst/>
+                <a:latin typeface="Meiryo UI" panose="020B0604030504040204" pitchFamily="50" charset="-128"/>
+                <a:ea typeface="Meiryo UI" panose="020B0604030504040204" pitchFamily="50" charset="-128"/>
+                <a:cs typeface="+mn-cs"/>
+              </a:rPr>
+              <a:t>HCD</a:t>
+            </a:r>
+            <a:r>
+              <a:rPr lang="ja-JP" altLang="en-US" sz="1200" b="0" i="0" kern="1200" dirty="0">
+                <a:solidFill>
+                  <a:schemeClr val="tx1"/>
+                </a:solidFill>
+                <a:effectLst/>
+                <a:latin typeface="Meiryo UI" panose="020B0604030504040204" pitchFamily="50" charset="-128"/>
+                <a:ea typeface="Meiryo UI" panose="020B0604030504040204" pitchFamily="50" charset="-128"/>
+                <a:cs typeface="+mn-cs"/>
+              </a:rPr>
+              <a:t>学会にて発表を行う予定です。</a:t>
+            </a:r>
+            <a:endParaRPr lang="ja-JP" altLang="ja-JP" sz="1200" b="0" i="0" kern="1200" dirty="0">
+              <a:solidFill>
+                <a:schemeClr val="tx1"/>
+              </a:solidFill>
+              <a:effectLst/>
+              <a:latin typeface="Meiryo UI" panose="020B0604030504040204" pitchFamily="50" charset="-128"/>
+              <a:ea typeface="Meiryo UI" panose="020B0604030504040204" pitchFamily="50" charset="-128"/>
+              <a:cs typeface="+mn-cs"/>
+            </a:endParaRPr>
+          </a:p>
+        </p:txBody>
+      </p:sp>
+      <p:sp>
+        <p:nvSpPr>
+          <p:cNvPr id="4" name="スライド番号プレースホルダー 3">
+            <a:extLst>
+              <a:ext uri="{FF2B5EF4-FFF2-40B4-BE49-F238E27FC236}">
+                <a16:creationId xmlns:a16="http://schemas.microsoft.com/office/drawing/2014/main" id="{E1404A89-5C95-65A1-4F73-0DCC62F519BC}"/>
+              </a:ext>
+            </a:extLst>
+          </p:cNvPr>
+          <p:cNvSpPr>
+            <a:spLocks noGrp="1"/>
+          </p:cNvSpPr>
+          <p:nvPr>
+            <p:ph type="sldNum" sz="quarter" idx="10"/>
+          </p:nvPr>
+        </p:nvSpPr>
+        <p:spPr/>
+        <p:txBody>
+          <a:bodyPr/>
+          <a:lstStyle/>
+          <a:p>
+            <a:pPr rtl="0"/>
+            <a:fld id="{893B0CF2-7F87-4E02-A248-870047730F99}" type="slidenum">
+              <a:rPr lang="en-US" altLang="ja-JP" smtClean="0">
+                <a:latin typeface="Meiryo UI" panose="020B0604030504040204" pitchFamily="50" charset="-128"/>
+                <a:ea typeface="Meiryo UI" panose="020B0604030504040204" pitchFamily="50" charset="-128"/>
+              </a:rPr>
+              <a:t>12</a:t>
+            </a:fld>
+            <a:endParaRPr lang="ja-JP" altLang="en-US" dirty="0">
+              <a:latin typeface="Meiryo UI" panose="020B0604030504040204" pitchFamily="50" charset="-128"/>
+              <a:ea typeface="Meiryo UI" panose="020B0604030504040204" pitchFamily="50" charset="-128"/>
+            </a:endParaRPr>
+          </a:p>
+        </p:txBody>
+      </p:sp>
+    </p:spTree>
+    <p:extLst>
+      <p:ext uri="{BB962C8B-B14F-4D97-AF65-F5344CB8AC3E}">
+        <p14:creationId xmlns:p14="http://schemas.microsoft.com/office/powerpoint/2010/main" val="3237032654"/>
+      </p:ext>
+    </p:extLst>
+  </p:cSld>
+  <p:clrMapOvr>
+    <a:masterClrMapping/>
+  </p:clrMapOvr>
+</p:notes>
+</file>
+
+<file path=ppt/notesSlides/notesSlide13.xml><?xml version="1.0" encoding="utf-8"?>
+<p:notes xmlns:a="http://schemas.openxmlformats.org/drawingml/2006/main" xmlns:r="http://schemas.openxmlformats.org/officeDocument/2006/relationships" xmlns:p="http://schemas.openxmlformats.org/presentationml/2006/main">
+  <p:cSld>
+    <p:spTree>
+      <p:nvGrpSpPr>
+        <p:cNvPr id="1" name="">
+          <a:extLst>
+            <a:ext uri="{FF2B5EF4-FFF2-40B4-BE49-F238E27FC236}">
+              <a16:creationId xmlns:a16="http://schemas.microsoft.com/office/drawing/2014/main" id="{D917BA77-C8FE-B68D-5D3D-C8D94890BC8E}"/>
+            </a:ext>
+          </a:extLst>
+        </p:cNvPr>
+        <p:cNvGrpSpPr/>
+        <p:nvPr/>
+      </p:nvGrpSpPr>
+      <p:grpSpPr>
+        <a:xfrm>
+          <a:off x="0" y="0"/>
+          <a:ext cx="0" cy="0"/>
+          <a:chOff x="0" y="0"/>
+          <a:chExt cx="0" cy="0"/>
+        </a:xfrm>
+      </p:grpSpPr>
+      <p:sp>
+        <p:nvSpPr>
+          <p:cNvPr id="2" name="スライド イメージ プレースホルダー 1">
+            <a:extLst>
+              <a:ext uri="{FF2B5EF4-FFF2-40B4-BE49-F238E27FC236}">
+                <a16:creationId xmlns:a16="http://schemas.microsoft.com/office/drawing/2014/main" id="{844C431A-64EC-CF3D-6B31-69E365C10DC5}"/>
+              </a:ext>
+            </a:extLst>
+          </p:cNvPr>
+          <p:cNvSpPr>
+            <a:spLocks noGrp="1" noRot="1" noChangeAspect="1"/>
+          </p:cNvSpPr>
+          <p:nvPr>
+            <p:ph type="sldImg"/>
+          </p:nvPr>
+        </p:nvSpPr>
+        <p:spPr/>
+      </p:sp>
+      <p:sp>
+        <p:nvSpPr>
+          <p:cNvPr id="3" name="ノート プレースホルダー 2">
+            <a:extLst>
+              <a:ext uri="{FF2B5EF4-FFF2-40B4-BE49-F238E27FC236}">
+                <a16:creationId xmlns:a16="http://schemas.microsoft.com/office/drawing/2014/main" id="{D55625A8-F5F3-0260-F2D1-F4A574F3E2B5}"/>
+              </a:ext>
+            </a:extLst>
+          </p:cNvPr>
+          <p:cNvSpPr>
+            <a:spLocks noGrp="1"/>
+          </p:cNvSpPr>
+          <p:nvPr>
+            <p:ph type="body" idx="1"/>
+          </p:nvPr>
+        </p:nvSpPr>
+        <p:spPr/>
+        <p:txBody>
+          <a:bodyPr/>
+          <a:lstStyle/>
+          <a:p>
+            <a:pPr marL="0" marR="0" lvl="0" indent="0" algn="l" defTabSz="914400" rtl="0" eaLnBrk="1" fontAlgn="t" latinLnBrk="0" hangingPunct="1">
+              <a:lnSpc>
+                <a:spcPct val="100000"/>
+              </a:lnSpc>
+              <a:spcBef>
+                <a:spcPts val="0"/>
+              </a:spcBef>
+              <a:spcAft>
+                <a:spcPts val="0"/>
+              </a:spcAft>
+              <a:buClrTx/>
+              <a:buSzTx/>
+              <a:buFontTx/>
+              <a:buNone/>
+              <a:tabLst/>
+              <a:defRPr/>
+            </a:pPr>
+            <a:r>
+              <a:rPr lang="ja-JP" altLang="en-US" sz="1200" b="0" i="0" kern="1200" dirty="0">
+                <a:solidFill>
+                  <a:schemeClr val="tx1"/>
+                </a:solidFill>
+                <a:effectLst/>
+                <a:latin typeface="Meiryo UI" panose="020B0604030504040204" pitchFamily="50" charset="-128"/>
+                <a:ea typeface="Meiryo UI" panose="020B0604030504040204" pitchFamily="50" charset="-128"/>
+                <a:cs typeface="+mn-cs"/>
+              </a:rPr>
+              <a:t>以下参考文献です。</a:t>
+            </a:r>
+            <a:endParaRPr lang="ja-JP" altLang="ja-JP" sz="1200" b="0" i="0" kern="1200" dirty="0">
+              <a:solidFill>
+                <a:schemeClr val="tx1"/>
+              </a:solidFill>
+              <a:effectLst/>
+              <a:latin typeface="Meiryo UI" panose="020B0604030504040204" pitchFamily="50" charset="-128"/>
+              <a:ea typeface="Meiryo UI" panose="020B0604030504040204" pitchFamily="50" charset="-128"/>
+              <a:cs typeface="+mn-cs"/>
+            </a:endParaRPr>
+          </a:p>
+        </p:txBody>
+      </p:sp>
+      <p:sp>
+        <p:nvSpPr>
+          <p:cNvPr id="4" name="スライド番号プレースホルダー 3">
+            <a:extLst>
+              <a:ext uri="{FF2B5EF4-FFF2-40B4-BE49-F238E27FC236}">
+                <a16:creationId xmlns:a16="http://schemas.microsoft.com/office/drawing/2014/main" id="{31961153-9451-5431-77B5-C8B633492428}"/>
+              </a:ext>
+            </a:extLst>
+          </p:cNvPr>
+          <p:cNvSpPr>
+            <a:spLocks noGrp="1"/>
+          </p:cNvSpPr>
+          <p:nvPr>
+            <p:ph type="sldNum" sz="quarter" idx="10"/>
+          </p:nvPr>
+        </p:nvSpPr>
+        <p:spPr/>
+        <p:txBody>
+          <a:bodyPr/>
+          <a:lstStyle/>
+          <a:p>
+            <a:pPr rtl="0"/>
+            <a:fld id="{893B0CF2-7F87-4E02-A248-870047730F99}" type="slidenum">
+              <a:rPr lang="en-US" altLang="ja-JP" smtClean="0">
+                <a:latin typeface="Meiryo UI" panose="020B0604030504040204" pitchFamily="50" charset="-128"/>
+                <a:ea typeface="Meiryo UI" panose="020B0604030504040204" pitchFamily="50" charset="-128"/>
+              </a:rPr>
+              <a:t>13</a:t>
+            </a:fld>
+            <a:endParaRPr lang="ja-JP" altLang="en-US" dirty="0">
+              <a:latin typeface="Meiryo UI" panose="020B0604030504040204" pitchFamily="50" charset="-128"/>
+              <a:ea typeface="Meiryo UI" panose="020B0604030504040204" pitchFamily="50" charset="-128"/>
+            </a:endParaRPr>
+          </a:p>
+        </p:txBody>
+      </p:sp>
+    </p:spTree>
+    <p:extLst>
+      <p:ext uri="{BB962C8B-B14F-4D97-AF65-F5344CB8AC3E}">
+        <p14:creationId xmlns:p14="http://schemas.microsoft.com/office/powerpoint/2010/main" val="2540369382"/>
+      </p:ext>
+    </p:extLst>
+  </p:cSld>
+  <p:clrMapOvr>
+    <a:masterClrMapping/>
+  </p:clrMapOvr>
+</p:notes>
+</file>
+
+<file path=ppt/notesSlides/notesSlide14.xml><?xml version="1.0" encoding="utf-8"?>
+<p:notes xmlns:a="http://schemas.openxmlformats.org/drawingml/2006/main" xmlns:r="http://schemas.openxmlformats.org/officeDocument/2006/relationships" xmlns:p="http://schemas.openxmlformats.org/presentationml/2006/main">
+  <p:cSld>
+    <p:spTree>
+      <p:nvGrpSpPr>
+        <p:cNvPr id="1" name="">
+          <a:extLst>
+            <a:ext uri="{FF2B5EF4-FFF2-40B4-BE49-F238E27FC236}">
+              <a16:creationId xmlns:a16="http://schemas.microsoft.com/office/drawing/2014/main" id="{CB151FEA-7847-618E-50E2-CB43B1B51B64}"/>
+            </a:ext>
+          </a:extLst>
+        </p:cNvPr>
+        <p:cNvGrpSpPr/>
+        <p:nvPr/>
+      </p:nvGrpSpPr>
+      <p:grpSpPr>
+        <a:xfrm>
+          <a:off x="0" y="0"/>
+          <a:ext cx="0" cy="0"/>
+          <a:chOff x="0" y="0"/>
+          <a:chExt cx="0" cy="0"/>
+        </a:xfrm>
+      </p:grpSpPr>
+      <p:sp>
+        <p:nvSpPr>
+          <p:cNvPr id="2" name="スライド イメージ プレースホルダー 1">
+            <a:extLst>
+              <a:ext uri="{FF2B5EF4-FFF2-40B4-BE49-F238E27FC236}">
+                <a16:creationId xmlns:a16="http://schemas.microsoft.com/office/drawing/2014/main" id="{C3B37BA5-3EAE-6746-F816-6CB8D2C49865}"/>
+              </a:ext>
+            </a:extLst>
+          </p:cNvPr>
+          <p:cNvSpPr>
+            <a:spLocks noGrp="1" noRot="1" noChangeAspect="1"/>
+          </p:cNvSpPr>
+          <p:nvPr>
+            <p:ph type="sldImg"/>
+          </p:nvPr>
+        </p:nvSpPr>
+        <p:spPr/>
+      </p:sp>
+      <p:sp>
+        <p:nvSpPr>
+          <p:cNvPr id="3" name="ノート プレースホルダー 2">
+            <a:extLst>
+              <a:ext uri="{FF2B5EF4-FFF2-40B4-BE49-F238E27FC236}">
+                <a16:creationId xmlns:a16="http://schemas.microsoft.com/office/drawing/2014/main" id="{55AD00B7-50DB-057A-726B-4B8395FCD68F}"/>
+              </a:ext>
+            </a:extLst>
+          </p:cNvPr>
+          <p:cNvSpPr>
+            <a:spLocks noGrp="1"/>
+          </p:cNvSpPr>
+          <p:nvPr>
+            <p:ph type="body" idx="1"/>
+          </p:nvPr>
+        </p:nvSpPr>
+        <p:spPr/>
+        <p:txBody>
+          <a:bodyPr/>
+          <a:lstStyle/>
+          <a:p>
+            <a:pPr marL="0" marR="0" lvl="0" indent="0" algn="l" defTabSz="914400" rtl="0" eaLnBrk="1" fontAlgn="t" latinLnBrk="0" hangingPunct="1">
+              <a:lnSpc>
+                <a:spcPct val="100000"/>
+              </a:lnSpc>
+              <a:spcBef>
+                <a:spcPts val="0"/>
+              </a:spcBef>
+              <a:spcAft>
+                <a:spcPts val="0"/>
+              </a:spcAft>
+              <a:buClrTx/>
+              <a:buSzTx/>
+              <a:buFontTx/>
+              <a:buNone/>
+              <a:tabLst/>
+              <a:defRPr/>
+            </a:pPr>
+            <a:r>
+              <a:rPr lang="ja-JP" altLang="en-US" sz="1200" b="0" i="0" kern="1200" dirty="0">
+                <a:solidFill>
+                  <a:schemeClr val="tx1"/>
+                </a:solidFill>
+                <a:effectLst/>
+                <a:latin typeface="Meiryo UI" panose="020B0604030504040204" pitchFamily="50" charset="-128"/>
+                <a:ea typeface="Meiryo UI" panose="020B0604030504040204" pitchFamily="50" charset="-128"/>
+                <a:cs typeface="+mn-cs"/>
+              </a:rPr>
+              <a:t>ご清聴</a:t>
+            </a:r>
+            <a:r>
+              <a:rPr lang="ja-JP" altLang="en-US" sz="1200" b="0" i="0" kern="1200">
+                <a:solidFill>
+                  <a:schemeClr val="tx1"/>
+                </a:solidFill>
+                <a:effectLst/>
+                <a:latin typeface="Meiryo UI" panose="020B0604030504040204" pitchFamily="50" charset="-128"/>
+                <a:ea typeface="Meiryo UI" panose="020B0604030504040204" pitchFamily="50" charset="-128"/>
+                <a:cs typeface="+mn-cs"/>
+              </a:rPr>
+              <a:t>ありがとうございました</a:t>
+            </a:r>
+            <a:endParaRPr lang="ja-JP" altLang="ja-JP" sz="1200" b="0" i="0" kern="1200" dirty="0">
+              <a:solidFill>
+                <a:schemeClr val="tx1"/>
+              </a:solidFill>
+              <a:effectLst/>
+              <a:latin typeface="Meiryo UI" panose="020B0604030504040204" pitchFamily="50" charset="-128"/>
+              <a:ea typeface="Meiryo UI" panose="020B0604030504040204" pitchFamily="50" charset="-128"/>
+              <a:cs typeface="+mn-cs"/>
+            </a:endParaRPr>
+          </a:p>
+        </p:txBody>
+      </p:sp>
+      <p:sp>
+        <p:nvSpPr>
+          <p:cNvPr id="4" name="スライド番号プレースホルダー 3">
+            <a:extLst>
+              <a:ext uri="{FF2B5EF4-FFF2-40B4-BE49-F238E27FC236}">
+                <a16:creationId xmlns:a16="http://schemas.microsoft.com/office/drawing/2014/main" id="{18AB1837-686A-ED59-0080-DAB0DE8AC0F1}"/>
+              </a:ext>
+            </a:extLst>
+          </p:cNvPr>
+          <p:cNvSpPr>
+            <a:spLocks noGrp="1"/>
+          </p:cNvSpPr>
+          <p:nvPr>
+            <p:ph type="sldNum" sz="quarter" idx="10"/>
+          </p:nvPr>
+        </p:nvSpPr>
+        <p:spPr/>
+        <p:txBody>
+          <a:bodyPr/>
+          <a:lstStyle/>
+          <a:p>
+            <a:pPr rtl="0"/>
+            <a:fld id="{893B0CF2-7F87-4E02-A248-870047730F99}" type="slidenum">
+              <a:rPr lang="en-US" altLang="ja-JP" smtClean="0">
+                <a:latin typeface="Meiryo UI" panose="020B0604030504040204" pitchFamily="50" charset="-128"/>
+                <a:ea typeface="Meiryo UI" panose="020B0604030504040204" pitchFamily="50" charset="-128"/>
+              </a:rPr>
+              <a:t>14</a:t>
+            </a:fld>
+            <a:endParaRPr lang="ja-JP" altLang="en-US" dirty="0">
+              <a:latin typeface="Meiryo UI" panose="020B0604030504040204" pitchFamily="50" charset="-128"/>
+              <a:ea typeface="Meiryo UI" panose="020B0604030504040204" pitchFamily="50" charset="-128"/>
+            </a:endParaRPr>
+          </a:p>
+        </p:txBody>
+      </p:sp>
+    </p:spTree>
+    <p:extLst>
+      <p:ext uri="{BB962C8B-B14F-4D97-AF65-F5344CB8AC3E}">
+        <p14:creationId xmlns:p14="http://schemas.microsoft.com/office/powerpoint/2010/main" val="295350630"/>
       </p:ext>
     </p:extLst>
   </p:cSld>
@@ -846,10 +1850,13 @@
           <a:bodyPr/>
           <a:lstStyle/>
           <a:p>
-            <a:endParaRPr kumimoji="1" lang="ja-JP" altLang="en-US" dirty="0">
-              <a:latin typeface="Meiryo UI" panose="020B0604030504040204" pitchFamily="50" charset="-128"/>
-              <a:ea typeface="Meiryo UI" panose="020B0604030504040204" pitchFamily="50" charset="-128"/>
-            </a:endParaRPr>
+            <a:r>
+              <a:rPr kumimoji="1" lang="ja-JP" altLang="en-US" dirty="0">
+                <a:latin typeface="Meiryo UI" panose="020B0604030504040204" pitchFamily="50" charset="-128"/>
+                <a:ea typeface="Meiryo UI" panose="020B0604030504040204" pitchFamily="50" charset="-128"/>
+              </a:rPr>
+              <a:t>目次です。以下のようになっております。</a:t>
+            </a:r>
           </a:p>
         </p:txBody>
       </p:sp>
@@ -958,6 +1965,18 @@
               <a:defRPr/>
             </a:pPr>
             <a:r>
+              <a:rPr lang="ja-JP" altLang="en-US" sz="1200" b="0" i="0" kern="1200" dirty="0">
+                <a:solidFill>
+                  <a:schemeClr val="tx1"/>
+                </a:solidFill>
+                <a:effectLst/>
+                <a:latin typeface="Meiryo UI" panose="020B0604030504040204" pitchFamily="50" charset="-128"/>
+                <a:ea typeface="Meiryo UI" panose="020B0604030504040204" pitchFamily="50" charset="-128"/>
+                <a:cs typeface="+mn-cs"/>
+              </a:rPr>
+              <a:t>研究背景です。</a:t>
+            </a:r>
+            <a:r>
               <a:rPr lang="ja-JP" altLang="ja-JP" sz="1200" b="0" i="0" kern="1200" dirty="0">
                 <a:solidFill>
                   <a:schemeClr val="tx1"/>
@@ -1015,9 +2034,21 @@
                 <a:ea typeface="Meiryo UI" panose="020B0604030504040204" pitchFamily="50" charset="-128"/>
                 <a:cs typeface="+mn-cs"/>
               </a:rPr>
-              <a:t>さまざまなオンラインサービスで広く利用されています。</a:t>
-            </a:r>
-            <a:br>
+              <a:t>さまざまなオンラインサービスで広く利用されています。例えば，知らないうちにサブスクリプションに登録されてしまったり</a:t>
+            </a:r>
+            <a:r>
+              <a:rPr lang="ja-JP" altLang="en-US" sz="1200" b="0" i="0" kern="1200" dirty="0">
+                <a:solidFill>
+                  <a:schemeClr val="tx1"/>
+                </a:solidFill>
+                <a:effectLst/>
+                <a:latin typeface="Meiryo UI" panose="020B0604030504040204" pitchFamily="50" charset="-128"/>
+                <a:ea typeface="Meiryo UI" panose="020B0604030504040204" pitchFamily="50" charset="-128"/>
+                <a:cs typeface="+mn-cs"/>
+              </a:rPr>
+              <a:t>、いらないのに</a:t>
+            </a:r>
+            <a:r>
               <a:rPr lang="ja-JP" altLang="ja-JP" sz="1200" b="0" i="0" kern="1200" dirty="0">
                 <a:solidFill>
                   <a:schemeClr val="tx1"/>
@@ -1027,113 +2058,7 @@
                 <a:ea typeface="Meiryo UI" panose="020B0604030504040204" pitchFamily="50" charset="-128"/>
                 <a:cs typeface="+mn-cs"/>
               </a:rPr>
-            </a:br>
-            <a:r>
-              <a:rPr lang="ja-JP" altLang="ja-JP" sz="1200" b="0" i="0" kern="1200" dirty="0">
-                <a:solidFill>
-                  <a:schemeClr val="tx1"/>
-                </a:solidFill>
-                <a:effectLst/>
-                <a:latin typeface="Meiryo UI" panose="020B0604030504040204" pitchFamily="50" charset="-128"/>
-                <a:ea typeface="Meiryo UI" panose="020B0604030504040204" pitchFamily="50" charset="-128"/>
-                <a:cs typeface="+mn-cs"/>
-              </a:rPr>
-              <a:t>例えば，</a:t>
-            </a:r>
-            <a:r>
-              <a:rPr lang="ja-JP" altLang="en-US" sz="1200" b="0" i="0" kern="1200" dirty="0">
-                <a:solidFill>
-                  <a:schemeClr val="tx1"/>
-                </a:solidFill>
-                <a:effectLst/>
-                <a:latin typeface="Meiryo UI" panose="020B0604030504040204" pitchFamily="50" charset="-128"/>
-                <a:ea typeface="Meiryo UI" panose="020B0604030504040204" pitchFamily="50" charset="-128"/>
-                <a:cs typeface="+mn-cs"/>
-              </a:rPr>
-              <a:t>知らないうちに</a:t>
-            </a:r>
-            <a:r>
-              <a:rPr lang="ja-JP" altLang="ja-JP" sz="1200" b="0" i="0" kern="1200" dirty="0">
-                <a:solidFill>
-                  <a:schemeClr val="tx1"/>
-                </a:solidFill>
-                <a:effectLst/>
-                <a:latin typeface="Meiryo UI" panose="020B0604030504040204" pitchFamily="50" charset="-128"/>
-                <a:ea typeface="Meiryo UI" panose="020B0604030504040204" pitchFamily="50" charset="-128"/>
-                <a:cs typeface="+mn-cs"/>
-              </a:rPr>
-              <a:t>サブスクリプション加入</a:t>
-            </a:r>
-            <a:r>
-              <a:rPr lang="ja-JP" altLang="en-US" sz="1200" b="0" i="0" kern="1200" dirty="0">
-                <a:solidFill>
-                  <a:schemeClr val="tx1"/>
-                </a:solidFill>
-                <a:effectLst/>
-                <a:latin typeface="Meiryo UI" panose="020B0604030504040204" pitchFamily="50" charset="-128"/>
-                <a:ea typeface="Meiryo UI" panose="020B0604030504040204" pitchFamily="50" charset="-128"/>
-                <a:cs typeface="+mn-cs"/>
-              </a:rPr>
-              <a:t>していたこと</a:t>
-            </a:r>
-            <a:r>
-              <a:rPr lang="ja-JP" altLang="ja-JP" sz="1200" b="0" i="0" kern="1200" dirty="0">
-                <a:solidFill>
-                  <a:schemeClr val="tx1"/>
-                </a:solidFill>
-                <a:effectLst/>
-                <a:latin typeface="Meiryo UI" panose="020B0604030504040204" pitchFamily="50" charset="-128"/>
-                <a:ea typeface="Meiryo UI" panose="020B0604030504040204" pitchFamily="50" charset="-128"/>
-                <a:cs typeface="+mn-cs"/>
-              </a:rPr>
-              <a:t>や</a:t>
-            </a:r>
-            <a:r>
-              <a:rPr lang="ja-JP" altLang="en-US" sz="1200" b="0" i="0" kern="1200" dirty="0">
-                <a:solidFill>
-                  <a:schemeClr val="tx1"/>
-                </a:solidFill>
-                <a:effectLst/>
-                <a:latin typeface="Meiryo UI" panose="020B0604030504040204" pitchFamily="50" charset="-128"/>
-                <a:ea typeface="Meiryo UI" panose="020B0604030504040204" pitchFamily="50" charset="-128"/>
-                <a:cs typeface="+mn-cs"/>
-              </a:rPr>
-              <a:t>、</a:t>
-            </a:r>
-            <a:r>
-              <a:rPr lang="ja-JP" altLang="ja-JP" sz="1200" b="0" i="0" kern="1200" dirty="0">
-                <a:solidFill>
-                  <a:schemeClr val="tx1"/>
-                </a:solidFill>
-                <a:effectLst/>
-                <a:latin typeface="Meiryo UI" panose="020B0604030504040204" pitchFamily="50" charset="-128"/>
-                <a:ea typeface="Meiryo UI" panose="020B0604030504040204" pitchFamily="50" charset="-128"/>
-                <a:cs typeface="+mn-cs"/>
-              </a:rPr>
-              <a:t>不要な商品の購入，個人情報提供などを誘導するケースが報告されています。</a:t>
-            </a:r>
-            <a:br>
-              <a:rPr lang="ja-JP" altLang="ja-JP" sz="1200" b="0" i="0" kern="1200" dirty="0">
-                <a:solidFill>
-                  <a:schemeClr val="tx1"/>
-                </a:solidFill>
-                <a:effectLst/>
-                <a:latin typeface="Meiryo UI" panose="020B0604030504040204" pitchFamily="50" charset="-128"/>
-                <a:ea typeface="Meiryo UI" panose="020B0604030504040204" pitchFamily="50" charset="-128"/>
-                <a:cs typeface="+mn-cs"/>
-              </a:rPr>
-            </a:br>
-            <a:r>
-              <a:rPr lang="ja-JP" altLang="ja-JP" sz="1200" b="0" i="0" kern="1200" dirty="0">
-                <a:solidFill>
-                  <a:schemeClr val="tx1"/>
-                </a:solidFill>
-                <a:effectLst/>
-                <a:latin typeface="Meiryo UI" panose="020B0604030504040204" pitchFamily="50" charset="-128"/>
-                <a:ea typeface="Meiryo UI" panose="020B0604030504040204" pitchFamily="50" charset="-128"/>
-                <a:cs typeface="+mn-cs"/>
-              </a:rPr>
-              <a:t>こうした背景の中で，消費者庁掲載資料では，ダークパターンによる国内の推定被害額は年間で約1兆円から1兆6000億円程度と試算されており，無視できない規模の問題となっています。</a:t>
+              <a:t>不要な商品を購入してしまったり，意図せず個人情報を入力してしまうといったケースがあります。こうした背景の中で，消費者庁掲載資料では，ダークパターンによる国内の推定被害額は年間で約1兆円から1兆6000億円程度と試算されており，無視できない規模の問題となっています。</a:t>
             </a:r>
           </a:p>
           <a:p>
@@ -1396,58 +2321,6 @@
               <a:defRPr/>
             </a:pPr>
             <a:r>
-              <a:rPr lang="ja-JP" altLang="en-US" dirty="0"/>
-              <a:t>ダークパターンの対策として、広告ブロックの</a:t>
-            </a:r>
-            <a:r>
-              <a:rPr lang="en-US" altLang="ja-JP" dirty="0"/>
-              <a:t>AdBlock</a:t>
-            </a:r>
-            <a:r>
-              <a:rPr lang="ja-JP" altLang="en-US" dirty="0"/>
-              <a:t>などがあります。しかし</a:t>
-            </a:r>
-            <a:r>
-              <a:rPr lang="ja-JP" altLang="ja-JP" dirty="0"/>
-              <a:t>Mathur</a:t>
-            </a:r>
-            <a:r>
-              <a:rPr lang="ja-JP" altLang="en-US" dirty="0"/>
-              <a:t>（</a:t>
-            </a:r>
-            <a:r>
-              <a:rPr lang="ja-JP" altLang="ja-JP" dirty="0"/>
-              <a:t>マトゥール</a:t>
-            </a:r>
-            <a:r>
-              <a:rPr lang="ja-JP" altLang="en-US" dirty="0"/>
-              <a:t>）</a:t>
-            </a:r>
-            <a:r>
-              <a:rPr lang="ja-JP" altLang="ja-JP" dirty="0"/>
-              <a:t>らは、自動検知手法を用いて約11,000のショッピング</a:t>
-            </a:r>
-            <a:r>
-              <a:rPr lang="ja-JP" altLang="en-US" dirty="0"/>
-              <a:t>の</a:t>
-            </a:r>
-            <a:r>
-              <a:rPr lang="ja-JP" altLang="ja-JP" dirty="0"/>
-              <a:t>サイトを分析</a:t>
-            </a:r>
-            <a:r>
-              <a:rPr lang="ja-JP" altLang="en-US" dirty="0"/>
-              <a:t>し、</a:t>
-            </a:r>
-            <a:r>
-              <a:rPr lang="en-US" altLang="ja-JP" dirty="0"/>
-              <a:t>1800</a:t>
-            </a:r>
-            <a:r>
-              <a:rPr lang="ja-JP" altLang="en-US" dirty="0"/>
-              <a:t>件というダークパターンが検出しました。</a:t>
-            </a:r>
-            <a:r>
               <a:rPr lang="ja-JP" altLang="ja-JP" sz="1200" b="0" i="0" kern="1200" dirty="0">
                 <a:solidFill>
                   <a:schemeClr val="tx1"/>
@@ -1457,100 +2330,8 @@
                 <a:ea typeface="Meiryo UI" panose="020B0604030504040204" pitchFamily="50" charset="-128"/>
                 <a:cs typeface="+mn-cs"/>
               </a:rPr>
-              <a:t>こうしたダークパターンは文脈やデザインに依存するため，自動的に完全に検知・防御することは難しい</a:t>
-            </a:r>
-            <a:r>
-              <a:rPr lang="ja-JP" altLang="en-US" sz="1200" b="0" i="0" kern="1200" dirty="0">
-                <a:solidFill>
-                  <a:schemeClr val="tx1"/>
-                </a:solidFill>
-                <a:effectLst/>
-                <a:latin typeface="Meiryo UI" panose="020B0604030504040204" pitchFamily="50" charset="-128"/>
-                <a:ea typeface="Meiryo UI" panose="020B0604030504040204" pitchFamily="50" charset="-128"/>
-                <a:cs typeface="+mn-cs"/>
-              </a:rPr>
-              <a:t>く、技術のいたちごっこは今後さらに加速すると考えられます。</a:t>
-            </a:r>
-            <a:br>
-              <a:rPr lang="en-US" altLang="ja-JP" dirty="0"/>
-            </a:br>
-            <a:r>
-              <a:rPr lang="ja-JP" altLang="en-US" dirty="0"/>
-              <a:t>また。</a:t>
-            </a:r>
-            <a:r>
-              <a:rPr lang="ja-JP" altLang="ja-JP" dirty="0"/>
-              <a:t>Leonら（2012）は，Opt-in型の保護手法</a:t>
-            </a:r>
-            <a:r>
-              <a:rPr lang="ja-JP" altLang="en-US" dirty="0"/>
-              <a:t>（ユーザ自身が導入し設定すること）</a:t>
-            </a:r>
-            <a:r>
-              <a:rPr lang="ja-JP" altLang="ja-JP" dirty="0"/>
-              <a:t>には困難さがあることを指摘し</a:t>
-            </a:r>
-            <a:r>
-              <a:rPr lang="ja-JP" altLang="en-US" dirty="0"/>
-              <a:t>ています。</a:t>
-            </a:r>
-            <a:r>
-              <a:rPr lang="ja-JP" altLang="ja-JP" sz="1200" b="0" i="0" kern="1200" dirty="0">
-                <a:solidFill>
-                  <a:schemeClr val="tx1"/>
-                </a:solidFill>
-                <a:effectLst/>
-                <a:latin typeface="Meiryo UI" panose="020B0604030504040204" pitchFamily="50" charset="-128"/>
-                <a:ea typeface="Meiryo UI" panose="020B0604030504040204" pitchFamily="50" charset="-128"/>
-                <a:cs typeface="+mn-cs"/>
-              </a:rPr>
-              <a:t>ダークパターン対策の拡張機能</a:t>
-            </a:r>
-            <a:r>
-              <a:rPr lang="ja-JP" altLang="en-US" sz="1200" b="0" i="0" kern="1200" dirty="0">
-                <a:solidFill>
-                  <a:schemeClr val="tx1"/>
-                </a:solidFill>
-                <a:effectLst/>
-                <a:latin typeface="Meiryo UI" panose="020B0604030504040204" pitchFamily="50" charset="-128"/>
-                <a:ea typeface="Meiryo UI" panose="020B0604030504040204" pitchFamily="50" charset="-128"/>
-                <a:cs typeface="+mn-cs"/>
-              </a:rPr>
-              <a:t>の研究は多くされていますが、</a:t>
-            </a:r>
-            <a:r>
-              <a:rPr lang="ja-JP" altLang="ja-JP" sz="1200" b="0" i="0" kern="1200" dirty="0">
-                <a:solidFill>
-                  <a:schemeClr val="tx1"/>
-                </a:solidFill>
-                <a:effectLst/>
-                <a:latin typeface="Meiryo UI" panose="020B0604030504040204" pitchFamily="50" charset="-128"/>
-                <a:ea typeface="Meiryo UI" panose="020B0604030504040204" pitchFamily="50" charset="-128"/>
-                <a:cs typeface="+mn-cs"/>
-              </a:rPr>
-              <a:t>ユーザが入れなければそもそも機能</a:t>
-            </a:r>
-            <a:r>
-              <a:rPr lang="ja-JP" altLang="en-US" sz="1200" b="0" i="0" kern="1200" dirty="0">
-                <a:solidFill>
-                  <a:schemeClr val="tx1"/>
-                </a:solidFill>
-                <a:effectLst/>
-                <a:latin typeface="Meiryo UI" panose="020B0604030504040204" pitchFamily="50" charset="-128"/>
-                <a:ea typeface="Meiryo UI" panose="020B0604030504040204" pitchFamily="50" charset="-128"/>
-                <a:cs typeface="+mn-cs"/>
-              </a:rPr>
-              <a:t>しません。</a:t>
-            </a:r>
-            <a:endParaRPr lang="en-US" altLang="ja-JP" sz="1200" b="0" i="0" kern="1200" dirty="0">
-              <a:solidFill>
-                <a:schemeClr val="tx1"/>
-              </a:solidFill>
-              <a:effectLst/>
-              <a:latin typeface="Meiryo UI" panose="020B0604030504040204" pitchFamily="50" charset="-128"/>
-              <a:ea typeface="Meiryo UI" panose="020B0604030504040204" pitchFamily="50" charset="-128"/>
-              <a:cs typeface="+mn-cs"/>
-            </a:endParaRPr>
+              <a:t>ダークパターンの対策として，広告ブロックやブラウザ拡張などの技術的手法が存在します。しかし，Mathurらは，自動検知手法を用いて約11,000のショッピングサイトを分析し， 約1,800件のダークパターンを検出しており， そのような手法だけではダークパターンを完全に防御することが難しいことが示されています。</a:t>
+            </a:r>
           </a:p>
           <a:p>
             <a:pPr marL="0" marR="0" lvl="0" indent="0" algn="l" defTabSz="914400" rtl="0" eaLnBrk="1" fontAlgn="auto" latinLnBrk="0" hangingPunct="1">
@@ -1571,9 +2352,95 @@
               <a:defRPr/>
             </a:pPr>
             <a:r>
+              <a:rPr lang="ja-JP" altLang="ja-JP" sz="1200" b="0" i="0" kern="1200" dirty="0">
+                <a:solidFill>
+                  <a:schemeClr val="tx1"/>
+                </a:solidFill>
+                <a:effectLst/>
+                <a:latin typeface="Meiryo UI" panose="020B0604030504040204" pitchFamily="50" charset="-128"/>
+                <a:ea typeface="Meiryo UI" panose="020B0604030504040204" pitchFamily="50" charset="-128"/>
+                <a:cs typeface="+mn-cs"/>
+              </a:rPr>
+              <a:t>ダークパターンは文脈やデザインに強く依存するため， 検知技術とのいたちごっこが今後も続くと考えられます。</a:t>
+            </a:r>
+            <a:br>
+              <a:rPr lang="en-US" altLang="ja-JP" dirty="0"/>
+            </a:br>
+            <a:r>
+              <a:rPr lang="ja-JP" altLang="en-US" dirty="0"/>
+              <a:t>また</a:t>
+            </a:r>
+            <a:r>
+              <a:rPr lang="ja-JP" altLang="ja-JP" dirty="0"/>
+              <a:t>Leonら（2012）は，Opt-in型の保護手法</a:t>
+            </a:r>
+            <a:r>
+              <a:rPr lang="ja-JP" altLang="en-US" dirty="0"/>
+              <a:t>（ユーザ自身が導入し設定すること）</a:t>
+            </a:r>
+            <a:r>
+              <a:rPr lang="ja-JP" altLang="ja-JP" dirty="0"/>
+              <a:t>には困難さがあることを指摘し</a:t>
+            </a:r>
+            <a:r>
+              <a:rPr lang="ja-JP" altLang="en-US" dirty="0"/>
+              <a:t>ています。</a:t>
+            </a:r>
+            <a:r>
+              <a:rPr lang="ja-JP" altLang="ja-JP" sz="1200" b="0" i="0" kern="1200" dirty="0">
+                <a:solidFill>
+                  <a:schemeClr val="tx1"/>
+                </a:solidFill>
+                <a:effectLst/>
+                <a:latin typeface="Meiryo UI" panose="020B0604030504040204" pitchFamily="50" charset="-128"/>
+                <a:ea typeface="Meiryo UI" panose="020B0604030504040204" pitchFamily="50" charset="-128"/>
+                <a:cs typeface="+mn-cs"/>
+              </a:rPr>
+              <a:t>ダークパターン対策の拡張機能</a:t>
+            </a:r>
+            <a:r>
+              <a:rPr lang="ja-JP" altLang="en-US" sz="1200" b="0" i="0" kern="1200" dirty="0">
+                <a:solidFill>
+                  <a:schemeClr val="tx1"/>
+                </a:solidFill>
+                <a:effectLst/>
+                <a:latin typeface="Meiryo UI" panose="020B0604030504040204" pitchFamily="50" charset="-128"/>
+                <a:ea typeface="Meiryo UI" panose="020B0604030504040204" pitchFamily="50" charset="-128"/>
+                <a:cs typeface="+mn-cs"/>
+              </a:rPr>
+              <a:t>の研究は多くされていますが、</a:t>
+            </a:r>
+            <a:r>
+              <a:rPr lang="ja-JP" altLang="ja-JP" sz="1200" b="0" i="0" kern="1200" dirty="0">
+                <a:solidFill>
+                  <a:schemeClr val="tx1"/>
+                </a:solidFill>
+                <a:effectLst/>
+                <a:latin typeface="Meiryo UI" panose="020B0604030504040204" pitchFamily="50" charset="-128"/>
+                <a:ea typeface="Meiryo UI" panose="020B0604030504040204" pitchFamily="50" charset="-128"/>
+                <a:cs typeface="+mn-cs"/>
+              </a:rPr>
+              <a:t>ユーザが入れなければそもそも機能</a:t>
+            </a:r>
+            <a:r>
+              <a:rPr lang="ja-JP" altLang="en-US" sz="1200" b="0" i="0" kern="1200" dirty="0">
+                <a:solidFill>
+                  <a:schemeClr val="tx1"/>
+                </a:solidFill>
+                <a:effectLst/>
+                <a:latin typeface="Meiryo UI" panose="020B0604030504040204" pitchFamily="50" charset="-128"/>
+                <a:ea typeface="Meiryo UI" panose="020B0604030504040204" pitchFamily="50" charset="-128"/>
+                <a:cs typeface="+mn-cs"/>
+              </a:rPr>
+              <a:t>しません。</a:t>
+            </a:r>
+            <a:r>
               <a:rPr lang="ja-JP" altLang="en-US" dirty="0"/>
               <a:t>つまり利用者自身がダークパターンを認識し回避する能力を育成することが重要です。</a:t>
             </a:r>
+            <a:br>
+              <a:rPr lang="en-US" altLang="ja-JP" dirty="0"/>
+            </a:br>
             <a:br>
               <a:rPr lang="en-US" altLang="ja-JP" dirty="0"/>
             </a:br>
@@ -1838,7 +2705,31 @@
                 <a:ea typeface="Meiryo UI" panose="020B0604030504040204" pitchFamily="50" charset="-128"/>
                 <a:cs typeface="+mn-cs"/>
               </a:rPr>
-              <a:t>Oliveira（2026）は，子どもを前提とした対策が，より広いデジタル脆弱性への対応につながることを指摘しています。</a:t>
+              <a:t>Oliveira（2026）</a:t>
+            </a:r>
+            <a:r>
+              <a:rPr lang="ja-JP" altLang="en-US" sz="1200" b="0" i="0" kern="1200" dirty="0">
+                <a:solidFill>
+                  <a:schemeClr val="tx1"/>
+                </a:solidFill>
+                <a:effectLst/>
+                <a:latin typeface="Meiryo UI" panose="020B0604030504040204" pitchFamily="50" charset="-128"/>
+                <a:ea typeface="Meiryo UI" panose="020B0604030504040204" pitchFamily="50" charset="-128"/>
+                <a:cs typeface="+mn-cs"/>
+              </a:rPr>
+              <a:t>ら</a:t>
+            </a:r>
+            <a:r>
+              <a:rPr lang="ja-JP" altLang="ja-JP" sz="1200" b="0" i="0" kern="1200" dirty="0">
+                <a:solidFill>
+                  <a:schemeClr val="tx1"/>
+                </a:solidFill>
+                <a:effectLst/>
+                <a:latin typeface="Meiryo UI" panose="020B0604030504040204" pitchFamily="50" charset="-128"/>
+                <a:ea typeface="Meiryo UI" panose="020B0604030504040204" pitchFamily="50" charset="-128"/>
+                <a:cs typeface="+mn-cs"/>
+              </a:rPr>
+              <a:t>は，子どもを前提とした対策が，より広いデジタル脆弱性への対応につながることを指摘しています。</a:t>
             </a:r>
             <a:br>
               <a:rPr lang="ja-JP" altLang="ja-JP" sz="1200" b="0" i="0" kern="1200" dirty="0">
@@ -2101,7 +2992,7 @@
             </a:r>
             <a:r>
               <a:rPr lang="ja-JP" altLang="en-US" dirty="0"/>
-              <a:t>おり、また実際のＷｅｂ環境での検証がなく、行動としての活用、つまり内面化は未検証だということです。</a:t>
+              <a:t>おり、また実際のＷｅｂ環境での検証がなく、行動としての活用、つまり内面化は未検証です。</a:t>
             </a:r>
             <a:endParaRPr kumimoji="1" lang="en-US" altLang="ja-JP" dirty="0">
               <a:latin typeface="Meiryo UI" panose="020B0604030504040204" pitchFamily="50" charset="-128"/>
@@ -2363,7 +3254,23 @@
           <a:bodyPr/>
           <a:lstStyle/>
           <a:p>
-            <a:pPr fontAlgn="t"/>
+            <a:pPr marL="0" marR="0" lvl="0" indent="0" algn="l" defTabSz="914400" rtl="0" eaLnBrk="1" fontAlgn="t" latinLnBrk="0" hangingPunct="1">
+              <a:lnSpc>
+                <a:spcPct val="100000"/>
+              </a:lnSpc>
+              <a:spcBef>
+                <a:spcPts val="0"/>
+              </a:spcBef>
+              <a:spcAft>
+                <a:spcPts val="0"/>
+              </a:spcAft>
+              <a:buClrTx/>
+              <a:buSzTx/>
+              <a:buFontTx/>
+              <a:buNone/>
+              <a:tabLst/>
+              <a:defRPr/>
+            </a:pPr>
             <a:r>
               <a:rPr lang="ja-JP" altLang="en-US" sz="1200" b="0" i="0" kern="1200" dirty="0">
                 <a:solidFill>
@@ -2406,11 +3313,19 @@
             </a:r>
             <a:r>
               <a:rPr lang="ja-JP" altLang="en-US" dirty="0"/>
-              <a:t>がユーザをどのように意図決定へ誘導するかその仕組みを解説し、知識を補強します。ここまでは既存研究と同じですが、この報酬獲得タスクにて、</a:t>
+              <a:t>がユーザをどのように意図決定へ誘導するかその仕組みを解説し、知識を補強します。次にこの報酬獲得タスクにて、</a:t>
             </a:r>
             <a:r>
               <a:rPr lang="ja-JP" altLang="ja-JP" dirty="0"/>
-              <a:t>教育の終了を伝えた直後に『学習報酬を受け取る・選ぶ』という、次の自然なステップへ画面を遷移させます。これにより、ユーザが『テストされている』という警戒心を解き、かつ報酬獲得という欲望が喚起された状態を作ります。この油断が生じている意思決定の瞬間に、あえて報酬画面の中にダークパターンを仕掛けます。 評価においては、単に騙されたか回避できたかという結果の正誤ではなく、罠に直面した際のボタンを押すまでの反応時間や、確認、離脱といった操作のプロセス（行動ログ）を測定します。 </a:t>
+              <a:t>教育の終了を伝えた直後に『学習報酬を受け取る・選ぶ』という、次のステップへ画面を遷移させます。これにより、ユーザが『テストされている』という警戒心を</a:t>
+            </a:r>
+            <a:r>
+              <a:rPr lang="ja-JP" altLang="en-US" dirty="0"/>
+              <a:t>弱め</a:t>
+            </a:r>
+            <a:r>
+              <a:rPr lang="ja-JP" altLang="ja-JP" dirty="0"/>
+              <a:t>、かつ報酬獲得という欲望が喚起された状態を作ります。この油断が生じている意思決定の瞬間に、あえて報酬画面の中にダークパターンを仕掛けます。評価においては、単に騙されたか回避できたかという結果の正誤ではなく、罠に直面した際のボタンを押すまでの反応時間や、確認、離脱といった操作のプロセス（行動ログ）を測定します。 </a:t>
             </a:r>
             <a:endParaRPr lang="ja-JP" altLang="ja-JP" sz="1200" b="0" i="0" kern="1200" dirty="0">
               <a:solidFill>
@@ -2464,6 +3379,181 @@
     <p:extLst>
       <p:ext uri="{BB962C8B-B14F-4D97-AF65-F5344CB8AC3E}">
         <p14:creationId xmlns:p14="http://schemas.microsoft.com/office/powerpoint/2010/main" val="4151790957"/>
+      </p:ext>
+    </p:extLst>
+  </p:cSld>
+  <p:clrMapOvr>
+    <a:masterClrMapping/>
+  </p:clrMapOvr>
+</p:notes>
+</file>
+
+<file path=ppt/notesSlides/notesSlide9.xml><?xml version="1.0" encoding="utf-8"?>
+<p:notes xmlns:a="http://schemas.openxmlformats.org/drawingml/2006/main" xmlns:r="http://schemas.openxmlformats.org/officeDocument/2006/relationships" xmlns:p="http://schemas.openxmlformats.org/presentationml/2006/main">
+  <p:cSld>
+    <p:spTree>
+      <p:nvGrpSpPr>
+        <p:cNvPr id="1" name="">
+          <a:extLst>
+            <a:ext uri="{FF2B5EF4-FFF2-40B4-BE49-F238E27FC236}">
+              <a16:creationId xmlns:a16="http://schemas.microsoft.com/office/drawing/2014/main" id="{56400C69-C1DE-F972-83BD-E41C7BBB5017}"/>
+            </a:ext>
+          </a:extLst>
+        </p:cNvPr>
+        <p:cNvGrpSpPr/>
+        <p:nvPr/>
+      </p:nvGrpSpPr>
+      <p:grpSpPr>
+        <a:xfrm>
+          <a:off x="0" y="0"/>
+          <a:ext cx="0" cy="0"/>
+          <a:chOff x="0" y="0"/>
+          <a:chExt cx="0" cy="0"/>
+        </a:xfrm>
+      </p:grpSpPr>
+      <p:sp>
+        <p:nvSpPr>
+          <p:cNvPr id="2" name="スライド イメージ プレースホルダー 1">
+            <a:extLst>
+              <a:ext uri="{FF2B5EF4-FFF2-40B4-BE49-F238E27FC236}">
+                <a16:creationId xmlns:a16="http://schemas.microsoft.com/office/drawing/2014/main" id="{38CFFEA2-420D-EC4F-BC4F-06CA79393229}"/>
+              </a:ext>
+            </a:extLst>
+          </p:cNvPr>
+          <p:cNvSpPr>
+            <a:spLocks noGrp="1" noRot="1" noChangeAspect="1"/>
+          </p:cNvSpPr>
+          <p:nvPr>
+            <p:ph type="sldImg"/>
+          </p:nvPr>
+        </p:nvSpPr>
+        <p:spPr/>
+      </p:sp>
+      <p:sp>
+        <p:nvSpPr>
+          <p:cNvPr id="3" name="ノート プレースホルダー 2">
+            <a:extLst>
+              <a:ext uri="{FF2B5EF4-FFF2-40B4-BE49-F238E27FC236}">
+                <a16:creationId xmlns:a16="http://schemas.microsoft.com/office/drawing/2014/main" id="{F9580822-AF77-8D01-319C-57D5C4A5ACD9}"/>
+              </a:ext>
+            </a:extLst>
+          </p:cNvPr>
+          <p:cNvSpPr>
+            <a:spLocks noGrp="1"/>
+          </p:cNvSpPr>
+          <p:nvPr>
+            <p:ph type="body" idx="1"/>
+          </p:nvPr>
+        </p:nvSpPr>
+        <p:spPr/>
+        <p:txBody>
+          <a:bodyPr/>
+          <a:lstStyle/>
+          <a:p>
+            <a:pPr marL="0" marR="0" lvl="0" indent="0" algn="l" defTabSz="914400" rtl="0" eaLnBrk="1" fontAlgn="t" latinLnBrk="0" hangingPunct="1">
+              <a:lnSpc>
+                <a:spcPct val="100000"/>
+              </a:lnSpc>
+              <a:spcBef>
+                <a:spcPts val="0"/>
+              </a:spcBef>
+              <a:spcAft>
+                <a:spcPts val="0"/>
+              </a:spcAft>
+              <a:buClrTx/>
+              <a:buSzTx/>
+              <a:buFontTx/>
+              <a:buNone/>
+              <a:tabLst/>
+              <a:defRPr/>
+            </a:pPr>
+            <a:r>
+              <a:rPr lang="ja-JP" altLang="en-US" sz="1200" b="0" i="0" kern="1200" dirty="0">
+                <a:solidFill>
+                  <a:schemeClr val="tx1"/>
+                </a:solidFill>
+                <a:effectLst/>
+                <a:latin typeface="Meiryo UI" panose="020B0604030504040204" pitchFamily="50" charset="-128"/>
+                <a:ea typeface="Meiryo UI" panose="020B0604030504040204" pitchFamily="50" charset="-128"/>
+                <a:cs typeface="+mn-cs"/>
+              </a:rPr>
+              <a:t>実装中の画面です。ダークパターン教育フェーズで使用します。仕込むダークパターンについては現在検討中ですが、最初からオプションにチェックが入っていたり、</a:t>
+            </a:r>
+            <a:br>
+              <a:rPr lang="en-US" altLang="ja-JP" sz="1200" b="0" i="0" kern="1200" dirty="0">
+                <a:solidFill>
+                  <a:schemeClr val="tx1"/>
+                </a:solidFill>
+                <a:effectLst/>
+                <a:latin typeface="Meiryo UI" panose="020B0604030504040204" pitchFamily="50" charset="-128"/>
+                <a:ea typeface="Meiryo UI" panose="020B0604030504040204" pitchFamily="50" charset="-128"/>
+                <a:cs typeface="+mn-cs"/>
+              </a:rPr>
+            </a:br>
+            <a:r>
+              <a:rPr lang="ja-JP" altLang="en-US" sz="1200" b="0" i="0" kern="1200" dirty="0">
+                <a:solidFill>
+                  <a:schemeClr val="tx1"/>
+                </a:solidFill>
+                <a:effectLst/>
+                <a:latin typeface="Meiryo UI" panose="020B0604030504040204" pitchFamily="50" charset="-128"/>
+                <a:ea typeface="Meiryo UI" panose="020B0604030504040204" pitchFamily="50" charset="-128"/>
+                <a:cs typeface="+mn-cs"/>
+              </a:rPr>
+              <a:t>今は分かりやすくなっていますが、下にグレーの注意書きがあったりといったことを仕込んでいます。</a:t>
+            </a:r>
+            <a:endParaRPr lang="ja-JP" altLang="ja-JP" sz="1200" b="0" i="0" kern="1200" dirty="0">
+              <a:solidFill>
+                <a:schemeClr val="tx1"/>
+              </a:solidFill>
+              <a:effectLst/>
+              <a:latin typeface="Meiryo UI" panose="020B0604030504040204" pitchFamily="50" charset="-128"/>
+              <a:ea typeface="Meiryo UI" panose="020B0604030504040204" pitchFamily="50" charset="-128"/>
+              <a:cs typeface="+mn-cs"/>
+            </a:endParaRPr>
+          </a:p>
+        </p:txBody>
+      </p:sp>
+      <p:sp>
+        <p:nvSpPr>
+          <p:cNvPr id="4" name="スライド番号プレースホルダー 3">
+            <a:extLst>
+              <a:ext uri="{FF2B5EF4-FFF2-40B4-BE49-F238E27FC236}">
+                <a16:creationId xmlns:a16="http://schemas.microsoft.com/office/drawing/2014/main" id="{0D533D4F-7FD6-793F-A474-91D928587EA0}"/>
+              </a:ext>
+            </a:extLst>
+          </p:cNvPr>
+          <p:cNvSpPr>
+            <a:spLocks noGrp="1"/>
+          </p:cNvSpPr>
+          <p:nvPr>
+            <p:ph type="sldNum" sz="quarter" idx="10"/>
+          </p:nvPr>
+        </p:nvSpPr>
+        <p:spPr/>
+        <p:txBody>
+          <a:bodyPr/>
+          <a:lstStyle/>
+          <a:p>
+            <a:pPr rtl="0"/>
+            <a:fld id="{893B0CF2-7F87-4E02-A248-870047730F99}" type="slidenum">
+              <a:rPr lang="en-US" altLang="ja-JP" smtClean="0">
+                <a:latin typeface="Meiryo UI" panose="020B0604030504040204" pitchFamily="50" charset="-128"/>
+                <a:ea typeface="Meiryo UI" panose="020B0604030504040204" pitchFamily="50" charset="-128"/>
+              </a:rPr>
+              <a:t>9</a:t>
+            </a:fld>
+            <a:endParaRPr lang="ja-JP" altLang="en-US" dirty="0">
+              <a:latin typeface="Meiryo UI" panose="020B0604030504040204" pitchFamily="50" charset="-128"/>
+              <a:ea typeface="Meiryo UI" panose="020B0604030504040204" pitchFamily="50" charset="-128"/>
+            </a:endParaRPr>
+          </a:p>
+        </p:txBody>
+      </p:sp>
+    </p:spTree>
+    <p:extLst>
+      <p:ext uri="{BB962C8B-B14F-4D97-AF65-F5344CB8AC3E}">
+        <p14:creationId xmlns:p14="http://schemas.microsoft.com/office/powerpoint/2010/main" val="902562500"/>
       </p:ext>
     </p:extLst>
   </p:cSld>
@@ -7020,19 +8110,34 @@
             <p:ph type="ctrTitle"/>
           </p:nvPr>
         </p:nvSpPr>
-        <p:spPr/>
-        <p:txBody>
-          <a:bodyPr rtlCol="0"/>
+        <p:spPr>
+          <a:xfrm>
+            <a:off x="241300" y="1346200"/>
+            <a:ext cx="11709400" cy="1828800"/>
+          </a:xfrm>
+        </p:spPr>
+        <p:txBody>
+          <a:bodyPr rtlCol="0">
+            <a:noAutofit/>
+          </a:bodyPr>
           <a:lstStyle/>
           <a:p>
-            <a:pPr rtl="0"/>
-            <a:r>
-              <a:rPr lang="ja-JP" altLang="en-US" dirty="0">
-                <a:latin typeface="Meiryo UI" panose="020B0604030504040204" pitchFamily="50" charset="-128"/>
-                <a:ea typeface="Meiryo UI" panose="020B0604030504040204" pitchFamily="50" charset="-128"/>
-              </a:rPr>
-              <a:t>創造性のセッション</a:t>
-            </a:r>
+            <a:pPr fontAlgn="t"/>
+            <a:r>
+              <a:rPr lang="ja-JP" altLang="ja-JP" sz="4000" b="0" dirty="0"/>
+              <a:t>児童におけるダークパターン知識の行動活用に関する研究</a:t>
+            </a:r>
+            <a:br>
+              <a:rPr lang="en-US" altLang="ja-JP" sz="4000" b="0" dirty="0"/>
+            </a:br>
+            <a:r>
+              <a:rPr lang="ja-JP" altLang="ja-JP" sz="2800" b="0" dirty="0"/>
+              <a:t>― シミュレーション環境を用いた実践的評価 ―</a:t>
+            </a:r>
+            <a:br>
+              <a:rPr lang="ja-JP" altLang="ja-JP" sz="2800" b="0" dirty="0"/>
+            </a:br>
+            <a:endParaRPr lang="ja-JP" altLang="ja-JP" sz="2800" b="0" dirty="0"/>
           </a:p>
         </p:txBody>
       </p:sp>
@@ -7046,23 +8151,84 @@
             <p:ph type="subTitle" idx="1"/>
           </p:nvPr>
         </p:nvSpPr>
-        <p:spPr/>
-        <p:txBody>
-          <a:bodyPr rtlCol="0"/>
+        <p:spPr>
+          <a:xfrm>
+            <a:off x="5384800" y="3327400"/>
+            <a:ext cx="6502400" cy="2717800"/>
+          </a:xfrm>
+        </p:spPr>
+        <p:txBody>
+          <a:bodyPr rtlCol="0">
+            <a:normAutofit/>
+          </a:bodyPr>
           <a:lstStyle/>
           <a:p>
-            <a:pPr rtl="0"/>
-            <a:r>
-              <a:rPr lang="ja-JP" altLang="en-US" dirty="0">
-                <a:latin typeface="ＭＳ 明朝" panose="02020609040205080304" pitchFamily="17" charset="-128"/>
-                <a:ea typeface="ＭＳ 明朝" panose="02020609040205080304" pitchFamily="17" charset="-128"/>
-              </a:rPr>
-              <a:t>発表者の名前</a:t>
-            </a:r>
-          </a:p>
-          <a:p>
-            <a:pPr rtl="0"/>
-            <a:endParaRPr lang="ja-JP" altLang="en-US" dirty="0"/>
+            <a:pPr algn="l"/>
+            <a:r>
+              <a:rPr lang="zh-TW" altLang="en-US" sz="2400" dirty="0"/>
+              <a:t>東京情報大学大学院 総合情報学研究科</a:t>
+            </a:r>
+            <a:endParaRPr lang="en-US" altLang="zh-TW" sz="2400" dirty="0"/>
+          </a:p>
+          <a:p>
+            <a:pPr algn="l"/>
+            <a:r>
+              <a:rPr lang="zh-TW" altLang="en-US" sz="2400" dirty="0"/>
+              <a:t>博士前期課程 </a:t>
+            </a:r>
+            <a:r>
+              <a:rPr lang="en-US" altLang="zh-TW" sz="2400" dirty="0"/>
+              <a:t>1</a:t>
+            </a:r>
+            <a:r>
+              <a:rPr lang="zh-TW" altLang="en-US" sz="2400" dirty="0"/>
+              <a:t>年 </a:t>
+            </a:r>
+            <a:endParaRPr lang="en-US" altLang="zh-TW" sz="2400" dirty="0"/>
+          </a:p>
+          <a:p>
+            <a:pPr algn="l"/>
+            <a:r>
+              <a:rPr lang="en-US" altLang="ja-JP" sz="2400" dirty="0"/>
+              <a:t>G26014nk </a:t>
+            </a:r>
+            <a:r>
+              <a:rPr lang="ja-JP" altLang="en-US" sz="2400" dirty="0"/>
+              <a:t>西村和真</a:t>
+            </a:r>
+            <a:endParaRPr lang="en-US" altLang="ja-JP" sz="2400" dirty="0"/>
+          </a:p>
+          <a:p>
+            <a:pPr algn="l"/>
+            <a:r>
+              <a:rPr lang="ja-JP" altLang="en-US" sz="2400" dirty="0"/>
+              <a:t>主担当指導教員　斎藤 卓也</a:t>
+            </a:r>
+            <a:endParaRPr lang="en-US" altLang="ja-JP" sz="2400" dirty="0"/>
+          </a:p>
+          <a:p>
+            <a:pPr algn="l"/>
+            <a:r>
+              <a:rPr lang="zh-CN" altLang="en-US" sz="2400" dirty="0"/>
+              <a:t>副担当指導教授</a:t>
+            </a:r>
+            <a:r>
+              <a:rPr lang="ja-JP" altLang="en-US" sz="2400" dirty="0"/>
+              <a:t>：マッキンケネス・ジェームス</a:t>
+            </a:r>
+            <a:endParaRPr lang="en-US" altLang="ja-JP" sz="2400" dirty="0"/>
+          </a:p>
+          <a:p>
+            <a:pPr algn="l"/>
+            <a:r>
+              <a:rPr lang="zh-CN" altLang="en-US" sz="2400" dirty="0"/>
+              <a:t>副担当指導教授</a:t>
+            </a:r>
+            <a:r>
+              <a:rPr lang="ja-JP" altLang="en-US" sz="2400" dirty="0"/>
+              <a:t>：河野義広</a:t>
+            </a:r>
+            <a:endParaRPr lang="en-US" altLang="ja-JP" sz="2400" dirty="0"/>
           </a:p>
         </p:txBody>
       </p:sp>
@@ -7076,9 +8242,1053 @@
   <p:clrMapOvr>
     <a:masterClrMapping/>
   </p:clrMapOvr>
+  <mc:AlternateContent xmlns:mc="http://schemas.openxmlformats.org/markup-compatibility/2006" xmlns:p14="http://schemas.microsoft.com/office/powerpoint/2010/main">
+    <mc:Choice Requires="p14">
+      <p:transition p14:dur="0"/>
+    </mc:Choice>
+    <mc:Fallback xmlns="">
+      <p:transition/>
+    </mc:Fallback>
+  </mc:AlternateContent>
+</p:sld>
+</file>
+
+<file path=ppt/slides/slide10.xml><?xml version="1.0" encoding="utf-8"?>
+<p:sld xmlns:a="http://schemas.openxmlformats.org/drawingml/2006/main" xmlns:r="http://schemas.openxmlformats.org/officeDocument/2006/relationships" xmlns:p="http://schemas.openxmlformats.org/presentationml/2006/main">
+  <p:cSld>
+    <p:spTree>
+      <p:nvGrpSpPr>
+        <p:cNvPr id="1" name="">
+          <a:extLst>
+            <a:ext uri="{FF2B5EF4-FFF2-40B4-BE49-F238E27FC236}">
+              <a16:creationId xmlns:a16="http://schemas.microsoft.com/office/drawing/2014/main" id="{8976B82C-D8B9-58E7-7894-0CCB52AD7795}"/>
+            </a:ext>
+          </a:extLst>
+        </p:cNvPr>
+        <p:cNvGrpSpPr/>
+        <p:nvPr/>
+      </p:nvGrpSpPr>
+      <p:grpSpPr>
+        <a:xfrm>
+          <a:off x="0" y="0"/>
+          <a:ext cx="0" cy="0"/>
+          <a:chOff x="0" y="0"/>
+          <a:chExt cx="0" cy="0"/>
+        </a:xfrm>
+      </p:grpSpPr>
+      <p:sp>
+        <p:nvSpPr>
+          <p:cNvPr id="3" name="タイトル 2">
+            <a:extLst>
+              <a:ext uri="{FF2B5EF4-FFF2-40B4-BE49-F238E27FC236}">
+                <a16:creationId xmlns:a16="http://schemas.microsoft.com/office/drawing/2014/main" id="{646E4289-02D2-6473-6620-301533592B26}"/>
+              </a:ext>
+            </a:extLst>
+          </p:cNvPr>
+          <p:cNvSpPr>
+            <a:spLocks noGrp="1"/>
+          </p:cNvSpPr>
+          <p:nvPr>
+            <p:ph type="title"/>
+          </p:nvPr>
+        </p:nvSpPr>
+        <p:spPr>
+          <a:xfrm>
+            <a:off x="609600" y="704088"/>
+            <a:ext cx="11054080" cy="606552"/>
+          </a:xfrm>
+        </p:spPr>
+        <p:txBody>
+          <a:bodyPr rtlCol="0">
+            <a:normAutofit fontScale="90000"/>
+          </a:bodyPr>
+          <a:lstStyle/>
+          <a:p>
+            <a:pPr rtl="0"/>
+            <a:r>
+              <a:rPr lang="ja-JP" altLang="en-US" dirty="0">
+                <a:latin typeface="Meiryo UI" panose="020B0604030504040204" pitchFamily="50" charset="-128"/>
+                <a:ea typeface="Meiryo UI" panose="020B0604030504040204" pitchFamily="50" charset="-128"/>
+              </a:rPr>
+              <a:t>評価方法</a:t>
+            </a:r>
+          </a:p>
+        </p:txBody>
+      </p:sp>
+      <p:sp>
+        <p:nvSpPr>
+          <p:cNvPr id="2" name="コンテンツ プレースホルダー 1">
+            <a:extLst>
+              <a:ext uri="{FF2B5EF4-FFF2-40B4-BE49-F238E27FC236}">
+                <a16:creationId xmlns:a16="http://schemas.microsoft.com/office/drawing/2014/main" id="{AA63CA26-E300-C9D9-82C8-36EB0400FA38}"/>
+              </a:ext>
+            </a:extLst>
+          </p:cNvPr>
+          <p:cNvSpPr>
+            <a:spLocks noGrp="1"/>
+          </p:cNvSpPr>
+          <p:nvPr>
+            <p:ph idx="1"/>
+          </p:nvPr>
+        </p:nvSpPr>
+        <p:spPr>
+          <a:xfrm>
+            <a:off x="609599" y="1564639"/>
+            <a:ext cx="11292115" cy="5111931"/>
+          </a:xfrm>
+        </p:spPr>
+        <p:txBody>
+          <a:bodyPr rtlCol="0">
+            <a:normAutofit/>
+          </a:bodyPr>
+          <a:lstStyle/>
+          <a:p>
+            <a:pPr fontAlgn="t">
+              <a:spcAft>
+                <a:spcPts val="1200"/>
+              </a:spcAft>
+            </a:pPr>
+            <a:r>
+              <a:rPr lang="ja-JP" altLang="ja-JP" dirty="0"/>
+              <a:t>行動ログを用いて，ダークパターンに対する反応を評価する。</a:t>
+            </a:r>
+          </a:p>
+          <a:p>
+            <a:pPr lvl="1" fontAlgn="t">
+              <a:spcAft>
+                <a:spcPts val="1200"/>
+              </a:spcAft>
+            </a:pPr>
+            <a:r>
+              <a:rPr lang="ja-JP" altLang="ja-JP" dirty="0"/>
+              <a:t>報酬獲得タスク中に提示されるダークパターンに対し， 児童の操作行動を記録する。</a:t>
+            </a:r>
+            <a:endParaRPr lang="en-US" altLang="ja-JP" dirty="0"/>
+          </a:p>
+          <a:p>
+            <a:pPr fontAlgn="t">
+              <a:spcAft>
+                <a:spcPts val="1200"/>
+              </a:spcAft>
+            </a:pPr>
+            <a:r>
+              <a:rPr lang="ja-JP" altLang="en-US" b="1" dirty="0"/>
+              <a:t>詳細</a:t>
+            </a:r>
+            <a:endParaRPr lang="en-US" altLang="ja-JP" b="1" dirty="0"/>
+          </a:p>
+          <a:p>
+            <a:pPr lvl="1" fontAlgn="t">
+              <a:spcAft>
+                <a:spcPts val="1200"/>
+              </a:spcAft>
+            </a:pPr>
+            <a:r>
+              <a:rPr lang="ja-JP" altLang="ja-JP" dirty="0"/>
+              <a:t>罠に直面した際のボタンを押すまでの反応時間</a:t>
+            </a:r>
+            <a:endParaRPr lang="en-US" altLang="ja-JP" dirty="0"/>
+          </a:p>
+          <a:p>
+            <a:pPr lvl="1" fontAlgn="t">
+              <a:spcAft>
+                <a:spcPts val="1200"/>
+              </a:spcAft>
+            </a:pPr>
+            <a:r>
+              <a:rPr lang="ja-JP" altLang="en-US" dirty="0"/>
+              <a:t>マウスの動きである</a:t>
+            </a:r>
+            <a:r>
+              <a:rPr lang="ja-JP" altLang="ja-JP" dirty="0"/>
+              <a:t>確認・離脱といった操作</a:t>
+            </a:r>
+            <a:endParaRPr lang="en-US" altLang="ja-JP" dirty="0"/>
+          </a:p>
+          <a:p>
+            <a:pPr marL="393192" lvl="1" indent="0" fontAlgn="t">
+              <a:spcAft>
+                <a:spcPts val="1200"/>
+              </a:spcAft>
+              <a:buNone/>
+            </a:pPr>
+            <a:r>
+              <a:rPr lang="ja-JP" altLang="en-US" dirty="0"/>
+              <a:t>　→　</a:t>
+            </a:r>
+            <a:r>
+              <a:rPr lang="ja-JP" altLang="ja-JP" dirty="0"/>
+              <a:t>判断過程を経て行動に至ったのかを評価することで， 知識が実際の行</a:t>
+            </a:r>
+            <a:endParaRPr lang="en-US" altLang="ja-JP" dirty="0"/>
+          </a:p>
+          <a:p>
+            <a:pPr marL="393192" lvl="1" indent="0" fontAlgn="t">
+              <a:spcAft>
+                <a:spcPts val="1200"/>
+              </a:spcAft>
+              <a:buNone/>
+            </a:pPr>
+            <a:r>
+              <a:rPr lang="ja-JP" altLang="en-US" dirty="0"/>
+              <a:t>　　　</a:t>
+            </a:r>
+            <a:r>
+              <a:rPr lang="ja-JP" altLang="ja-JP" dirty="0"/>
+              <a:t>動として活用されているかを分析</a:t>
+            </a:r>
+          </a:p>
+          <a:p>
+            <a:pPr fontAlgn="t">
+              <a:spcAft>
+                <a:spcPts val="1200"/>
+              </a:spcAft>
+            </a:pPr>
+            <a:endParaRPr lang="en-US" altLang="ja-JP" dirty="0"/>
+          </a:p>
+        </p:txBody>
+      </p:sp>
+    </p:spTree>
+    <p:extLst>
+      <p:ext uri="{BB962C8B-B14F-4D97-AF65-F5344CB8AC3E}">
+        <p14:creationId xmlns:p14="http://schemas.microsoft.com/office/powerpoint/2010/main" val="437440990"/>
+      </p:ext>
+    </p:extLst>
+  </p:cSld>
+  <p:clrMapOvr>
+    <a:masterClrMapping/>
+  </p:clrMapOvr>
+  <mc:AlternateContent xmlns:mc="http://schemas.openxmlformats.org/markup-compatibility/2006" xmlns:p14="http://schemas.microsoft.com/office/powerpoint/2010/main">
+    <mc:Choice Requires="p14">
+      <p:transition p14:dur="0"/>
+    </mc:Choice>
+    <mc:Fallback xmlns="">
+      <p:transition/>
+    </mc:Fallback>
+  </mc:AlternateContent>
+</p:sld>
+</file>
+
+<file path=ppt/slides/slide11.xml><?xml version="1.0" encoding="utf-8"?>
+<p:sld xmlns:a="http://schemas.openxmlformats.org/drawingml/2006/main" xmlns:r="http://schemas.openxmlformats.org/officeDocument/2006/relationships" xmlns:p="http://schemas.openxmlformats.org/presentationml/2006/main">
+  <p:cSld>
+    <p:spTree>
+      <p:nvGrpSpPr>
+        <p:cNvPr id="1" name="">
+          <a:extLst>
+            <a:ext uri="{FF2B5EF4-FFF2-40B4-BE49-F238E27FC236}">
+              <a16:creationId xmlns:a16="http://schemas.microsoft.com/office/drawing/2014/main" id="{D84AF416-6589-2B48-5F5D-498D894BC055}"/>
+            </a:ext>
+          </a:extLst>
+        </p:cNvPr>
+        <p:cNvGrpSpPr/>
+        <p:nvPr/>
+      </p:nvGrpSpPr>
+      <p:grpSpPr>
+        <a:xfrm>
+          <a:off x="0" y="0"/>
+          <a:ext cx="0" cy="0"/>
+          <a:chOff x="0" y="0"/>
+          <a:chExt cx="0" cy="0"/>
+        </a:xfrm>
+      </p:grpSpPr>
+      <p:sp>
+        <p:nvSpPr>
+          <p:cNvPr id="3" name="タイトル 2">
+            <a:extLst>
+              <a:ext uri="{FF2B5EF4-FFF2-40B4-BE49-F238E27FC236}">
+                <a16:creationId xmlns:a16="http://schemas.microsoft.com/office/drawing/2014/main" id="{2CBB1A50-D56D-A1A6-630D-315492D65452}"/>
+              </a:ext>
+            </a:extLst>
+          </p:cNvPr>
+          <p:cNvSpPr>
+            <a:spLocks noGrp="1"/>
+          </p:cNvSpPr>
+          <p:nvPr>
+            <p:ph type="title"/>
+          </p:nvPr>
+        </p:nvSpPr>
+        <p:spPr>
+          <a:xfrm>
+            <a:off x="609600" y="704088"/>
+            <a:ext cx="11054080" cy="606552"/>
+          </a:xfrm>
+        </p:spPr>
+        <p:txBody>
+          <a:bodyPr rtlCol="0">
+            <a:normAutofit fontScale="90000"/>
+          </a:bodyPr>
+          <a:lstStyle/>
+          <a:p>
+            <a:pPr rtl="0"/>
+            <a:r>
+              <a:rPr lang="ja-JP" altLang="en-US" dirty="0"/>
+              <a:t>実験方法（予定）</a:t>
+            </a:r>
+            <a:endParaRPr lang="ja-JP" altLang="en-US" dirty="0">
+              <a:latin typeface="Meiryo UI" panose="020B0604030504040204" pitchFamily="50" charset="-128"/>
+              <a:ea typeface="Meiryo UI" panose="020B0604030504040204" pitchFamily="50" charset="-128"/>
+            </a:endParaRPr>
+          </a:p>
+        </p:txBody>
+      </p:sp>
+      <p:sp>
+        <p:nvSpPr>
+          <p:cNvPr id="2" name="コンテンツ プレースホルダー 1">
+            <a:extLst>
+              <a:ext uri="{FF2B5EF4-FFF2-40B4-BE49-F238E27FC236}">
+                <a16:creationId xmlns:a16="http://schemas.microsoft.com/office/drawing/2014/main" id="{FD18CFEB-343A-DD82-784E-DDBB7CD6D75D}"/>
+              </a:ext>
+            </a:extLst>
+          </p:cNvPr>
+          <p:cNvSpPr>
+            <a:spLocks noGrp="1"/>
+          </p:cNvSpPr>
+          <p:nvPr>
+            <p:ph idx="1"/>
+          </p:nvPr>
+        </p:nvSpPr>
+        <p:spPr>
+          <a:xfrm>
+            <a:off x="609600" y="1310640"/>
+            <a:ext cx="11391899" cy="5318760"/>
+          </a:xfrm>
+        </p:spPr>
+        <p:txBody>
+          <a:bodyPr rtlCol="0">
+            <a:normAutofit fontScale="92500" lnSpcReduction="20000"/>
+          </a:bodyPr>
+          <a:lstStyle/>
+          <a:p>
+            <a:pPr fontAlgn="t">
+              <a:spcAft>
+                <a:spcPts val="1200"/>
+              </a:spcAft>
+            </a:pPr>
+            <a:r>
+              <a:rPr lang="ja-JP" altLang="en-US" dirty="0"/>
+              <a:t>日時</a:t>
+            </a:r>
+            <a:endParaRPr lang="en-US" altLang="ja-JP" dirty="0"/>
+          </a:p>
+          <a:p>
+            <a:pPr lvl="1" fontAlgn="t">
+              <a:spcAft>
+                <a:spcPts val="1200"/>
+              </a:spcAft>
+            </a:pPr>
+            <a:r>
+              <a:rPr lang="ja-JP" altLang="en-US" dirty="0"/>
+              <a:t>１０月上旬の四街道こどもの街</a:t>
+            </a:r>
+            <a:endParaRPr lang="en-US" altLang="ja-JP" dirty="0"/>
+          </a:p>
+          <a:p>
+            <a:pPr fontAlgn="t">
+              <a:spcAft>
+                <a:spcPts val="1200"/>
+              </a:spcAft>
+            </a:pPr>
+            <a:r>
+              <a:rPr lang="ja-JP" altLang="ja-JP" dirty="0"/>
+              <a:t>実施形態</a:t>
+            </a:r>
+            <a:endParaRPr lang="en-US" altLang="ja-JP" dirty="0"/>
+          </a:p>
+          <a:p>
+            <a:pPr lvl="1" fontAlgn="t">
+              <a:spcAft>
+                <a:spcPts val="1200"/>
+              </a:spcAft>
+            </a:pPr>
+            <a:r>
+              <a:rPr lang="ja-JP" altLang="en-US" dirty="0"/>
+              <a:t>ネットパトロール屋さんとして出店</a:t>
+            </a:r>
+          </a:p>
+          <a:p>
+            <a:pPr fontAlgn="t">
+              <a:spcAft>
+                <a:spcPts val="1200"/>
+              </a:spcAft>
+            </a:pPr>
+            <a:r>
+              <a:rPr lang="ja-JP" altLang="en-US" dirty="0"/>
+              <a:t>実施内容</a:t>
+            </a:r>
+            <a:endParaRPr lang="en-US" altLang="ja-JP" dirty="0"/>
+          </a:p>
+          <a:p>
+            <a:pPr lvl="1" fontAlgn="t">
+              <a:spcAft>
+                <a:spcPts val="1200"/>
+              </a:spcAft>
+            </a:pPr>
+            <a:r>
+              <a:rPr lang="ja-JP" altLang="en-US" dirty="0"/>
+              <a:t>ネットパトロールの隊員となり悪い</a:t>
+            </a:r>
+            <a:r>
+              <a:rPr lang="en-US" altLang="ja-JP" dirty="0"/>
+              <a:t>UI</a:t>
+            </a:r>
+            <a:r>
+              <a:rPr lang="ja-JP" altLang="en-US" dirty="0"/>
+              <a:t>（</a:t>
+            </a:r>
+            <a:r>
+              <a:rPr lang="ja-JP" altLang="ja-JP" dirty="0"/>
+              <a:t> 勝手にチェックの罠</a:t>
+            </a:r>
+            <a:r>
+              <a:rPr lang="ja-JP" altLang="en-US" dirty="0"/>
+              <a:t>や</a:t>
+            </a:r>
+            <a:r>
+              <a:rPr lang="ja-JP" altLang="ja-JP" dirty="0"/>
+              <a:t>こっそり隠しの罠</a:t>
+            </a:r>
+            <a:r>
+              <a:rPr lang="ja-JP" altLang="en-US" dirty="0"/>
+              <a:t>）</a:t>
+            </a:r>
+            <a:endParaRPr lang="en-US" altLang="ja-JP" dirty="0"/>
+          </a:p>
+          <a:p>
+            <a:pPr marL="393192" lvl="1" indent="0" fontAlgn="t">
+              <a:spcAft>
+                <a:spcPts val="1200"/>
+              </a:spcAft>
+              <a:buNone/>
+            </a:pPr>
+            <a:r>
+              <a:rPr lang="ja-JP" altLang="en-US" dirty="0"/>
+              <a:t>　を見つけてもらう。（説明方法は検討中）</a:t>
+            </a:r>
+            <a:endParaRPr lang="en-US" altLang="ja-JP" dirty="0"/>
+          </a:p>
+          <a:p>
+            <a:pPr lvl="1" fontAlgn="t">
+              <a:spcAft>
+                <a:spcPts val="1200"/>
+              </a:spcAft>
+            </a:pPr>
+            <a:r>
+              <a:rPr lang="ja-JP" altLang="en-US" dirty="0"/>
+              <a:t>対象年齢：８歳から１２歳（小学</a:t>
+            </a:r>
+            <a:r>
+              <a:rPr lang="en-US" altLang="ja-JP" dirty="0"/>
+              <a:t>2</a:t>
+            </a:r>
+            <a:r>
+              <a:rPr lang="ja-JP" altLang="en-US" dirty="0"/>
+              <a:t>年生から小学６年生）</a:t>
+            </a:r>
+            <a:r>
+              <a:rPr lang="en-US" altLang="ja-JP" dirty="0"/>
+              <a:t>[7][8]</a:t>
+            </a:r>
+          </a:p>
+          <a:p>
+            <a:pPr fontAlgn="t">
+              <a:spcAft>
+                <a:spcPts val="1200"/>
+              </a:spcAft>
+            </a:pPr>
+            <a:r>
+              <a:rPr lang="ja-JP" altLang="en-US" dirty="0"/>
+              <a:t>体験シナリオ</a:t>
+            </a:r>
+            <a:endParaRPr lang="en-US" altLang="ja-JP" dirty="0"/>
+          </a:p>
+          <a:p>
+            <a:pPr lvl="1"/>
+            <a:r>
+              <a:rPr lang="ja-JP" altLang="ja-JP" dirty="0"/>
+              <a:t>参加者は「ネットパトロールの隊員」として活動</a:t>
+            </a:r>
+          </a:p>
+          <a:p>
+            <a:pPr lvl="1"/>
+            <a:r>
+              <a:rPr lang="ja-JP" altLang="ja-JP" dirty="0"/>
+              <a:t>Webサイト上の「お金を使わせようと誘導する悪いデザイン（UI）」を探索・特定</a:t>
+            </a:r>
+          </a:p>
+          <a:p>
+            <a:pPr fontAlgn="t">
+              <a:spcAft>
+                <a:spcPts val="1200"/>
+              </a:spcAft>
+            </a:pPr>
+            <a:endParaRPr lang="en-US" altLang="ja-JP" dirty="0"/>
+          </a:p>
+          <a:p>
+            <a:pPr lvl="1" fontAlgn="t">
+              <a:spcAft>
+                <a:spcPts val="1200"/>
+              </a:spcAft>
+            </a:pPr>
+            <a:endParaRPr lang="en-US" altLang="ja-JP" dirty="0"/>
+          </a:p>
+          <a:p>
+            <a:pPr lvl="1" fontAlgn="t">
+              <a:spcAft>
+                <a:spcPts val="1200"/>
+              </a:spcAft>
+            </a:pPr>
+            <a:endParaRPr lang="en-US" altLang="ja-JP" dirty="0"/>
+          </a:p>
+          <a:p>
+            <a:pPr lvl="1" fontAlgn="t">
+              <a:spcAft>
+                <a:spcPts val="1200"/>
+              </a:spcAft>
+            </a:pPr>
+            <a:endParaRPr lang="en-US" altLang="ja-JP" dirty="0"/>
+          </a:p>
+        </p:txBody>
+      </p:sp>
+    </p:spTree>
+    <p:extLst>
+      <p:ext uri="{BB962C8B-B14F-4D97-AF65-F5344CB8AC3E}">
+        <p14:creationId xmlns:p14="http://schemas.microsoft.com/office/powerpoint/2010/main" val="3203788536"/>
+      </p:ext>
+    </p:extLst>
+  </p:cSld>
+  <p:clrMapOvr>
+    <a:masterClrMapping/>
+  </p:clrMapOvr>
   <mc:AlternateContent xmlns:mc="http://schemas.openxmlformats.org/markup-compatibility/2006">
     <mc:Choice xmlns:p14="http://schemas.microsoft.com/office/powerpoint/2010/main" Requires="p14">
-      <p:transition p14:dur="0"/>
+      <p:transition p14:dur="10"/>
+    </mc:Choice>
+    <mc:Fallback>
+      <p:transition/>
+    </mc:Fallback>
+  </mc:AlternateContent>
+</p:sld>
+</file>
+
+<file path=ppt/slides/slide12.xml><?xml version="1.0" encoding="utf-8"?>
+<p:sld xmlns:a="http://schemas.openxmlformats.org/drawingml/2006/main" xmlns:r="http://schemas.openxmlformats.org/officeDocument/2006/relationships" xmlns:p="http://schemas.openxmlformats.org/presentationml/2006/main">
+  <p:cSld>
+    <p:spTree>
+      <p:nvGrpSpPr>
+        <p:cNvPr id="1" name="">
+          <a:extLst>
+            <a:ext uri="{FF2B5EF4-FFF2-40B4-BE49-F238E27FC236}">
+              <a16:creationId xmlns:a16="http://schemas.microsoft.com/office/drawing/2014/main" id="{B72C1535-E108-E3E3-0148-ED0A1DDF65B1}"/>
+            </a:ext>
+          </a:extLst>
+        </p:cNvPr>
+        <p:cNvGrpSpPr/>
+        <p:nvPr/>
+      </p:nvGrpSpPr>
+      <p:grpSpPr>
+        <a:xfrm>
+          <a:off x="0" y="0"/>
+          <a:ext cx="0" cy="0"/>
+          <a:chOff x="0" y="0"/>
+          <a:chExt cx="0" cy="0"/>
+        </a:xfrm>
+      </p:grpSpPr>
+      <p:sp>
+        <p:nvSpPr>
+          <p:cNvPr id="3" name="タイトル 2">
+            <a:extLst>
+              <a:ext uri="{FF2B5EF4-FFF2-40B4-BE49-F238E27FC236}">
+                <a16:creationId xmlns:a16="http://schemas.microsoft.com/office/drawing/2014/main" id="{9248C2F5-A567-781C-A831-EF45A6573C9C}"/>
+              </a:ext>
+            </a:extLst>
+          </p:cNvPr>
+          <p:cNvSpPr>
+            <a:spLocks noGrp="1"/>
+          </p:cNvSpPr>
+          <p:nvPr>
+            <p:ph type="title"/>
+          </p:nvPr>
+        </p:nvSpPr>
+        <p:spPr>
+          <a:xfrm>
+            <a:off x="609600" y="704088"/>
+            <a:ext cx="11054080" cy="606552"/>
+          </a:xfrm>
+        </p:spPr>
+        <p:txBody>
+          <a:bodyPr rtlCol="0">
+            <a:normAutofit fontScale="90000"/>
+          </a:bodyPr>
+          <a:lstStyle/>
+          <a:p>
+            <a:pPr rtl="0"/>
+            <a:r>
+              <a:rPr lang="ja-JP" altLang="en-US" dirty="0"/>
+              <a:t>今後の計画</a:t>
+            </a:r>
+            <a:endParaRPr lang="ja-JP" altLang="en-US" dirty="0">
+              <a:latin typeface="Meiryo UI" panose="020B0604030504040204" pitchFamily="50" charset="-128"/>
+              <a:ea typeface="Meiryo UI" panose="020B0604030504040204" pitchFamily="50" charset="-128"/>
+            </a:endParaRPr>
+          </a:p>
+        </p:txBody>
+      </p:sp>
+      <p:sp>
+        <p:nvSpPr>
+          <p:cNvPr id="2" name="コンテンツ プレースホルダー 1">
+            <a:extLst>
+              <a:ext uri="{FF2B5EF4-FFF2-40B4-BE49-F238E27FC236}">
+                <a16:creationId xmlns:a16="http://schemas.microsoft.com/office/drawing/2014/main" id="{F5377611-BCCD-0B09-C7D1-9F2A45EBF306}"/>
+              </a:ext>
+            </a:extLst>
+          </p:cNvPr>
+          <p:cNvSpPr>
+            <a:spLocks noGrp="1"/>
+          </p:cNvSpPr>
+          <p:nvPr>
+            <p:ph idx="1"/>
+          </p:nvPr>
+        </p:nvSpPr>
+        <p:spPr>
+          <a:xfrm>
+            <a:off x="609600" y="1310640"/>
+            <a:ext cx="11391899" cy="5318760"/>
+          </a:xfrm>
+        </p:spPr>
+        <p:txBody>
+          <a:bodyPr rtlCol="0">
+            <a:normAutofit/>
+          </a:bodyPr>
+          <a:lstStyle/>
+          <a:p>
+            <a:pPr fontAlgn="t">
+              <a:spcAft>
+                <a:spcPts val="1200"/>
+              </a:spcAft>
+            </a:pPr>
+            <a:r>
+              <a:rPr lang="ja-JP" altLang="en-US" dirty="0"/>
+              <a:t>９月末</a:t>
+            </a:r>
+            <a:endParaRPr lang="en-US" altLang="ja-JP" dirty="0"/>
+          </a:p>
+          <a:p>
+            <a:pPr lvl="1" fontAlgn="t">
+              <a:spcAft>
+                <a:spcPts val="1200"/>
+              </a:spcAft>
+            </a:pPr>
+            <a:r>
+              <a:rPr lang="ja-JP" altLang="ja-JP" dirty="0"/>
+              <a:t>シミュレーション環境の実装</a:t>
+            </a:r>
+          </a:p>
+          <a:p>
+            <a:pPr lvl="1" fontAlgn="t">
+              <a:spcAft>
+                <a:spcPts val="1200"/>
+              </a:spcAft>
+            </a:pPr>
+            <a:r>
+              <a:rPr lang="ja-JP" altLang="ja-JP" dirty="0"/>
+              <a:t>評価シナリオ（ダークパターン）の設計</a:t>
+            </a:r>
+            <a:r>
+              <a:rPr lang="ja-JP" altLang="en-US" dirty="0"/>
+              <a:t>　</a:t>
+            </a:r>
+            <a:endParaRPr lang="en-US" altLang="ja-JP" dirty="0"/>
+          </a:p>
+          <a:p>
+            <a:pPr fontAlgn="t">
+              <a:spcAft>
+                <a:spcPts val="1200"/>
+              </a:spcAft>
+            </a:pPr>
+            <a:r>
+              <a:rPr lang="ja-JP" altLang="en-US" dirty="0"/>
+              <a:t>１０月</a:t>
+            </a:r>
+            <a:endParaRPr lang="en-US" altLang="ja-JP" dirty="0"/>
+          </a:p>
+          <a:p>
+            <a:pPr lvl="1" fontAlgn="t">
+              <a:spcAft>
+                <a:spcPts val="1200"/>
+              </a:spcAft>
+            </a:pPr>
+            <a:r>
+              <a:rPr lang="ja-JP" altLang="en-US" dirty="0"/>
+              <a:t>四街道こどものまちで実験</a:t>
+            </a:r>
+            <a:endParaRPr lang="en-US" altLang="ja-JP" dirty="0"/>
+          </a:p>
+          <a:p>
+            <a:pPr lvl="1" fontAlgn="t">
+              <a:spcAft>
+                <a:spcPts val="1200"/>
+              </a:spcAft>
+            </a:pPr>
+            <a:r>
+              <a:rPr lang="ja-JP" altLang="ja-JP" dirty="0"/>
+              <a:t>データ分析（行動ログ解析）</a:t>
+            </a:r>
+            <a:endParaRPr lang="en-US" altLang="ja-JP" dirty="0"/>
+          </a:p>
+          <a:p>
+            <a:pPr fontAlgn="t">
+              <a:spcAft>
+                <a:spcPts val="1200"/>
+              </a:spcAft>
+            </a:pPr>
+            <a:r>
+              <a:rPr lang="ja-JP" altLang="en-US" dirty="0"/>
+              <a:t>１１月末</a:t>
+            </a:r>
+            <a:endParaRPr lang="en-US" altLang="ja-JP" dirty="0"/>
+          </a:p>
+          <a:p>
+            <a:pPr lvl="1" fontAlgn="t">
+              <a:spcAft>
+                <a:spcPts val="1200"/>
+              </a:spcAft>
+            </a:pPr>
+            <a:r>
+              <a:rPr lang="en-US" altLang="ja-JP" dirty="0"/>
+              <a:t>HCD</a:t>
+            </a:r>
+            <a:r>
+              <a:rPr lang="ja-JP" altLang="en-US" dirty="0"/>
+              <a:t>学会発表予定</a:t>
+            </a:r>
+            <a:endParaRPr lang="en-US" altLang="ja-JP" dirty="0"/>
+          </a:p>
+          <a:p>
+            <a:pPr lvl="1" fontAlgn="t">
+              <a:spcAft>
+                <a:spcPts val="1200"/>
+              </a:spcAft>
+            </a:pPr>
+            <a:endParaRPr lang="en-US" altLang="ja-JP" dirty="0"/>
+          </a:p>
+          <a:p>
+            <a:pPr lvl="1" fontAlgn="t">
+              <a:spcAft>
+                <a:spcPts val="1200"/>
+              </a:spcAft>
+            </a:pPr>
+            <a:endParaRPr lang="en-US" altLang="ja-JP" dirty="0"/>
+          </a:p>
+          <a:p>
+            <a:pPr lvl="1" fontAlgn="t">
+              <a:spcAft>
+                <a:spcPts val="1200"/>
+              </a:spcAft>
+            </a:pPr>
+            <a:endParaRPr lang="en-US" altLang="ja-JP" dirty="0"/>
+          </a:p>
+        </p:txBody>
+      </p:sp>
+    </p:spTree>
+    <p:extLst>
+      <p:ext uri="{BB962C8B-B14F-4D97-AF65-F5344CB8AC3E}">
+        <p14:creationId xmlns:p14="http://schemas.microsoft.com/office/powerpoint/2010/main" val="2367673325"/>
+      </p:ext>
+    </p:extLst>
+  </p:cSld>
+  <p:clrMapOvr>
+    <a:masterClrMapping/>
+  </p:clrMapOvr>
+  <mc:AlternateContent xmlns:mc="http://schemas.openxmlformats.org/markup-compatibility/2006">
+    <mc:Choice xmlns:p14="http://schemas.microsoft.com/office/powerpoint/2010/main" Requires="p14">
+      <p:transition p14:dur="10"/>
+    </mc:Choice>
+    <mc:Fallback>
+      <p:transition/>
+    </mc:Fallback>
+  </mc:AlternateContent>
+</p:sld>
+</file>
+
+<file path=ppt/slides/slide13.xml><?xml version="1.0" encoding="utf-8"?>
+<p:sld xmlns:a="http://schemas.openxmlformats.org/drawingml/2006/main" xmlns:r="http://schemas.openxmlformats.org/officeDocument/2006/relationships" xmlns:p="http://schemas.openxmlformats.org/presentationml/2006/main">
+  <p:cSld>
+    <p:spTree>
+      <p:nvGrpSpPr>
+        <p:cNvPr id="1" name="">
+          <a:extLst>
+            <a:ext uri="{FF2B5EF4-FFF2-40B4-BE49-F238E27FC236}">
+              <a16:creationId xmlns:a16="http://schemas.microsoft.com/office/drawing/2014/main" id="{A6913CCB-7BF8-BB3D-3045-E759ADFA00AF}"/>
+            </a:ext>
+          </a:extLst>
+        </p:cNvPr>
+        <p:cNvGrpSpPr/>
+        <p:nvPr/>
+      </p:nvGrpSpPr>
+      <p:grpSpPr>
+        <a:xfrm>
+          <a:off x="0" y="0"/>
+          <a:ext cx="0" cy="0"/>
+          <a:chOff x="0" y="0"/>
+          <a:chExt cx="0" cy="0"/>
+        </a:xfrm>
+      </p:grpSpPr>
+      <p:sp>
+        <p:nvSpPr>
+          <p:cNvPr id="3" name="タイトル 2">
+            <a:extLst>
+              <a:ext uri="{FF2B5EF4-FFF2-40B4-BE49-F238E27FC236}">
+                <a16:creationId xmlns:a16="http://schemas.microsoft.com/office/drawing/2014/main" id="{7898F6CA-37E3-E3E4-E997-BB3A91814CC0}"/>
+              </a:ext>
+            </a:extLst>
+          </p:cNvPr>
+          <p:cNvSpPr>
+            <a:spLocks noGrp="1"/>
+          </p:cNvSpPr>
+          <p:nvPr>
+            <p:ph type="title"/>
+          </p:nvPr>
+        </p:nvSpPr>
+        <p:spPr>
+          <a:xfrm>
+            <a:off x="609600" y="704088"/>
+            <a:ext cx="11054080" cy="606552"/>
+          </a:xfrm>
+        </p:spPr>
+        <p:txBody>
+          <a:bodyPr rtlCol="0">
+            <a:normAutofit fontScale="90000"/>
+          </a:bodyPr>
+          <a:lstStyle/>
+          <a:p>
+            <a:pPr rtl="0"/>
+            <a:r>
+              <a:rPr lang="ja-JP" altLang="en-US" dirty="0">
+                <a:latin typeface="Meiryo UI" panose="020B0604030504040204" pitchFamily="50" charset="-128"/>
+                <a:ea typeface="Meiryo UI" panose="020B0604030504040204" pitchFamily="50" charset="-128"/>
+              </a:rPr>
+              <a:t>参考文献</a:t>
+            </a:r>
+          </a:p>
+        </p:txBody>
+      </p:sp>
+      <p:sp>
+        <p:nvSpPr>
+          <p:cNvPr id="2" name="コンテンツ プレースホルダー 1">
+            <a:extLst>
+              <a:ext uri="{FF2B5EF4-FFF2-40B4-BE49-F238E27FC236}">
+                <a16:creationId xmlns:a16="http://schemas.microsoft.com/office/drawing/2014/main" id="{DB12745F-8A88-6D3A-2E1E-AE0414BF37BE}"/>
+              </a:ext>
+            </a:extLst>
+          </p:cNvPr>
+          <p:cNvSpPr>
+            <a:spLocks noGrp="1"/>
+          </p:cNvSpPr>
+          <p:nvPr>
+            <p:ph idx="1"/>
+          </p:nvPr>
+        </p:nvSpPr>
+        <p:spPr>
+          <a:xfrm>
+            <a:off x="609600" y="1310640"/>
+            <a:ext cx="11391899" cy="5318760"/>
+          </a:xfrm>
+        </p:spPr>
+        <p:txBody>
+          <a:bodyPr rtlCol="0">
+            <a:normAutofit fontScale="70000" lnSpcReduction="20000"/>
+          </a:bodyPr>
+          <a:lstStyle/>
+          <a:p>
+            <a:pPr marL="0" indent="0">
+              <a:buNone/>
+            </a:pPr>
+            <a:r>
+              <a:rPr lang="ja-JP" altLang="ja-JP" dirty="0"/>
+              <a:t>[1] Federal Trade Commission (FTC), "Bringing Dark Patterns to Light", Federal Trade Commission Staff Report, 2022.</a:t>
+            </a:r>
+          </a:p>
+          <a:p>
+            <a:pPr marL="0" indent="0">
+              <a:buNone/>
+            </a:pPr>
+            <a:r>
+              <a:rPr lang="ja-JP" altLang="ja-JP" dirty="0"/>
+              <a:t>[2] 消費者庁, "デジタル時代におけるより良い消費生活を支える信頼の構築に係る官民共創ラウンドテーブル 第1回", 2025/01/29.</a:t>
+            </a:r>
+          </a:p>
+          <a:p>
+            <a:pPr marL="0" indent="0">
+              <a:buNone/>
+            </a:pPr>
+            <a:r>
+              <a:rPr lang="ja-JP" altLang="ja-JP" dirty="0"/>
+              <a:t>[3] A. Mathur, G. Acar, M. J. Friedman, E. Lucherini, J. Mayer, M. Chetty, and A. Narayanan, “Dark Patterns at Scale: Findings from a Crawl of 11K Shopping Websites.” Proceedings of the ACM on Human-Computer Interaction, Vol. 3, CSCW, Article 81, pp.1–32, 2019.</a:t>
+            </a:r>
+          </a:p>
+          <a:p>
+            <a:pPr marL="0" indent="0">
+              <a:buNone/>
+            </a:pPr>
+            <a:r>
+              <a:rPr lang="ja-JP" altLang="ja-JP" dirty="0"/>
+              <a:t>[4] P. G. Leon, et al., “Why Johnny Can't Opt Out: A Usability Evaluation of Tools to Limit Online Behavioral Advertising.” CHI '12: Proceedings of the SIGCHI Conference on Human Factors in Computing Systems, pp.589–598, 2012.</a:t>
+            </a:r>
+          </a:p>
+          <a:p>
+            <a:pPr marL="0" indent="0">
+              <a:buNone/>
+            </a:pPr>
+            <a:r>
+              <a:rPr lang="ja-JP" altLang="ja-JP" dirty="0"/>
+              <a:t>[5] Oliveira, Oñati Socio-Legal Series, 2026. </a:t>
+            </a:r>
+            <a:r>
+              <a:rPr lang="ja-JP" altLang="ja-JP" dirty="0">
+                <a:hlinkClick r:id="rId3"/>
+              </a:rPr>
+              <a:t>https://opo.iisj.net/index.php/osls/article/view/2351</a:t>
+            </a:r>
+            <a:endParaRPr lang="ja-JP" altLang="ja-JP" dirty="0"/>
+          </a:p>
+          <a:p>
+            <a:pPr marL="0" indent="0">
+              <a:buNone/>
+            </a:pPr>
+            <a:r>
+              <a:rPr lang="ja-JP" altLang="ja-JP" dirty="0"/>
+              <a:t>[6] N. Khan, H. E. Daud, and S. Shahid, “Mind the Dark: A Gamified Exploration of Deceptive Design Awareness for Children in the Digital Age.” arXiv preprint arXiv:2506.23017, 2025.</a:t>
+            </a:r>
+          </a:p>
+          <a:p>
+            <a:pPr marL="0" indent="0">
+              <a:buNone/>
+            </a:pPr>
+            <a:r>
+              <a:rPr lang="ja-JP" altLang="ja-JP" dirty="0"/>
+              <a:t>[7] こども家庭庁, "令和7年度「青少年のインターネット利用環境実態調査」報告書", こども家庭庁, 2025.</a:t>
+            </a:r>
+          </a:p>
+          <a:p>
+            <a:pPr marL="0" indent="0">
+              <a:buNone/>
+            </a:pPr>
+            <a:r>
+              <a:rPr lang="ja-JP" altLang="ja-JP" dirty="0"/>
+              <a:t>[8] E. Rozendaal, M. Buijzen, and P. M. Valkenburg, “Children’s understanding of advertisers’ persuasive tactics.” International Journal of Advertising, 30(2), pp.329–350, 2011.</a:t>
+            </a:r>
+          </a:p>
+          <a:p>
+            <a:pPr marL="393192" lvl="1" indent="0" fontAlgn="t">
+              <a:spcAft>
+                <a:spcPts val="1200"/>
+              </a:spcAft>
+              <a:buNone/>
+            </a:pPr>
+            <a:endParaRPr lang="en-US" altLang="ja-JP" dirty="0"/>
+          </a:p>
+        </p:txBody>
+      </p:sp>
+    </p:spTree>
+    <p:extLst>
+      <p:ext uri="{BB962C8B-B14F-4D97-AF65-F5344CB8AC3E}">
+        <p14:creationId xmlns:p14="http://schemas.microsoft.com/office/powerpoint/2010/main" val="1251653270"/>
+      </p:ext>
+    </p:extLst>
+  </p:cSld>
+  <p:clrMapOvr>
+    <a:masterClrMapping/>
+  </p:clrMapOvr>
+  <mc:AlternateContent xmlns:mc="http://schemas.openxmlformats.org/markup-compatibility/2006">
+    <mc:Choice xmlns:p14="http://schemas.microsoft.com/office/powerpoint/2010/main" Requires="p14">
+      <p:transition p14:dur="10"/>
+    </mc:Choice>
+    <mc:Fallback>
+      <p:transition/>
+    </mc:Fallback>
+  </mc:AlternateContent>
+</p:sld>
+</file>
+
+<file path=ppt/slides/slide14.xml><?xml version="1.0" encoding="utf-8"?>
+<p:sld xmlns:a="http://schemas.openxmlformats.org/drawingml/2006/main" xmlns:r="http://schemas.openxmlformats.org/officeDocument/2006/relationships" xmlns:p="http://schemas.openxmlformats.org/presentationml/2006/main">
+  <p:cSld>
+    <p:spTree>
+      <p:nvGrpSpPr>
+        <p:cNvPr id="1" name="">
+          <a:extLst>
+            <a:ext uri="{FF2B5EF4-FFF2-40B4-BE49-F238E27FC236}">
+              <a16:creationId xmlns:a16="http://schemas.microsoft.com/office/drawing/2014/main" id="{906D151F-0CC2-2231-F389-C4A634D91127}"/>
+            </a:ext>
+          </a:extLst>
+        </p:cNvPr>
+        <p:cNvGrpSpPr/>
+        <p:nvPr/>
+      </p:nvGrpSpPr>
+      <p:grpSpPr>
+        <a:xfrm>
+          <a:off x="0" y="0"/>
+          <a:ext cx="0" cy="0"/>
+          <a:chOff x="0" y="0"/>
+          <a:chExt cx="0" cy="0"/>
+        </a:xfrm>
+      </p:grpSpPr>
+      <p:sp>
+        <p:nvSpPr>
+          <p:cNvPr id="2" name="コンテンツ プレースホルダー 1">
+            <a:extLst>
+              <a:ext uri="{FF2B5EF4-FFF2-40B4-BE49-F238E27FC236}">
+                <a16:creationId xmlns:a16="http://schemas.microsoft.com/office/drawing/2014/main" id="{C5A1905A-80B2-ECD9-BF93-5E4BCE98E909}"/>
+              </a:ext>
+            </a:extLst>
+          </p:cNvPr>
+          <p:cNvSpPr>
+            <a:spLocks noGrp="1"/>
+          </p:cNvSpPr>
+          <p:nvPr>
+            <p:ph idx="1"/>
+          </p:nvPr>
+        </p:nvSpPr>
+        <p:spPr>
+          <a:xfrm>
+            <a:off x="609601" y="2954020"/>
+            <a:ext cx="10604500" cy="949960"/>
+          </a:xfrm>
+        </p:spPr>
+        <p:txBody>
+          <a:bodyPr rtlCol="0">
+            <a:normAutofit/>
+          </a:bodyPr>
+          <a:lstStyle/>
+          <a:p>
+            <a:pPr marL="393192" lvl="1" indent="0" algn="ctr" fontAlgn="t">
+              <a:spcAft>
+                <a:spcPts val="1200"/>
+              </a:spcAft>
+              <a:buNone/>
+            </a:pPr>
+            <a:r>
+              <a:rPr lang="ja-JP" altLang="en-US" sz="5400" dirty="0"/>
+              <a:t>ご清聴ありがとうございました。</a:t>
+            </a:r>
+            <a:endParaRPr lang="en-US" altLang="ja-JP" sz="5400" dirty="0"/>
+          </a:p>
+        </p:txBody>
+      </p:sp>
+    </p:spTree>
+    <p:extLst>
+      <p:ext uri="{BB962C8B-B14F-4D97-AF65-F5344CB8AC3E}">
+        <p14:creationId xmlns:p14="http://schemas.microsoft.com/office/powerpoint/2010/main" val="3040202425"/>
+      </p:ext>
+    </p:extLst>
+  </p:cSld>
+  <p:clrMapOvr>
+    <a:masterClrMapping/>
+  </p:clrMapOvr>
+  <mc:AlternateContent xmlns:mc="http://schemas.openxmlformats.org/markup-compatibility/2006">
+    <mc:Choice xmlns:p14="http://schemas.microsoft.com/office/powerpoint/2010/main" Requires="p14">
+      <p:transition p14:dur="10"/>
     </mc:Choice>
     <mc:Fallback>
       <p:transition/>
@@ -7141,10 +9351,50 @@
             <p:ph idx="1"/>
           </p:nvPr>
         </p:nvSpPr>
-        <p:spPr/>
-        <p:txBody>
-          <a:bodyPr rtlCol="0"/>
+        <p:spPr>
+          <a:xfrm>
+            <a:off x="609600" y="1935480"/>
+            <a:ext cx="10160000" cy="4439920"/>
+          </a:xfrm>
+        </p:spPr>
+        <p:txBody>
+          <a:bodyPr rtlCol="0">
+            <a:normAutofit/>
+          </a:bodyPr>
           <a:lstStyle/>
+          <a:p>
+            <a:pPr rtl="0"/>
+            <a:r>
+              <a:rPr lang="ja-JP" altLang="en-US" dirty="0"/>
+              <a:t>研究背景</a:t>
+            </a:r>
+            <a:endParaRPr lang="ja-JP" altLang="en-US" dirty="0">
+              <a:latin typeface="ＭＳ 明朝" panose="02020609040205080304" pitchFamily="17" charset="-128"/>
+              <a:ea typeface="ＭＳ 明朝" panose="02020609040205080304" pitchFamily="17" charset="-128"/>
+            </a:endParaRPr>
+          </a:p>
+          <a:p>
+            <a:pPr rtl="0"/>
+            <a:r>
+              <a:rPr lang="ja-JP" altLang="en-US" dirty="0"/>
+              <a:t>先行研究</a:t>
+            </a:r>
+            <a:endParaRPr lang="ja-JP" altLang="en-US" dirty="0">
+              <a:latin typeface="ＭＳ 明朝" panose="02020609040205080304" pitchFamily="17" charset="-128"/>
+              <a:ea typeface="ＭＳ 明朝" panose="02020609040205080304" pitchFamily="17" charset="-128"/>
+            </a:endParaRPr>
+          </a:p>
+          <a:p>
+            <a:pPr rtl="0"/>
+            <a:r>
+              <a:rPr lang="ja-JP" altLang="en-US" dirty="0"/>
+              <a:t>研究目的</a:t>
+            </a:r>
+            <a:endParaRPr lang="ja-JP" altLang="en-US" dirty="0">
+              <a:latin typeface="ＭＳ 明朝" panose="02020609040205080304" pitchFamily="17" charset="-128"/>
+              <a:ea typeface="ＭＳ 明朝" panose="02020609040205080304" pitchFamily="17" charset="-128"/>
+            </a:endParaRPr>
+          </a:p>
           <a:p>
             <a:pPr rtl="0"/>
             <a:r>
@@ -7152,58 +9402,48 @@
                 <a:latin typeface="ＭＳ 明朝" panose="02020609040205080304" pitchFamily="17" charset="-128"/>
                 <a:ea typeface="ＭＳ 明朝" panose="02020609040205080304" pitchFamily="17" charset="-128"/>
               </a:rPr>
-              <a:t>概要</a:t>
-            </a:r>
+              <a:t>研究手法</a:t>
+            </a:r>
+            <a:endParaRPr lang="en-US" altLang="ja-JP" dirty="0">
+              <a:latin typeface="ＭＳ 明朝" panose="02020609040205080304" pitchFamily="17" charset="-128"/>
+              <a:ea typeface="ＭＳ 明朝" panose="02020609040205080304" pitchFamily="17" charset="-128"/>
+            </a:endParaRPr>
+          </a:p>
+          <a:p>
+            <a:r>
+              <a:rPr lang="ja-JP" altLang="en-US" dirty="0"/>
+              <a:t>実装中画面</a:t>
+            </a:r>
+            <a:endParaRPr lang="en-US" altLang="ja-JP" dirty="0"/>
           </a:p>
           <a:p>
             <a:pPr rtl="0"/>
             <a:r>
-              <a:rPr lang="ja-JP" altLang="en-US" dirty="0">
-                <a:latin typeface="ＭＳ 明朝" panose="02020609040205080304" pitchFamily="17" charset="-128"/>
-                <a:ea typeface="ＭＳ 明朝" panose="02020609040205080304" pitchFamily="17" charset="-128"/>
-              </a:rPr>
-              <a:t>ブレーンストーミングの目標</a:t>
-            </a:r>
-          </a:p>
-          <a:p>
-            <a:pPr rtl="0"/>
-            <a:r>
-              <a:rPr lang="ja-JP" altLang="en-US" dirty="0">
-                <a:latin typeface="ＭＳ 明朝" panose="02020609040205080304" pitchFamily="17" charset="-128"/>
-                <a:ea typeface="ＭＳ 明朝" panose="02020609040205080304" pitchFamily="17" charset="-128"/>
-              </a:rPr>
-              <a:t>ルール</a:t>
-            </a:r>
-          </a:p>
-          <a:p>
-            <a:pPr rtl="0"/>
-            <a:r>
-              <a:rPr lang="ja-JP" altLang="en-US" dirty="0">
-                <a:latin typeface="ＭＳ 明朝" panose="02020609040205080304" pitchFamily="17" charset="-128"/>
-                <a:ea typeface="ＭＳ 明朝" panose="02020609040205080304" pitchFamily="17" charset="-128"/>
-              </a:rPr>
-              <a:t>ブレーンストーミングの活動</a:t>
-            </a:r>
-          </a:p>
-          <a:p>
-            <a:pPr rtl="0"/>
-            <a:r>
-              <a:rPr lang="ja-JP" altLang="en-US" dirty="0">
-                <a:latin typeface="ＭＳ 明朝" panose="02020609040205080304" pitchFamily="17" charset="-128"/>
-                <a:ea typeface="ＭＳ 明朝" panose="02020609040205080304" pitchFamily="17" charset="-128"/>
-              </a:rPr>
-              <a:t>まとめ</a:t>
-            </a:r>
-          </a:p>
-          <a:p>
-            <a:pPr rtl="0"/>
-            <a:r>
-              <a:rPr lang="ja-JP" altLang="en-US" dirty="0">
-                <a:latin typeface="ＭＳ 明朝" panose="02020609040205080304" pitchFamily="17" charset="-128"/>
-                <a:ea typeface="ＭＳ 明朝" panose="02020609040205080304" pitchFamily="17" charset="-128"/>
-              </a:rPr>
-              <a:t>次のステップ</a:t>
-            </a:r>
+              <a:rPr lang="ja-JP" altLang="en-US" dirty="0"/>
+              <a:t>評価方法</a:t>
+            </a:r>
+            <a:endParaRPr lang="en-US" altLang="ja-JP" dirty="0"/>
+          </a:p>
+          <a:p>
+            <a:r>
+              <a:rPr lang="ja-JP" altLang="en-US" dirty="0"/>
+              <a:t>実験方法（予定）</a:t>
+            </a:r>
+            <a:endParaRPr lang="en-US" altLang="ja-JP" dirty="0"/>
+          </a:p>
+          <a:p>
+            <a:r>
+              <a:rPr lang="ja-JP" altLang="en-US" dirty="0"/>
+              <a:t>今後の計画</a:t>
+            </a:r>
+            <a:endParaRPr lang="en-US" altLang="ja-JP" dirty="0"/>
+          </a:p>
+          <a:p>
+            <a:r>
+              <a:rPr lang="ja-JP" altLang="en-US" dirty="0"/>
+              <a:t>参考文献</a:t>
+            </a:r>
+            <a:endParaRPr lang="en-US" altLang="ja-JP" dirty="0"/>
           </a:p>
           <a:p>
             <a:pPr rtl="0"/>
@@ -7221,11 +9461,11 @@
   <p:clrMapOvr>
     <a:masterClrMapping/>
   </p:clrMapOvr>
-  <mc:AlternateContent xmlns:mc="http://schemas.openxmlformats.org/markup-compatibility/2006">
-    <mc:Choice xmlns:p14="http://schemas.microsoft.com/office/powerpoint/2010/main" Requires="p14">
+  <mc:AlternateContent xmlns:mc="http://schemas.openxmlformats.org/markup-compatibility/2006" xmlns:p14="http://schemas.microsoft.com/office/powerpoint/2010/main">
+    <mc:Choice Requires="p14">
       <p:transition p14:dur="0"/>
     </mc:Choice>
-    <mc:Fallback>
+    <mc:Fallback xmlns="">
       <p:transition/>
     </mc:Fallback>
   </mc:AlternateContent>
@@ -7362,11 +9602,11 @@
   <p:clrMapOvr>
     <a:masterClrMapping/>
   </p:clrMapOvr>
-  <mc:AlternateContent xmlns:mc="http://schemas.openxmlformats.org/markup-compatibility/2006">
-    <mc:Choice xmlns:p14="http://schemas.microsoft.com/office/powerpoint/2010/main" Requires="p14">
+  <mc:AlternateContent xmlns:mc="http://schemas.openxmlformats.org/markup-compatibility/2006" xmlns:p14="http://schemas.microsoft.com/office/powerpoint/2010/main">
+    <mc:Choice Requires="p14">
       <p:transition p14:dur="0"/>
     </mc:Choice>
-    <mc:Fallback>
+    <mc:Fallback xmlns="">
       <p:transition/>
     </mc:Fallback>
   </mc:AlternateContent>
@@ -7466,8 +9706,8 @@
               <a:t>Mathurら（2019）は、自動検知手法を用いて約11,000のショッピングサイトを分析</a:t>
             </a:r>
             <a:r>
-              <a:rPr lang="en-US" altLang="ja-JP" dirty="0"/>
-              <a:t>.</a:t>
+              <a:rPr lang="ja-JP" altLang="en-US" dirty="0"/>
+              <a:t>。</a:t>
             </a:r>
             <a:r>
               <a:rPr lang="ja-JP" altLang="ja-JP" dirty="0"/>
@@ -7621,11 +9861,11 @@
   <p:clrMapOvr>
     <a:masterClrMapping/>
   </p:clrMapOvr>
-  <mc:AlternateContent xmlns:mc="http://schemas.openxmlformats.org/markup-compatibility/2006">
-    <mc:Choice xmlns:p14="http://schemas.microsoft.com/office/powerpoint/2010/main" Requires="p14">
+  <mc:AlternateContent xmlns:mc="http://schemas.openxmlformats.org/markup-compatibility/2006" xmlns:p14="http://schemas.microsoft.com/office/powerpoint/2010/main">
+    <mc:Choice Requires="p14">
       <p:transition p14:dur="0"/>
     </mc:Choice>
-    <mc:Fallback>
+    <mc:Fallback xmlns="">
       <p:transition/>
     </mc:Fallback>
   </mc:AlternateContent>
@@ -7911,11 +10151,11 @@
   <p:clrMapOvr>
     <a:masterClrMapping/>
   </p:clrMapOvr>
-  <mc:AlternateContent xmlns:mc="http://schemas.openxmlformats.org/markup-compatibility/2006">
-    <mc:Choice xmlns:p14="http://schemas.microsoft.com/office/powerpoint/2010/main" Requires="p14">
+  <mc:AlternateContent xmlns:mc="http://schemas.openxmlformats.org/markup-compatibility/2006" xmlns:p14="http://schemas.microsoft.com/office/powerpoint/2010/main">
+    <mc:Choice Requires="p14">
       <p:transition p14:dur="0"/>
     </mc:Choice>
-    <mc:Fallback>
+    <mc:Fallback xmlns="">
       <p:transition/>
     </mc:Fallback>
   </mc:AlternateContent>
@@ -8049,7 +10289,7 @@
             </a:r>
             <a:r>
               <a:rPr lang="ja-JP" altLang="en-US" sz="2200" dirty="0"/>
-              <a:t>名に対し</a:t>
+              <a:t>名に</a:t>
             </a:r>
             <a:r>
               <a:rPr lang="ja-JP" altLang="ja-JP" sz="2200" dirty="0"/>
@@ -8109,7 +10349,7 @@
             </a:r>
             <a:r>
               <a:rPr lang="ja-JP" altLang="en-US" sz="2200" dirty="0"/>
-              <a:t>た</a:t>
+              <a:t>た。</a:t>
             </a:r>
             <a:endParaRPr lang="en-US" altLang="ja-JP" dirty="0"/>
           </a:p>
@@ -8281,11 +10521,11 @@
   <p:clrMapOvr>
     <a:masterClrMapping/>
   </p:clrMapOvr>
-  <mc:AlternateContent xmlns:mc="http://schemas.openxmlformats.org/markup-compatibility/2006">
-    <mc:Choice xmlns:p14="http://schemas.microsoft.com/office/powerpoint/2010/main" Requires="p14">
+  <mc:AlternateContent xmlns:mc="http://schemas.openxmlformats.org/markup-compatibility/2006" xmlns:p14="http://schemas.microsoft.com/office/powerpoint/2010/main">
+    <mc:Choice Requires="p14">
       <p:transition p14:dur="0"/>
     </mc:Choice>
-    <mc:Fallback>
+    <mc:Fallback xmlns="">
       <p:transition/>
     </mc:Fallback>
   </mc:AlternateContent>
@@ -8407,12 +10647,8 @@
           <a:p>
             <a:pPr lvl="1" fontAlgn="t"/>
             <a:r>
-              <a:rPr lang="ja-JP" altLang="en-US" dirty="0"/>
-              <a:t>シナリオ評</a:t>
-            </a:r>
-            <a:r>
               <a:rPr lang="ja-JP" altLang="ja-JP" dirty="0"/>
-              <a:t>・シナリオ評価では「押す／押さない」などの選択結果で評価 </a:t>
+              <a:t>シナリオ評価では「押す／押さない」などの選択結果で評価</a:t>
             </a:r>
             <a:endParaRPr lang="en-US" altLang="ja-JP" dirty="0"/>
           </a:p>
@@ -8472,11 +10708,11 @@
   <p:clrMapOvr>
     <a:masterClrMapping/>
   </p:clrMapOvr>
-  <mc:AlternateContent xmlns:mc="http://schemas.openxmlformats.org/markup-compatibility/2006">
-    <mc:Choice xmlns:p14="http://schemas.microsoft.com/office/powerpoint/2010/main" Requires="p14">
+  <mc:AlternateContent xmlns:mc="http://schemas.openxmlformats.org/markup-compatibility/2006" xmlns:p14="http://schemas.microsoft.com/office/powerpoint/2010/main">
+    <mc:Choice Requires="p14">
       <p:transition p14:dur="0"/>
     </mc:Choice>
-    <mc:Fallback>
+    <mc:Fallback xmlns="">
       <p:transition/>
     </mc:Fallback>
   </mc:AlternateContent>
@@ -8564,13 +10800,13 @@
         </p:nvSpPr>
         <p:spPr>
           <a:xfrm>
-            <a:off x="609599" y="1564639"/>
-            <a:ext cx="11292115" cy="5111931"/>
+            <a:off x="609600" y="1526540"/>
+            <a:ext cx="11468101" cy="5097418"/>
           </a:xfrm>
         </p:spPr>
         <p:txBody>
           <a:bodyPr rtlCol="0">
-            <a:normAutofit lnSpcReduction="10000"/>
+            <a:normAutofit fontScale="92500"/>
           </a:bodyPr>
           <a:lstStyle/>
           <a:p>
@@ -8646,7 +10882,7 @@
             <a:pPr lvl="1" fontAlgn="t"/>
             <a:r>
               <a:rPr lang="ja-JP" altLang="en-US" dirty="0"/>
-              <a:t>ダークパターンの教育終了を伝え、学習報酬を渡すといい</a:t>
+              <a:t>ダークパターンの教育終了を伝え、学習報酬を渡す名目で</a:t>
             </a:r>
             <a:r>
               <a:rPr lang="ja-JP" altLang="ja-JP" dirty="0"/>
@@ -8654,7 +10890,7 @@
             </a:r>
             <a:r>
               <a:rPr lang="ja-JP" altLang="en-US" dirty="0"/>
-              <a:t>を解く。</a:t>
+              <a:t>を弱める。</a:t>
             </a:r>
             <a:endParaRPr lang="en-US" altLang="ja-JP" dirty="0"/>
           </a:p>
@@ -8690,11 +10926,131 @@
   <p:clrMapOvr>
     <a:masterClrMapping/>
   </p:clrMapOvr>
-  <mc:AlternateContent xmlns:mc="http://schemas.openxmlformats.org/markup-compatibility/2006">
-    <mc:Choice xmlns:p14="http://schemas.microsoft.com/office/powerpoint/2010/main" Requires="p14">
+  <mc:AlternateContent xmlns:mc="http://schemas.openxmlformats.org/markup-compatibility/2006" xmlns:p14="http://schemas.microsoft.com/office/powerpoint/2010/main">
+    <mc:Choice Requires="p14">
       <p:transition p14:dur="0"/>
     </mc:Choice>
-    <mc:Fallback>
+    <mc:Fallback xmlns="">
+      <p:transition/>
+    </mc:Fallback>
+  </mc:AlternateContent>
+</p:sld>
+</file>
+
+<file path=ppt/slides/slide9.xml><?xml version="1.0" encoding="utf-8"?>
+<p:sld xmlns:a="http://schemas.openxmlformats.org/drawingml/2006/main" xmlns:r="http://schemas.openxmlformats.org/officeDocument/2006/relationships" xmlns:p="http://schemas.openxmlformats.org/presentationml/2006/main">
+  <p:cSld>
+    <p:spTree>
+      <p:nvGrpSpPr>
+        <p:cNvPr id="1" name="">
+          <a:extLst>
+            <a:ext uri="{FF2B5EF4-FFF2-40B4-BE49-F238E27FC236}">
+              <a16:creationId xmlns:a16="http://schemas.microsoft.com/office/drawing/2014/main" id="{3C444D3E-5E7B-AEF7-B7F7-1F6230DD5F36}"/>
+            </a:ext>
+          </a:extLst>
+        </p:cNvPr>
+        <p:cNvGrpSpPr/>
+        <p:nvPr/>
+      </p:nvGrpSpPr>
+      <p:grpSpPr>
+        <a:xfrm>
+          <a:off x="0" y="0"/>
+          <a:ext cx="0" cy="0"/>
+          <a:chOff x="0" y="0"/>
+          <a:chExt cx="0" cy="0"/>
+        </a:xfrm>
+      </p:grpSpPr>
+      <p:sp>
+        <p:nvSpPr>
+          <p:cNvPr id="3" name="タイトル 2">
+            <a:extLst>
+              <a:ext uri="{FF2B5EF4-FFF2-40B4-BE49-F238E27FC236}">
+                <a16:creationId xmlns:a16="http://schemas.microsoft.com/office/drawing/2014/main" id="{2B227319-C2D0-8DCD-E4AB-1A2E3A1DE6E5}"/>
+              </a:ext>
+            </a:extLst>
+          </p:cNvPr>
+          <p:cNvSpPr>
+            <a:spLocks noGrp="1"/>
+          </p:cNvSpPr>
+          <p:nvPr>
+            <p:ph type="title"/>
+          </p:nvPr>
+        </p:nvSpPr>
+        <p:spPr>
+          <a:xfrm>
+            <a:off x="568960" y="437388"/>
+            <a:ext cx="11054080" cy="606552"/>
+          </a:xfrm>
+        </p:spPr>
+        <p:txBody>
+          <a:bodyPr rtlCol="0">
+            <a:normAutofit fontScale="90000"/>
+          </a:bodyPr>
+          <a:lstStyle/>
+          <a:p>
+            <a:r>
+              <a:rPr lang="ja-JP" altLang="en-US" dirty="0">
+                <a:latin typeface="Meiryo UI" panose="020B0604030504040204" pitchFamily="50" charset="-128"/>
+                <a:ea typeface="Meiryo UI" panose="020B0604030504040204" pitchFamily="50" charset="-128"/>
+              </a:rPr>
+              <a:t>実装中画面（</a:t>
+            </a:r>
+            <a:r>
+              <a:rPr lang="ja-JP" altLang="en-US" b="1" dirty="0"/>
+              <a:t>ダークパターン教育フェーズ）</a:t>
+            </a:r>
+            <a:endParaRPr lang="ja-JP" altLang="en-US" dirty="0">
+              <a:latin typeface="Meiryo UI" panose="020B0604030504040204" pitchFamily="50" charset="-128"/>
+              <a:ea typeface="Meiryo UI" panose="020B0604030504040204" pitchFamily="50" charset="-128"/>
+            </a:endParaRPr>
+          </a:p>
+        </p:txBody>
+      </p:sp>
+      <p:pic>
+        <p:nvPicPr>
+          <p:cNvPr id="5" name="図 4">
+            <a:extLst>
+              <a:ext uri="{FF2B5EF4-FFF2-40B4-BE49-F238E27FC236}">
+                <a16:creationId xmlns:a16="http://schemas.microsoft.com/office/drawing/2014/main" id="{B5CD3832-9B3C-503D-3049-88CB1F2C5AB3}"/>
+              </a:ext>
+            </a:extLst>
+          </p:cNvPr>
+          <p:cNvPicPr>
+            <a:picLocks noChangeAspect="1"/>
+          </p:cNvPicPr>
+          <p:nvPr/>
+        </p:nvPicPr>
+        <p:blipFill>
+          <a:blip r:embed="rId3"/>
+          <a:stretch>
+            <a:fillRect/>
+          </a:stretch>
+        </p:blipFill>
+        <p:spPr>
+          <a:xfrm>
+            <a:off x="1854201" y="1209402"/>
+            <a:ext cx="9137858" cy="5648598"/>
+          </a:xfrm>
+          <a:prstGeom prst="rect">
+            <a:avLst/>
+          </a:prstGeom>
+        </p:spPr>
+      </p:pic>
+    </p:spTree>
+    <p:extLst>
+      <p:ext uri="{BB962C8B-B14F-4D97-AF65-F5344CB8AC3E}">
+        <p14:creationId xmlns:p14="http://schemas.microsoft.com/office/powerpoint/2010/main" val="2842578953"/>
+      </p:ext>
+    </p:extLst>
+  </p:cSld>
+  <p:clrMapOvr>
+    <a:masterClrMapping/>
+  </p:clrMapOvr>
+  <mc:AlternateContent xmlns:mc="http://schemas.openxmlformats.org/markup-compatibility/2006" xmlns:p14="http://schemas.microsoft.com/office/powerpoint/2010/main">
+    <mc:Choice Requires="p14">
+      <p:transition p14:dur="0"/>
+    </mc:Choice>
+    <mc:Fallback xmlns="">
       <p:transition/>
     </mc:Fallback>
   </mc:AlternateContent>
